--- a/deliverables/london-office-market-agent.pptx
+++ b/deliverables/london-office-market-agent.pptx
@@ -3130,7 +3130,7 @@
                 </a:solidFill>
                 <a:latin typeface="Aptos"/>
               </a:rPr>
-              <a:t>LONDON MARKET MONITOR  /  THE BRIEF  ·  DEMO DATA</a:t>
+              <a:t>LONDON MARKET MONITOR  /  THE DECISION  ·  LIVE RESEARCH</a:t>
             </a:r>
           </a:p>
         </p:txBody>
@@ -3200,7 +3200,7 @@
                 </a:solidFill>
                 <a:latin typeface="Georgia"/>
               </a:rPr>
-              <a:t>London office decisions need a trusted starting point</a:t>
+              <a:t>What changed — and what does it mean for a lease?</a:t>
             </a:r>
           </a:p>
         </p:txBody>
@@ -3213,8 +3213,8 @@
         </p:nvSpPr>
         <p:spPr>
           <a:xfrm>
-            <a:off x="640080" y="2057400"/>
-            <a:ext cx="5943600" cy="1280160"/>
+            <a:off x="731520" y="2057400"/>
+            <a:ext cx="5669280" cy="1371600"/>
           </a:xfrm>
           <a:prstGeom prst="rect">
             <a:avLst/>
@@ -3235,8 +3235,8 @@
                 </a:solidFill>
                 <a:latin typeface="Georgia"/>
               </a:rPr>
-              <a:t>The question is rarely
-just a number.</a:t>
+              <a:t>Discover reports.
+Compare the evidence.</a:t>
             </a:r>
           </a:p>
         </p:txBody>
@@ -3249,8 +3249,8 @@
         </p:nvSpPr>
         <p:spPr>
           <a:xfrm>
-            <a:off x="658368" y="3749039"/>
-            <a:ext cx="5303520" cy="914400"/>
+            <a:off x="749808" y="3931920"/>
+            <a:ext cx="5486400" cy="1188720"/>
           </a:xfrm>
           <a:prstGeom prst="rect">
             <a:avLst/>
@@ -3265,13 +3265,13 @@
           <a:p>
             <a:pPr algn="l"/>
             <a:r>
-              <a:rPr sz="1700" b="0">
+              <a:rPr sz="1800" b="0">
                 <a:solidFill>
                   <a:srgbClr val="708087"/>
                 </a:solidFill>
                 <a:latin typeface="Aptos"/>
               </a:rPr>
-              <a:t>Teams need a current view of rents, vacancy, supply and macro context — with the evidence trail attached.</a:t>
+              <a:t>Bring rents, demand, supply and macro context into one research conversation, with the source trail attached.</a:t>
             </a:r>
           </a:p>
         </p:txBody>
@@ -3285,7 +3285,7 @@
         <p:spPr>
           <a:xfrm>
             <a:off x="7315200" y="2011680"/>
-            <a:ext cx="4160520" cy="2926080"/>
+            <a:ext cx="4114800" cy="3200400"/>
           </a:xfrm>
           <a:prstGeom prst="rect">
             <a:avLst/>
@@ -3330,7 +3330,7 @@
         <p:spPr>
           <a:xfrm>
             <a:off x="7516368" y="2194560"/>
-            <a:ext cx="3758183" cy="274320"/>
+            <a:ext cx="3712463" cy="274320"/>
           </a:xfrm>
           <a:prstGeom prst="rect">
             <a:avLst/>
@@ -3351,7 +3351,7 @@
                 </a:solidFill>
                 <a:latin typeface="Aptos"/>
               </a:rPr>
-              <a:t>PRODUCT</a:t>
+              <a:t>BUSINESS QUESTION</a:t>
             </a:r>
           </a:p>
         </p:txBody>
@@ -3365,7 +3365,7 @@
         <p:spPr>
           <a:xfrm>
             <a:off x="7516368" y="2633472"/>
-            <a:ext cx="3758183" cy="2148840"/>
+            <a:ext cx="3712463" cy="2423160"/>
           </a:xfrm>
           <a:prstGeom prst="rect">
             <a:avLst/>
@@ -3386,7 +3386,7 @@
                 </a:solidFill>
                 <a:latin typeface="Aptos"/>
               </a:rPr>
-              <a:t>A local-first monitor that turns a plain-language question into a concise answer, metrics, citations and a run trace.</a:t>
+              <a:t>Where is occupier demand strengthening, and could constrained quality supply change the timing or terms of our next leasing decision?</a:t>
             </a:r>
           </a:p>
         </p:txBody>
@@ -3447,7 +3447,7 @@
                 </a:solidFill>
                 <a:latin typeface="Aptos"/>
               </a:rPr>
-              <a:t>LONDON MARKET MONITOR  /  THE PRODUCT  ·  DEMO DATA</a:t>
+              <a:t>LONDON MARKET MONITOR  /  WORKFLOW  ·  LIVE RESEARCH</a:t>
             </a:r>
           </a:p>
         </p:txBody>
@@ -3517,7 +3517,7 @@
                 </a:solidFill>
                 <a:latin typeface="Georgia"/>
               </a:rPr>
-              <a:t>One path from question to grounded answer</a:t>
+              <a:t>One bounded research loop</a:t>
             </a:r>
           </a:p>
         </p:txBody>
@@ -3530,8 +3530,8 @@
         </p:nvSpPr>
         <p:spPr>
           <a:xfrm>
-            <a:off x="731520" y="2057400"/>
-            <a:ext cx="1828800" cy="2286000"/>
+            <a:off x="731520" y="2103120"/>
+            <a:ext cx="1828800" cy="2743200"/>
           </a:xfrm>
           <a:prstGeom prst="rect">
             <a:avLst/>
@@ -3575,7 +3575,7 @@
         </p:nvSpPr>
         <p:spPr>
           <a:xfrm>
-            <a:off x="932688" y="2240280"/>
+            <a:off x="932688" y="2286000"/>
             <a:ext cx="1426464" cy="274320"/>
           </a:xfrm>
           <a:prstGeom prst="rect">
@@ -3597,7 +3597,7 @@
                 </a:solidFill>
                 <a:latin typeface="Aptos"/>
               </a:rPr>
-              <a:t>ASK</a:t>
+              <a:t>DISCOVER</a:t>
             </a:r>
           </a:p>
         </p:txBody>
@@ -3610,8 +3610,8 @@
         </p:nvSpPr>
         <p:spPr>
           <a:xfrm>
-            <a:off x="932688" y="2679192"/>
-            <a:ext cx="1426464" cy="1508760"/>
+            <a:off x="932688" y="2724912"/>
+            <a:ext cx="1426464" cy="1965960"/>
           </a:xfrm>
           <a:prstGeom prst="rect">
             <a:avLst/>
@@ -3632,7 +3632,7 @@
                 </a:solidFill>
                 <a:latin typeface="Aptos"/>
               </a:rPr>
-              <a:t>Plain-language question</a:t>
+              <a:t>Find broker, official and developer reports</a:t>
             </a:r>
           </a:p>
         </p:txBody>
@@ -3645,8 +3645,8 @@
         </p:nvSpPr>
         <p:spPr>
           <a:xfrm>
-            <a:off x="3063240" y="2057400"/>
-            <a:ext cx="1828800" cy="2286000"/>
+            <a:off x="3063240" y="2103120"/>
+            <a:ext cx="1828800" cy="2743200"/>
           </a:xfrm>
           <a:prstGeom prst="rect">
             <a:avLst/>
@@ -3690,7 +3690,7 @@
         </p:nvSpPr>
         <p:spPr>
           <a:xfrm>
-            <a:off x="3264408" y="2240280"/>
+            <a:off x="3264408" y="2286000"/>
             <a:ext cx="1426464" cy="274320"/>
           </a:xfrm>
           <a:prstGeom prst="rect">
@@ -3712,7 +3712,7 @@
                 </a:solidFill>
                 <a:latin typeface="Aptos"/>
               </a:rPr>
-              <a:t>ROUTE</a:t>
+              <a:t>READ</a:t>
             </a:r>
           </a:p>
         </p:txBody>
@@ -3725,8 +3725,8 @@
         </p:nvSpPr>
         <p:spPr>
           <a:xfrm>
-            <a:off x="3264408" y="2679192"/>
-            <a:ext cx="1426464" cy="1508760"/>
+            <a:off x="3264408" y="2724912"/>
+            <a:ext cx="1426464" cy="1965960"/>
           </a:xfrm>
           <a:prstGeom prst="rect">
             <a:avLst/>
@@ -3747,7 +3747,7 @@
                 </a:solidFill>
                 <a:latin typeface="Aptos"/>
               </a:rPr>
-              <a:t>Skills + typed queries</a:t>
+              <a:t>Extract public pages and text PDFs</a:t>
             </a:r>
           </a:p>
         </p:txBody>
@@ -3760,8 +3760,8 @@
         </p:nvSpPr>
         <p:spPr>
           <a:xfrm>
-            <a:off x="5394960" y="2057400"/>
-            <a:ext cx="1828800" cy="2286000"/>
+            <a:off x="5394960" y="2103120"/>
+            <a:ext cx="1828800" cy="2743200"/>
           </a:xfrm>
           <a:prstGeom prst="rect">
             <a:avLst/>
@@ -3805,7 +3805,7 @@
         </p:nvSpPr>
         <p:spPr>
           <a:xfrm>
-            <a:off x="5596128" y="2240280"/>
+            <a:off x="5596128" y="2286000"/>
             <a:ext cx="1426464" cy="274320"/>
           </a:xfrm>
           <a:prstGeom prst="rect">
@@ -3827,7 +3827,7 @@
                 </a:solidFill>
                 <a:latin typeface="Aptos"/>
               </a:rPr>
-              <a:t>EVIDENCE</a:t>
+              <a:t>COMPARE</a:t>
             </a:r>
           </a:p>
         </p:txBody>
@@ -3840,8 +3840,8 @@
         </p:nvSpPr>
         <p:spPr>
           <a:xfrm>
-            <a:off x="5596128" y="2679192"/>
-            <a:ext cx="1426464" cy="1508760"/>
+            <a:off x="5596128" y="2724912"/>
+            <a:ext cx="1426464" cy="1965960"/>
           </a:xfrm>
           <a:prstGeom prst="rect">
             <a:avLst/>
@@ -3862,7 +3862,7 @@
                 </a:solidFill>
                 <a:latin typeface="Aptos"/>
               </a:rPr>
-              <a:t>SQLite + lexical retrieval</a:t>
+              <a:t>Retrieve passages; align definitions and periods</a:t>
             </a:r>
           </a:p>
         </p:txBody>
@@ -3875,8 +3875,8 @@
         </p:nvSpPr>
         <p:spPr>
           <a:xfrm>
-            <a:off x="7726679" y="2057400"/>
-            <a:ext cx="1828800" cy="2286000"/>
+            <a:off x="7726679" y="2103120"/>
+            <a:ext cx="1828800" cy="2743200"/>
           </a:xfrm>
           <a:prstGeom prst="rect">
             <a:avLst/>
@@ -3920,7 +3920,7 @@
         </p:nvSpPr>
         <p:spPr>
           <a:xfrm>
-            <a:off x="7927848" y="2240280"/>
+            <a:off x="7927848" y="2286000"/>
             <a:ext cx="1426464" cy="274320"/>
           </a:xfrm>
           <a:prstGeom prst="rect">
@@ -3942,7 +3942,7 @@
                 </a:solidFill>
                 <a:latin typeface="Aptos"/>
               </a:rPr>
-              <a:t>VERIFY</a:t>
+              <a:t>EXPLAIN</a:t>
             </a:r>
           </a:p>
         </p:txBody>
@@ -3955,8 +3955,8 @@
         </p:nvSpPr>
         <p:spPr>
           <a:xfrm>
-            <a:off x="7927848" y="2679192"/>
-            <a:ext cx="1426464" cy="1508760"/>
+            <a:off x="7927848" y="2724912"/>
+            <a:ext cx="1426464" cy="1965960"/>
           </a:xfrm>
           <a:prstGeom prst="rect">
             <a:avLst/>
@@ -3977,7 +3977,7 @@
                 </a:solidFill>
                 <a:latin typeface="Aptos"/>
               </a:rPr>
-              <a:t>Source IDs + citations</a:t>
+              <a:t>Separate reported facts from implications</a:t>
             </a:r>
           </a:p>
         </p:txBody>
@@ -3990,8 +3990,8 @@
         </p:nvSpPr>
         <p:spPr>
           <a:xfrm>
-            <a:off x="10058400" y="2057400"/>
-            <a:ext cx="1828800" cy="2286000"/>
+            <a:off x="10058400" y="2103120"/>
+            <a:ext cx="1828800" cy="2743200"/>
           </a:xfrm>
           <a:prstGeom prst="rect">
             <a:avLst/>
@@ -4035,7 +4035,7 @@
         </p:nvSpPr>
         <p:spPr>
           <a:xfrm>
-            <a:off x="10259568" y="2240280"/>
+            <a:off x="10259568" y="2286000"/>
             <a:ext cx="1426464" cy="274320"/>
           </a:xfrm>
           <a:prstGeom prst="rect">
@@ -4057,7 +4057,7 @@
                 </a:solidFill>
                 <a:latin typeface="Aptos"/>
               </a:rPr>
-              <a:t>ANSWER</a:t>
+              <a:t>CHECK</a:t>
             </a:r>
           </a:p>
         </p:txBody>
@@ -4070,8 +4070,8 @@
         </p:nvSpPr>
         <p:spPr>
           <a:xfrm>
-            <a:off x="10259568" y="2679192"/>
-            <a:ext cx="1426464" cy="1508760"/>
+            <a:off x="10259568" y="2724912"/>
+            <a:ext cx="1426464" cy="1965960"/>
           </a:xfrm>
           <a:prstGeom prst="rect">
             <a:avLst/>
@@ -4092,7 +4092,7 @@
                 </a:solidFill>
                 <a:latin typeface="Aptos"/>
               </a:rPr>
-              <a:t>UI, API or CLI</a:t>
+              <a:t>Open citations and inspect missing evidence</a:t>
             </a:r>
           </a:p>
         </p:txBody>
@@ -4105,7 +4105,7 @@
         </p:nvSpPr>
         <p:spPr>
           <a:xfrm>
-            <a:off x="777240" y="5029200"/>
+            <a:off x="777240" y="5349240"/>
             <a:ext cx="10515600" cy="594360"/>
           </a:xfrm>
           <a:prstGeom prst="rect">
@@ -4127,7 +4127,7 @@
                 </a:solidFill>
                 <a:latin typeface="Aptos"/>
               </a:rPr>
-              <a:t>Question  →  intent and skill routing  →  market data + evidence  →  grounded answer with citations</a:t>
+              <a:t>z.ai chooses tools • Firecrawl reads sources • FastEmbed + Qdrant retrieves • SQLite preserves observations</a:t>
             </a:r>
           </a:p>
         </p:txBody>
@@ -4188,7 +4188,7 @@
                 </a:solidFill>
                 <a:latin typeface="Aptos"/>
               </a:rPr>
-              <a:t>LONDON MARKET MONITOR  /  EXAMPLE WORKFLOW  ·  DEMO DATA</a:t>
+              <a:t>LONDON MARKET MONITOR  /  LIVE CHECK  ·  LIVE RESEARCH</a:t>
             </a:r>
           </a:p>
         </p:txBody>
@@ -4258,7 +4258,7 @@
                 </a:solidFill>
                 <a:latin typeface="Georgia"/>
               </a:rPr>
-              <a:t>“What is happening to prime rents in the City?”</a:t>
+              <a:t>A recorded run, with its limits visible</a:t>
             </a:r>
           </a:p>
         </p:txBody>
@@ -4272,7 +4272,7 @@
         <p:spPr>
           <a:xfrm>
             <a:off x="731520" y="1920240"/>
-            <a:ext cx="3291840" cy="3246120"/>
+            <a:ext cx="6400800" cy="3566160"/>
           </a:xfrm>
           <a:prstGeom prst="rect">
             <a:avLst/>
@@ -4317,7 +4317,7 @@
         <p:spPr>
           <a:xfrm>
             <a:off x="932688" y="2103120"/>
-            <a:ext cx="2889504" cy="274320"/>
+            <a:ext cx="5998464" cy="274320"/>
           </a:xfrm>
           <a:prstGeom prst="rect">
             <a:avLst/>
@@ -4338,7 +4338,7 @@
                 </a:solidFill>
                 <a:latin typeface="Aptos"/>
               </a:rPr>
-              <a:t>1  RETRIEVE</a:t>
+              <a:t>ACTUAL MODEL ANSWER</a:t>
             </a:r>
           </a:p>
         </p:txBody>
@@ -4352,7 +4352,7 @@
         <p:spPr>
           <a:xfrm>
             <a:off x="932688" y="2542032"/>
-            <a:ext cx="2889504" cy="2468879"/>
+            <a:ext cx="5998464" cy="2788920"/>
           </a:xfrm>
           <a:prstGeom prst="rect">
             <a:avLst/>
@@ -4373,11 +4373,8 @@
                 </a:solidFill>
                 <a:latin typeface="Aptos"/>
               </a:rPr>
-              <a:t>Metric query
-City · prime_rent
-Latest stored period
-Evidence search
-City + current</a:t>
+              <a:t>Per the stored JLL 'Central London Office Market Dynamics Q2 2026' report, take-up reached 2.6 million sq.ft. in Q2 2026, up 15% quarter-on-quarter and above the 10-year average, led by a strong West End performance.
+Implication: with take-up above its 10-year average while supply shrinks and the construction pipeline thins, occupiers with defined requirements may benefit from starting searches and committing earlier, as choice and negotiating leverage could diminish.</a:t>
             </a:r>
           </a:p>
         </p:txBody>
@@ -4390,8 +4387,8 @@
         </p:nvSpPr>
         <p:spPr>
           <a:xfrm>
-            <a:off x="4434840" y="1920240"/>
-            <a:ext cx="3291840" cy="3246120"/>
+            <a:off x="7498079" y="1920240"/>
+            <a:ext cx="3931920" cy="3566160"/>
           </a:xfrm>
           <a:prstGeom prst="rect">
             <a:avLst/>
@@ -4435,8 +4432,8 @@
         </p:nvSpPr>
         <p:spPr>
           <a:xfrm>
-            <a:off x="4636007" y="2103120"/>
-            <a:ext cx="2889504" cy="274320"/>
+            <a:off x="7699248" y="2103120"/>
+            <a:ext cx="3529584" cy="274320"/>
           </a:xfrm>
           <a:prstGeom prst="rect">
             <a:avLst/>
@@ -4457,7 +4454,7 @@
                 </a:solidFill>
                 <a:latin typeface="Aptos"/>
               </a:rPr>
-              <a:t>2  COMBINE</a:t>
+              <a:t>EVIDENCE TRAIL</a:t>
             </a:r>
           </a:p>
         </p:txBody>
@@ -4470,8 +4467,8 @@
         </p:nvSpPr>
         <p:spPr>
           <a:xfrm>
-            <a:off x="4636007" y="2542032"/>
-            <a:ext cx="2889504" cy="2468879"/>
+            <a:off x="7699248" y="2542032"/>
+            <a:ext cx="3529584" cy="2788920"/>
           </a:xfrm>
           <a:prstGeom prst="rect">
             <a:avLst/>
@@ -4492,67 +4489,25 @@
                 </a:solidFill>
                 <a:latin typeface="Aptos"/>
               </a:rPr>
-              <a:t>City prime rent: 85 GBP/sq ft/year (2026-Q1)
-Evidence snapshot: stored demo data, not a live feed.</a:t>
-            </a:r>
-          </a:p>
-        </p:txBody>
-      </p:sp>
-      <p:sp>
-        <p:nvSpPr>
-          <p:cNvPr id="11" name="Rectangle 10"/>
-          <p:cNvSpPr/>
-          <p:nvPr/>
-        </p:nvSpPr>
-        <p:spPr>
-          <a:xfrm>
-            <a:off x="8138160" y="1920240"/>
-            <a:ext cx="3291840" cy="3246120"/>
-          </a:xfrm>
-          <a:prstGeom prst="rect">
-            <a:avLst/>
-          </a:prstGeom>
-          <a:solidFill>
-            <a:srgbClr val="FFFDF8"/>
-          </a:solidFill>
-          <a:ln>
-            <a:solidFill>
-              <a:srgbClr val="D7D5CB"/>
-            </a:solidFill>
-          </a:ln>
-        </p:spPr>
-        <p:style>
-          <a:lnRef idx="1">
-            <a:schemeClr val="accent1"/>
-          </a:lnRef>
-          <a:fillRef idx="3">
-            <a:schemeClr val="accent1"/>
-          </a:fillRef>
-          <a:effectRef idx="2">
-            <a:schemeClr val="accent1"/>
-          </a:effectRef>
-          <a:fontRef idx="minor">
-            <a:schemeClr val="lt1"/>
-          </a:fontRef>
-        </p:style>
-        <p:txBody>
-          <a:bodyPr rtlCol="0" anchor="ctr"/>
-          <a:lstStyle/>
-          <a:p>
-            <a:pPr algn="ctr"/>
-          </a:p>
-        </p:txBody>
-      </p:sp>
-      <p:sp>
-        <p:nvSpPr>
-          <p:cNvPr id="12" name="TextBox 11"/>
+              <a:t>1 cited source(s) · incomplete
+search_web
+query_market_metrics
+search_market_evidence
+Directly ingested public report. Local vector check. Firecrawl was not used in this run.</a:t>
+            </a:r>
+          </a:p>
+        </p:txBody>
+      </p:sp>
+      <p:sp>
+        <p:nvSpPr>
+          <p:cNvPr id="11" name="TextBox 10"/>
           <p:cNvSpPr txBox="1"/>
           <p:nvPr/>
         </p:nvSpPr>
         <p:spPr>
           <a:xfrm>
-            <a:off x="8339328" y="2103120"/>
-            <a:ext cx="2889504" cy="274320"/>
+            <a:off x="777240" y="5897880"/>
+            <a:ext cx="10607040" cy="457200"/>
           </a:xfrm>
           <a:prstGeom prst="rect">
             <a:avLst/>
@@ -4567,50 +4522,13 @@
           <a:p>
             <a:pPr algn="l"/>
             <a:r>
-              <a:rPr sz="900" b="1">
-                <a:solidFill>
-                  <a:srgbClr val="1B8077"/>
+              <a:rPr sz="1000" b="0">
+                <a:solidFill>
+                  <a:srgbClr val="708087"/>
                 </a:solidFill>
                 <a:latin typeface="Aptos"/>
               </a:rPr>
-              <a:t>3  RETURN</a:t>
-            </a:r>
-          </a:p>
-        </p:txBody>
-      </p:sp>
-      <p:sp>
-        <p:nvSpPr>
-          <p:cNvPr id="13" name="TextBox 12"/>
-          <p:cNvSpPr txBox="1"/>
-          <p:nvPr/>
-        </p:nvSpPr>
-        <p:spPr>
-          <a:xfrm>
-            <a:off x="8339328" y="2542032"/>
-            <a:ext cx="2889504" cy="2468879"/>
-          </a:xfrm>
-          <a:prstGeom prst="rect">
-            <a:avLst/>
-          </a:prstGeom>
-          <a:noFill/>
-        </p:spPr>
-        <p:txBody>
-          <a:bodyPr wrap="square" lIns="18288" rIns="18288" anchor="t">
-            <a:spAutoFit/>
-          </a:bodyPr>
-          <a:lstStyle/>
-          <a:p>
-            <a:pPr algn="l"/>
-            <a:r>
-              <a:rPr sz="1500" b="0">
-                <a:solidFill>
-                  <a:srgbClr val="102331"/>
-                </a:solidFill>
-                <a:latin typeface="Aptos"/>
-              </a:rPr>
-              <a:t>Answer with [1] citations
-Publisher + date + URL
-Trace: metrics · evidence · verify</a:t>
+              <a:t>Source: https://www.jll.com/en-uk/insights/market-dynamics/central-london-office</a:t>
             </a:r>
           </a:p>
         </p:txBody>
@@ -4671,7 +4589,7 @@
                 </a:solidFill>
                 <a:latin typeface="Aptos"/>
               </a:rPr>
-              <a:t>LONDON MARKET MONITOR  /  TRUST  ·  DEMO DATA</a:t>
+              <a:t>LONDON MARKET MONITOR  /  CHANGE BRIEFING  ·  LIVE RESEARCH</a:t>
             </a:r>
           </a:p>
         </p:txBody>
@@ -4741,7 +4659,7 @@
                 </a:solidFill>
                 <a:latin typeface="Georgia"/>
               </a:rPr>
-              <a:t>Reliability is part of the answer</a:t>
+              <a:t>Separate a changed market from a changed source</a:t>
             </a:r>
           </a:p>
         </p:txBody>
@@ -4755,7 +4673,7 @@
         <p:spPr>
           <a:xfrm>
             <a:off x="731520" y="1965960"/>
-            <a:ext cx="4892040" cy="1417320"/>
+            <a:ext cx="4892040" cy="1645920"/>
           </a:xfrm>
           <a:prstGeom prst="rect">
             <a:avLst/>
@@ -4821,7 +4739,7 @@
                 </a:solidFill>
                 <a:latin typeface="Aptos"/>
               </a:rPr>
-              <a:t>TYPED</a:t>
+              <a:t>NEW REPORT</a:t>
             </a:r>
           </a:p>
         </p:txBody>
@@ -4835,7 +4753,7 @@
         <p:spPr>
           <a:xfrm>
             <a:off x="932688" y="2587752"/>
-            <a:ext cx="4489703" cy="640080"/>
+            <a:ext cx="4489703" cy="868680"/>
           </a:xfrm>
           <a:prstGeom prst="rect">
             <a:avLst/>
@@ -4856,7 +4774,7 @@
                 </a:solidFill>
                 <a:latin typeface="Aptos"/>
               </a:rPr>
-              <a:t>Pydantic contracts at every boundary</a:t>
+              <a:t>Discoveries establish coverage; they do not alone prove market movement.</a:t>
             </a:r>
           </a:p>
         </p:txBody>
@@ -4870,7 +4788,7 @@
         <p:spPr>
           <a:xfrm>
             <a:off x="6263640" y="1965960"/>
-            <a:ext cx="4892040" cy="1417320"/>
+            <a:ext cx="4892040" cy="1645920"/>
           </a:xfrm>
           <a:prstGeom prst="rect">
             <a:avLst/>
@@ -4936,7 +4854,7 @@
                 </a:solidFill>
                 <a:latin typeface="Aptos"/>
               </a:rPr>
-              <a:t>BOUNDED</a:t>
+              <a:t>REVISED CONTENT</a:t>
             </a:r>
           </a:p>
         </p:txBody>
@@ -4950,7 +4868,7 @@
         <p:spPr>
           <a:xfrm>
             <a:off x="6464807" y="2587752"/>
-            <a:ext cx="4489703" cy="640080"/>
+            <a:ext cx="4489703" cy="868680"/>
           </a:xfrm>
           <a:prstGeom prst="rect">
             <a:avLst/>
@@ -4971,7 +4889,7 @@
                 </a:solidFill>
                 <a:latin typeface="Aptos"/>
               </a:rPr>
-              <a:t>Parameterized, limited queries</a:t>
+              <a:t>Same URL, different checksum: retain both versions and source IDs.</a:t>
             </a:r>
           </a:p>
         </p:txBody>
@@ -4984,8 +4902,8 @@
         </p:nvSpPr>
         <p:spPr>
           <a:xfrm>
-            <a:off x="731520" y="3657600"/>
-            <a:ext cx="4892040" cy="1417320"/>
+            <a:off x="731520" y="3749039"/>
+            <a:ext cx="4892040" cy="1645920"/>
           </a:xfrm>
           <a:prstGeom prst="rect">
             <a:avLst/>
@@ -5029,7 +4947,7 @@
         </p:nvSpPr>
         <p:spPr>
           <a:xfrm>
-            <a:off x="932688" y="3840480"/>
+            <a:off x="932688" y="3931920"/>
             <a:ext cx="4489703" cy="274320"/>
           </a:xfrm>
           <a:prstGeom prst="rect">
@@ -5051,7 +4969,7 @@
                 </a:solidFill>
                 <a:latin typeface="Aptos"/>
               </a:rPr>
-              <a:t>GROUNDED</a:t>
+              <a:t>COMPARABLE CHANGE</a:t>
             </a:r>
           </a:p>
         </p:txBody>
@@ -5064,8 +4982,8 @@
         </p:nvSpPr>
         <p:spPr>
           <a:xfrm>
-            <a:off x="932688" y="4279392"/>
-            <a:ext cx="4489703" cy="640080"/>
+            <a:off x="932688" y="4370831"/>
+            <a:ext cx="4489703" cy="868680"/>
           </a:xfrm>
           <a:prstGeom prst="rect">
             <a:avLst/>
@@ -5086,7 +5004,7 @@
                 </a:solidFill>
                 <a:latin typeface="Aptos"/>
               </a:rPr>
-              <a:t>Unknown claims are rejected</a:t>
+              <a:t>Match units, periods and definitions; calculate differences in code.</a:t>
             </a:r>
           </a:p>
         </p:txBody>
@@ -5099,8 +5017,8 @@
         </p:nvSpPr>
         <p:spPr>
           <a:xfrm>
-            <a:off x="6263640" y="3657600"/>
-            <a:ext cx="4892040" cy="1417320"/>
+            <a:off x="6263640" y="3749039"/>
+            <a:ext cx="4892040" cy="1645920"/>
           </a:xfrm>
           <a:prstGeom prst="rect">
             <a:avLst/>
@@ -5144,7 +5062,7 @@
         </p:nvSpPr>
         <p:spPr>
           <a:xfrm>
-            <a:off x="6464807" y="3840480"/>
+            <a:off x="6464807" y="3931920"/>
             <a:ext cx="4489703" cy="274320"/>
           </a:xfrm>
           <a:prstGeom prst="rect">
@@ -5166,7 +5084,7 @@
                 </a:solidFill>
                 <a:latin typeface="Aptos"/>
               </a:rPr>
-              <a:t>TRANSPARENT</a:t>
+              <a:t>BUSINESS IMPLICATION</a:t>
             </a:r>
           </a:p>
         </p:txBody>
@@ -5179,8 +5097,8 @@
         </p:nvSpPr>
         <p:spPr>
           <a:xfrm>
-            <a:off x="6464807" y="4279392"/>
-            <a:ext cx="4489703" cy="640080"/>
+            <a:off x="6464807" y="4370831"/>
+            <a:ext cx="4489703" cy="868680"/>
           </a:xfrm>
           <a:prstGeom prst="rect">
             <a:avLst/>
@@ -5201,7 +5119,7 @@
                 </a:solidFill>
                 <a:latin typeface="Aptos"/>
               </a:rPr>
-              <a:t>Warnings, trace and demo label</a:t>
+              <a:t>Qualify timing and supply risks; expose disagreement and collection gaps.</a:t>
             </a:r>
           </a:p>
         </p:txBody>
@@ -5262,7 +5180,7 @@
                 </a:solidFill>
                 <a:latin typeface="Aptos"/>
               </a:rPr>
-              <a:t>LONDON MARKET MONITOR  /  NEXT  ·  DEMO DATA</a:t>
+              <a:t>LONDON MARKET MONITOR  /  READINESS  ·  LIVE RESEARCH</a:t>
             </a:r>
           </a:p>
         </p:txBody>
@@ -5332,7 +5250,7 @@
                 </a:solidFill>
                 <a:latin typeface="Georgia"/>
               </a:rPr>
-              <a:t>A focused PoC with a clear production path</a:t>
+              <a:t>Implemented; full live readiness still needs verification</a:t>
             </a:r>
           </a:p>
         </p:txBody>
@@ -5346,7 +5264,7 @@
         <p:spPr>
           <a:xfrm>
             <a:off x="731520" y="1920240"/>
-            <a:ext cx="3337560" cy="3200400"/>
+            <a:ext cx="3337560" cy="3474720"/>
           </a:xfrm>
           <a:prstGeom prst="rect">
             <a:avLst/>
@@ -5412,7 +5330,7 @@
                 </a:solidFill>
                 <a:latin typeface="Aptos"/>
               </a:rPr>
-              <a:t>TODAY · POC</a:t>
+              <a:t>DELIVERED</a:t>
             </a:r>
           </a:p>
         </p:txBody>
@@ -5426,7 +5344,7 @@
         <p:spPr>
           <a:xfrm>
             <a:off x="932688" y="2542032"/>
-            <a:ext cx="2935224" cy="2423160"/>
+            <a:ext cx="2935224" cy="2697479"/>
           </a:xfrm>
           <a:prstGeom prst="rect">
             <a:avLst/>
@@ -5447,11 +5365,11 @@
                 </a:solidFill>
                 <a:latin typeface="Aptos"/>
               </a:rPr>
-              <a:t>Offline by default
-Synthetic seed data
-Hashed lexical vectors
-One local worker
-Text ingestion</a:t>
+              <a:t>Tool-driven chat
+Semantic evidence
+Manual refresh + briefing
+Source versions + citations
+Explicit demo isolation</a:t>
             </a:r>
           </a:p>
         </p:txBody>
@@ -5465,7 +5383,7 @@
         <p:spPr>
           <a:xfrm>
             <a:off x="4434840" y="1920240"/>
-            <a:ext cx="3337560" cy="3200400"/>
+            <a:ext cx="3337560" cy="3474720"/>
           </a:xfrm>
           <a:prstGeom prst="rect">
             <a:avLst/>
@@ -5531,7 +5449,7 @@
                 </a:solidFill>
                 <a:latin typeface="Aptos"/>
               </a:rPr>
-              <a:t>NEXT · HARDEN</a:t>
+              <a:t>VERIFIED</a:t>
             </a:r>
           </a:p>
         </p:txBody>
@@ -5545,7 +5463,7 @@
         <p:spPr>
           <a:xfrm>
             <a:off x="4636007" y="2542032"/>
-            <a:ext cx="2935224" cy="2423160"/>
+            <a:ext cx="2935224" cy="2697479"/>
           </a:xfrm>
           <a:prstGeom prst="rect">
             <a:avLst/>
@@ -5566,11 +5484,11 @@
                 </a:solidFill>
                 <a:latin typeface="Aptos"/>
               </a:rPr>
-              <a:t>Curated connectors
-Freshness SLAs
-Stronger embeddings
-Server storage
-Access control</a:t>
+              <a:t>Automated grounding tests
+Deterministic evaluation
+Real model tool calls
+Real semantic retrieval
+Compose configuration</a:t>
             </a:r>
           </a:p>
         </p:txBody>
@@ -5584,7 +5502,7 @@
         <p:spPr>
           <a:xfrm>
             <a:off x="8138160" y="1920240"/>
-            <a:ext cx="3337560" cy="3200400"/>
+            <a:ext cx="3337560" cy="3474720"/>
           </a:xfrm>
           <a:prstGeom prst="rect">
             <a:avLst/>
@@ -5650,7 +5568,7 @@
                 </a:solidFill>
                 <a:latin typeface="Aptos"/>
               </a:rPr>
-              <a:t>MEASURE · PROVE</a:t>
+              <a:t>REMAINING BLOCKER</a:t>
             </a:r>
           </a:p>
         </p:txBody>
@@ -5664,7 +5582,7 @@
         <p:spPr>
           <a:xfrm>
             <a:off x="8339328" y="2542032"/>
-            <a:ext cx="2935224" cy="2423160"/>
+            <a:ext cx="2935224" cy="2697479"/>
           </a:xfrm>
           <a:prstGeom prst="rect">
             <a:avLst/>
@@ -5685,11 +5603,8 @@
                 </a:solidFill>
                 <a:latin typeface="Aptos"/>
               </a:rPr>
-              <a:t>Citation coverage
-Retrieval relevance
-Latency by route
-Provider fallback
-User feedback</a:t>
+              <a:t>Free host disk capacity and restore Docker health.
+Then verify Firecrawl search + scrape, full Compose startup and persistence.</a:t>
             </a:r>
           </a:p>
         </p:txBody>

--- a/deliverables/london-office-market-agent.pptx
+++ b/deliverables/london-office-market-agent.pptx
@@ -3130,7 +3130,7 @@
                 </a:solidFill>
                 <a:latin typeface="Aptos"/>
               </a:rPr>
-              <a:t>LONDON MARKET MONITOR  /  THE DECISION  ·  LIVE RESEARCH</a:t>
+              <a:t>LONDON MARKET MONITOR  /  THE PROBLEM  ·  MARKET INTELLIGENCE</a:t>
             </a:r>
           </a:p>
         </p:txBody>
@@ -3200,7 +3200,7 @@
                 </a:solidFill>
                 <a:latin typeface="Georgia"/>
               </a:rPr>
-              <a:t>What changed — and what does it mean for a lease?</a:t>
+              <a:t>Too much reading. Too little time to interpret.</a:t>
             </a:r>
           </a:p>
         </p:txBody>
@@ -3213,8 +3213,8 @@
         </p:nvSpPr>
         <p:spPr>
           <a:xfrm>
-            <a:off x="731520" y="2057400"/>
-            <a:ext cx="5669280" cy="1371600"/>
+            <a:off x="731520" y="2011680"/>
+            <a:ext cx="5577840" cy="1554480"/>
           </a:xfrm>
           <a:prstGeom prst="rect">
             <a:avLst/>
@@ -3229,14 +3229,14 @@
           <a:p>
             <a:pPr algn="l"/>
             <a:r>
-              <a:rPr sz="3200" b="1">
+              <a:rPr sz="3100" b="1">
                 <a:solidFill>
                   <a:srgbClr val="102331"/>
                 </a:solidFill>
                 <a:latin typeface="Georgia"/>
               </a:rPr>
-              <a:t>Discover reports.
-Compare the evidence.</a:t>
+              <a:t>Reports, headlines, macro data.
+One decision to prepare for.</a:t>
             </a:r>
           </a:p>
         </p:txBody>
@@ -3249,8 +3249,8 @@
         </p:nvSpPr>
         <p:spPr>
           <a:xfrm>
-            <a:off x="749808" y="3931920"/>
-            <a:ext cx="5486400" cy="1188720"/>
+            <a:off x="749808" y="3977639"/>
+            <a:ext cx="5394960" cy="1188720"/>
           </a:xfrm>
           <a:prstGeom prst="rect">
             <a:avLst/>
@@ -3271,7 +3271,7 @@
                 </a:solidFill>
                 <a:latin typeface="Aptos"/>
               </a:rPr>
-              <a:t>Bring rents, demand, supply and macro context into one research conversation, with the source trail attached.</a:t>
+              <a:t>Teams repeatedly find reports, reconcile periods and rebuild the same evidence trail. The important change can be buried in a familiar market summary.</a:t>
             </a:r>
           </a:p>
         </p:txBody>
@@ -3284,8 +3284,8 @@
         </p:nvSpPr>
         <p:spPr>
           <a:xfrm>
-            <a:off x="7315200" y="2011680"/>
-            <a:ext cx="4114800" cy="3200400"/>
+            <a:off x="6858000" y="2011680"/>
+            <a:ext cx="4572000" cy="3383280"/>
           </a:xfrm>
           <a:prstGeom prst="rect">
             <a:avLst/>
@@ -3329,8 +3329,8 @@
         </p:nvSpPr>
         <p:spPr>
           <a:xfrm>
-            <a:off x="7516368" y="2194560"/>
-            <a:ext cx="3712463" cy="274320"/>
+            <a:off x="7059168" y="2194560"/>
+            <a:ext cx="4169663" cy="274320"/>
           </a:xfrm>
           <a:prstGeom prst="rect">
             <a:avLst/>
@@ -3351,7 +3351,7 @@
                 </a:solidFill>
                 <a:latin typeface="Aptos"/>
               </a:rPr>
-              <a:t>BUSINESS QUESTION</a:t>
+              <a:t>THE BUSINESS OUTCOME</a:t>
             </a:r>
           </a:p>
         </p:txBody>
@@ -3364,8 +3364,8 @@
         </p:nvSpPr>
         <p:spPr>
           <a:xfrm>
-            <a:off x="7516368" y="2633472"/>
-            <a:ext cx="3712463" cy="2423160"/>
+            <a:off x="7059168" y="2633472"/>
+            <a:ext cx="4169663" cy="2606040"/>
           </a:xfrm>
           <a:prstGeom prst="rect">
             <a:avLst/>
@@ -3386,7 +3386,8 @@
                 </a:solidFill>
                 <a:latin typeface="Aptos"/>
               </a:rPr>
-              <a:t>Where is occupier demand strengthening, and could constrained quality supply change the timing or terms of our next leasing decision?</a:t>
+              <a:t>Move from raw information to important changes, plausible drivers and implications worth investigating.
+Bring the evidence into the meeting, with the uncertainty intact.</a:t>
             </a:r>
           </a:p>
         </p:txBody>
@@ -3447,7 +3448,7 @@
                 </a:solidFill>
                 <a:latin typeface="Aptos"/>
               </a:rPr>
-              <a:t>LONDON MARKET MONITOR  /  WORKFLOW  ·  LIVE RESEARCH</a:t>
+              <a:t>LONDON MARKET MONITOR  /  THE WORKFLOW  ·  MARKET INTELLIGENCE</a:t>
             </a:r>
           </a:p>
         </p:txBody>
@@ -3517,7 +3518,7 @@
                 </a:solidFill>
                 <a:latin typeface="Georgia"/>
               </a:rPr>
-              <a:t>One bounded research loop</a:t>
+              <a:t>Ask what changed. Leave ready to discuss it.</a:t>
             </a:r>
           </a:p>
         </p:txBody>
@@ -3530,8 +3531,8 @@
         </p:nvSpPr>
         <p:spPr>
           <a:xfrm>
-            <a:off x="731520" y="2103120"/>
-            <a:ext cx="1828800" cy="2743200"/>
+            <a:off x="731520" y="2011680"/>
+            <a:ext cx="3337560" cy="3291840"/>
           </a:xfrm>
           <a:prstGeom prst="rect">
             <a:avLst/>
@@ -3575,8 +3576,8 @@
         </p:nvSpPr>
         <p:spPr>
           <a:xfrm>
-            <a:off x="932688" y="2286000"/>
-            <a:ext cx="1426464" cy="274320"/>
+            <a:off x="932688" y="2194560"/>
+            <a:ext cx="2935224" cy="274320"/>
           </a:xfrm>
           <a:prstGeom prst="rect">
             <a:avLst/>
@@ -3597,7 +3598,7 @@
                 </a:solidFill>
                 <a:latin typeface="Aptos"/>
               </a:rPr>
-              <a:t>DISCOVER</a:t>
+              <a:t>MONITOR</a:t>
             </a:r>
           </a:p>
         </p:txBody>
@@ -3610,8 +3611,8 @@
         </p:nvSpPr>
         <p:spPr>
           <a:xfrm>
-            <a:off x="932688" y="2724912"/>
-            <a:ext cx="1426464" cy="1965960"/>
+            <a:off x="932688" y="2633472"/>
+            <a:ext cx="2935224" cy="2514600"/>
           </a:xfrm>
           <a:prstGeom prst="rect">
             <a:avLst/>
@@ -3632,7 +3633,8 @@
                 </a:solidFill>
                 <a:latin typeface="Aptos"/>
               </a:rPr>
-              <a:t>Find broker, official and developer reports</a:t>
+              <a:t>What happened since I last checked?
+Material movements, new evidence and changing risks, compared with an explicit baseline.</a:t>
             </a:r>
           </a:p>
         </p:txBody>
@@ -3645,8 +3647,8 @@
         </p:nvSpPr>
         <p:spPr>
           <a:xfrm>
-            <a:off x="3063240" y="2103120"/>
-            <a:ext cx="1828800" cy="2743200"/>
+            <a:off x="4434840" y="2011680"/>
+            <a:ext cx="3337560" cy="3291840"/>
           </a:xfrm>
           <a:prstGeom prst="rect">
             <a:avLst/>
@@ -3690,8 +3692,8 @@
         </p:nvSpPr>
         <p:spPr>
           <a:xfrm>
-            <a:off x="3264408" y="2286000"/>
-            <a:ext cx="1426464" cy="274320"/>
+            <a:off x="4636007" y="2194560"/>
+            <a:ext cx="2935224" cy="274320"/>
           </a:xfrm>
           <a:prstGeom prst="rect">
             <a:avLst/>
@@ -3712,7 +3714,7 @@
                 </a:solidFill>
                 <a:latin typeface="Aptos"/>
               </a:rPr>
-              <a:t>READ</a:t>
+              <a:t>INVESTIGATE</a:t>
             </a:r>
           </a:p>
         </p:txBody>
@@ -3725,8 +3727,8 @@
         </p:nvSpPr>
         <p:spPr>
           <a:xfrm>
-            <a:off x="3264408" y="2724912"/>
-            <a:ext cx="1426464" cy="1965960"/>
+            <a:off x="4636007" y="2633472"/>
+            <a:ext cx="2935224" cy="2514600"/>
           </a:xfrm>
           <a:prstGeom prst="rect">
             <a:avLst/>
@@ -3747,7 +3749,8 @@
                 </a:solidFill>
                 <a:latin typeface="Aptos"/>
               </a:rPr>
-              <a:t>Extract public pages and text PDFs</a:t>
+              <a:t>I heard West End is outperforming City. Is it true?
+Test the claim across rents, vacancy, demand, supply and commentary.</a:t>
             </a:r>
           </a:p>
         </p:txBody>
@@ -3760,8 +3763,8 @@
         </p:nvSpPr>
         <p:spPr>
           <a:xfrm>
-            <a:off x="5394960" y="2103120"/>
-            <a:ext cx="1828800" cy="2743200"/>
+            <a:off x="8138160" y="2011680"/>
+            <a:ext cx="3337560" cy="3291840"/>
           </a:xfrm>
           <a:prstGeom prst="rect">
             <a:avLst/>
@@ -3805,8 +3808,8 @@
         </p:nvSpPr>
         <p:spPr>
           <a:xfrm>
-            <a:off x="5596128" y="2286000"/>
-            <a:ext cx="1426464" cy="274320"/>
+            <a:off x="8339328" y="2194560"/>
+            <a:ext cx="2935224" cy="274320"/>
           </a:xfrm>
           <a:prstGeom prst="rect">
             <a:avLst/>
@@ -3827,7 +3830,7 @@
                 </a:solidFill>
                 <a:latin typeface="Aptos"/>
               </a:rPr>
-              <a:t>COMPARE</a:t>
+              <a:t>PREPARE</a:t>
             </a:r>
           </a:p>
         </p:txBody>
@@ -3840,8 +3843,8 @@
         </p:nvSpPr>
         <p:spPr>
           <a:xfrm>
-            <a:off x="5596128" y="2724912"/>
-            <a:ext cx="1426464" cy="1965960"/>
+            <a:off x="8339328" y="2633472"/>
+            <a:ext cx="2935224" cy="2514600"/>
           </a:xfrm>
           <a:prstGeom prst="rect">
             <a:avLst/>
@@ -3862,66 +3865,22 @@
                 </a:solidFill>
                 <a:latin typeface="Aptos"/>
               </a:rPr>
-              <a:t>Retrieve passages; align definitions and periods</a:t>
-            </a:r>
-          </a:p>
-        </p:txBody>
-      </p:sp>
-      <p:sp>
-        <p:nvSpPr>
-          <p:cNvPr id="14" name="Rectangle 13"/>
-          <p:cNvSpPr/>
-          <p:nvPr/>
-        </p:nvSpPr>
-        <p:spPr>
-          <a:xfrm>
-            <a:off x="7726679" y="2103120"/>
-            <a:ext cx="1828800" cy="2743200"/>
-          </a:xfrm>
-          <a:prstGeom prst="rect">
-            <a:avLst/>
-          </a:prstGeom>
-          <a:solidFill>
-            <a:srgbClr val="193340"/>
-          </a:solidFill>
-          <a:ln>
-            <a:solidFill>
-              <a:srgbClr val="38545E"/>
-            </a:solidFill>
-          </a:ln>
-        </p:spPr>
-        <p:style>
-          <a:lnRef idx="1">
-            <a:schemeClr val="accent1"/>
-          </a:lnRef>
-          <a:fillRef idx="3">
-            <a:schemeClr val="accent1"/>
-          </a:fillRef>
-          <a:effectRef idx="2">
-            <a:schemeClr val="accent1"/>
-          </a:effectRef>
-          <a:fontRef idx="minor">
-            <a:schemeClr val="lt1"/>
-          </a:fontRef>
-        </p:style>
-        <p:txBody>
-          <a:bodyPr rtlCol="0" anchor="ctr"/>
-          <a:lstStyle/>
-          <a:p>
-            <a:pPr algn="ctr"/>
-          </a:p>
-        </p:txBody>
-      </p:sp>
-      <p:sp>
-        <p:nvSpPr>
-          <p:cNvPr id="15" name="TextBox 14"/>
+              <a:t>What belongs in my meeting brief?
+Up to five developments, their business implications and the sources to verify them.</a:t>
+            </a:r>
+          </a:p>
+        </p:txBody>
+      </p:sp>
+      <p:sp>
+        <p:nvSpPr>
+          <p:cNvPr id="14" name="TextBox 13"/>
           <p:cNvSpPr txBox="1"/>
           <p:nvPr/>
         </p:nvSpPr>
         <p:spPr>
           <a:xfrm>
-            <a:off x="7927848" y="2286000"/>
-            <a:ext cx="1426464" cy="274320"/>
+            <a:off x="777240" y="5577840"/>
+            <a:ext cx="10698480" cy="548640"/>
           </a:xfrm>
           <a:prstGeom prst="rect">
             <a:avLst/>
@@ -3936,198 +3895,13 @@
           <a:p>
             <a:pPr algn="l"/>
             <a:r>
-              <a:rPr sz="900" b="1">
-                <a:solidFill>
-                  <a:srgbClr val="A4D4CD"/>
+              <a:rPr sz="1500" b="0">
+                <a:solidFill>
+                  <a:srgbClr val="F4F1EA"/>
                 </a:solidFill>
                 <a:latin typeface="Aptos"/>
               </a:rPr>
-              <a:t>EXPLAIN</a:t>
-            </a:r>
-          </a:p>
-        </p:txBody>
-      </p:sp>
-      <p:sp>
-        <p:nvSpPr>
-          <p:cNvPr id="16" name="TextBox 15"/>
-          <p:cNvSpPr txBox="1"/>
-          <p:nvPr/>
-        </p:nvSpPr>
-        <p:spPr>
-          <a:xfrm>
-            <a:off x="7927848" y="2724912"/>
-            <a:ext cx="1426464" cy="1965960"/>
-          </a:xfrm>
-          <a:prstGeom prst="rect">
-            <a:avLst/>
-          </a:prstGeom>
-          <a:noFill/>
-        </p:spPr>
-        <p:txBody>
-          <a:bodyPr wrap="square" lIns="18288" rIns="18288" anchor="t">
-            <a:spAutoFit/>
-          </a:bodyPr>
-          <a:lstStyle/>
-          <a:p>
-            <a:pPr algn="l"/>
-            <a:r>
-              <a:rPr sz="1500" b="0">
-                <a:solidFill>
-                  <a:srgbClr val="F4F1EA"/>
-                </a:solidFill>
-                <a:latin typeface="Aptos"/>
-              </a:rPr>
-              <a:t>Separate reported facts from implications</a:t>
-            </a:r>
-          </a:p>
-        </p:txBody>
-      </p:sp>
-      <p:sp>
-        <p:nvSpPr>
-          <p:cNvPr id="17" name="Rectangle 16"/>
-          <p:cNvSpPr/>
-          <p:nvPr/>
-        </p:nvSpPr>
-        <p:spPr>
-          <a:xfrm>
-            <a:off x="10058400" y="2103120"/>
-            <a:ext cx="1828800" cy="2743200"/>
-          </a:xfrm>
-          <a:prstGeom prst="rect">
-            <a:avLst/>
-          </a:prstGeom>
-          <a:solidFill>
-            <a:srgbClr val="193340"/>
-          </a:solidFill>
-          <a:ln>
-            <a:solidFill>
-              <a:srgbClr val="38545E"/>
-            </a:solidFill>
-          </a:ln>
-        </p:spPr>
-        <p:style>
-          <a:lnRef idx="1">
-            <a:schemeClr val="accent1"/>
-          </a:lnRef>
-          <a:fillRef idx="3">
-            <a:schemeClr val="accent1"/>
-          </a:fillRef>
-          <a:effectRef idx="2">
-            <a:schemeClr val="accent1"/>
-          </a:effectRef>
-          <a:fontRef idx="minor">
-            <a:schemeClr val="lt1"/>
-          </a:fontRef>
-        </p:style>
-        <p:txBody>
-          <a:bodyPr rtlCol="0" anchor="ctr"/>
-          <a:lstStyle/>
-          <a:p>
-            <a:pPr algn="ctr"/>
-          </a:p>
-        </p:txBody>
-      </p:sp>
-      <p:sp>
-        <p:nvSpPr>
-          <p:cNvPr id="18" name="TextBox 17"/>
-          <p:cNvSpPr txBox="1"/>
-          <p:nvPr/>
-        </p:nvSpPr>
-        <p:spPr>
-          <a:xfrm>
-            <a:off x="10259568" y="2286000"/>
-            <a:ext cx="1426464" cy="274320"/>
-          </a:xfrm>
-          <a:prstGeom prst="rect">
-            <a:avLst/>
-          </a:prstGeom>
-          <a:noFill/>
-        </p:spPr>
-        <p:txBody>
-          <a:bodyPr wrap="square" lIns="18288" rIns="18288" anchor="t">
-            <a:spAutoFit/>
-          </a:bodyPr>
-          <a:lstStyle/>
-          <a:p>
-            <a:pPr algn="l"/>
-            <a:r>
-              <a:rPr sz="900" b="1">
-                <a:solidFill>
-                  <a:srgbClr val="A4D4CD"/>
-                </a:solidFill>
-                <a:latin typeface="Aptos"/>
-              </a:rPr>
-              <a:t>CHECK</a:t>
-            </a:r>
-          </a:p>
-        </p:txBody>
-      </p:sp>
-      <p:sp>
-        <p:nvSpPr>
-          <p:cNvPr id="19" name="TextBox 18"/>
-          <p:cNvSpPr txBox="1"/>
-          <p:nvPr/>
-        </p:nvSpPr>
-        <p:spPr>
-          <a:xfrm>
-            <a:off x="10259568" y="2724912"/>
-            <a:ext cx="1426464" cy="1965960"/>
-          </a:xfrm>
-          <a:prstGeom prst="rect">
-            <a:avLst/>
-          </a:prstGeom>
-          <a:noFill/>
-        </p:spPr>
-        <p:txBody>
-          <a:bodyPr wrap="square" lIns="18288" rIns="18288" anchor="t">
-            <a:spAutoFit/>
-          </a:bodyPr>
-          <a:lstStyle/>
-          <a:p>
-            <a:pPr algn="l"/>
-            <a:r>
-              <a:rPr sz="1500" b="0">
-                <a:solidFill>
-                  <a:srgbClr val="F4F1EA"/>
-                </a:solidFill>
-                <a:latin typeface="Aptos"/>
-              </a:rPr>
-              <a:t>Open citations and inspect missing evidence</a:t>
-            </a:r>
-          </a:p>
-        </p:txBody>
-      </p:sp>
-      <p:sp>
-        <p:nvSpPr>
-          <p:cNvPr id="20" name="TextBox 19"/>
-          <p:cNvSpPr txBox="1"/>
-          <p:nvPr/>
-        </p:nvSpPr>
-        <p:spPr>
-          <a:xfrm>
-            <a:off x="777240" y="5349240"/>
-            <a:ext cx="10515600" cy="594360"/>
-          </a:xfrm>
-          <a:prstGeom prst="rect">
-            <a:avLst/>
-          </a:prstGeom>
-          <a:noFill/>
-        </p:spPr>
-        <p:txBody>
-          <a:bodyPr wrap="square" lIns="18288" rIns="18288" anchor="t">
-            <a:spAutoFit/>
-          </a:bodyPr>
-          <a:lstStyle/>
-          <a:p>
-            <a:pPr algn="l"/>
-            <a:r>
-              <a:rPr sz="1300" b="0">
-                <a:solidFill>
-                  <a:srgbClr val="AEC8C6"/>
-                </a:solidFill>
-                <a:latin typeface="Aptos"/>
-              </a:rPr>
-              <a:t>z.ai chooses tools • Firecrawl reads sources • FastEmbed + Qdrant retrieves • SQLite preserves observations</a:t>
+              <a:t>Follow the thread: expand a point  →  inspect the evidence  →  compare last quarter  →  decide what to watch</a:t>
             </a:r>
           </a:p>
         </p:txBody>
@@ -4188,7 +3962,7 @@
                 </a:solidFill>
                 <a:latin typeface="Aptos"/>
               </a:rPr>
-              <a:t>LONDON MARKET MONITOR  /  LIVE CHECK  ·  LIVE RESEARCH</a:t>
+              <a:t>LONDON MARKET MONITOR  /  EXAMPLE INVESTIGATION  ·  MARKET INTELLIGENCE</a:t>
             </a:r>
           </a:p>
         </p:txBody>
@@ -4258,7 +4032,7 @@
                 </a:solidFill>
                 <a:latin typeface="Georgia"/>
               </a:rPr>
-              <a:t>A recorded run, with its limits visible</a:t>
+              <a:t>Is West End outperforming City?</a:t>
             </a:r>
           </a:p>
         </p:txBody>
@@ -4271,8 +4045,8 @@
         </p:nvSpPr>
         <p:spPr>
           <a:xfrm>
-            <a:off x="731520" y="1920240"/>
-            <a:ext cx="6400800" cy="3566160"/>
+            <a:off x="731520" y="1965960"/>
+            <a:ext cx="5074920" cy="3611880"/>
           </a:xfrm>
           <a:prstGeom prst="rect">
             <a:avLst/>
@@ -4316,8 +4090,8 @@
         </p:nvSpPr>
         <p:spPr>
           <a:xfrm>
-            <a:off x="932688" y="2103120"/>
-            <a:ext cx="5998464" cy="274320"/>
+            <a:off x="932688" y="2148840"/>
+            <a:ext cx="4672583" cy="274320"/>
           </a:xfrm>
           <a:prstGeom prst="rect">
             <a:avLst/>
@@ -4338,7 +4112,7 @@
                 </a:solidFill>
                 <a:latin typeface="Aptos"/>
               </a:rPr>
-              <a:t>ACTUAL MODEL ANSWER</a:t>
+              <a:t>TEST THE HYPOTHESIS</a:t>
             </a:r>
           </a:p>
         </p:txBody>
@@ -4351,8 +4125,8 @@
         </p:nvSpPr>
         <p:spPr>
           <a:xfrm>
-            <a:off x="932688" y="2542032"/>
-            <a:ext cx="5998464" cy="2788920"/>
+            <a:off x="932688" y="2587752"/>
+            <a:ext cx="4672583" cy="2834640"/>
           </a:xfrm>
           <a:prstGeom prst="rect">
             <a:avLst/>
@@ -4373,8 +4147,11 @@
                 </a:solidFill>
                 <a:latin typeface="Aptos"/>
               </a:rPr>
-              <a:t>Per the stored JLL 'Central London Office Market Dynamics Q2 2026' report, take-up reached 2.6 million sq.ft. in Q2 2026, up 15% quarter-on-quarter and above the 10-year average, led by a strong West End performance.
-Implication: with take-up above its 10-year average while supply shrinks and the construction pipeline thins, occupiers with defined requirements may benefit from starting searches and committing earlier, as choice and negotiating leverage could diminish.</a:t>
+              <a:t>Rents: compare growth, not just rent levels.
+Vacancy: align coverage and Grade A definitions.
+Take-up: compare the same reporting periods.
+Supply: distinguish future space from pre-lets.
+Commentary + macro: look for drivers and counterevidence.</a:t>
             </a:r>
           </a:p>
         </p:txBody>
@@ -4387,8 +4164,8 @@
         </p:nvSpPr>
         <p:spPr>
           <a:xfrm>
-            <a:off x="7498079" y="1920240"/>
-            <a:ext cx="3931920" cy="3566160"/>
+            <a:off x="6217920" y="1965960"/>
+            <a:ext cx="5212080" cy="3611880"/>
           </a:xfrm>
           <a:prstGeom prst="rect">
             <a:avLst/>
@@ -4432,8 +4209,8 @@
         </p:nvSpPr>
         <p:spPr>
           <a:xfrm>
-            <a:off x="7699248" y="2103120"/>
-            <a:ext cx="3529584" cy="274320"/>
+            <a:off x="6419088" y="2148840"/>
+            <a:ext cx="4809744" cy="274320"/>
           </a:xfrm>
           <a:prstGeom prst="rect">
             <a:avLst/>
@@ -4454,7 +4231,7 @@
                 </a:solidFill>
                 <a:latin typeface="Aptos"/>
               </a:rPr>
-              <a:t>EVIDENCE TRAIL</a:t>
+              <a:t>A USEFUL CONCLUSION</a:t>
             </a:r>
           </a:p>
         </p:txBody>
@@ -4467,8 +4244,8 @@
         </p:nvSpPr>
         <p:spPr>
           <a:xfrm>
-            <a:off x="7699248" y="2542032"/>
-            <a:ext cx="3529584" cy="2788920"/>
+            <a:off x="6419088" y="2587752"/>
+            <a:ext cx="4809744" cy="2834640"/>
           </a:xfrm>
           <a:prstGeom prst="rect">
             <a:avLst/>
@@ -4489,11 +4266,9 @@
                 </a:solidFill>
                 <a:latin typeface="Aptos"/>
               </a:rPr>
-              <a:t>1 cited source(s) · incomplete
-search_web
-query_market_metrics
-search_market_evidence
-Directly ingested public report. Local vector check. Firecrawl was not used in this run.</a:t>
+              <a:t>Supported · Partially supported
+Not supported · Insufficient evidence
+Explain which indicators support the claim, which challenge it and what is missing. Keep facts separate from interpretation.</a:t>
             </a:r>
           </a:p>
         </p:txBody>
@@ -4506,8 +4281,8 @@
         </p:nvSpPr>
         <p:spPr>
           <a:xfrm>
-            <a:off x="777240" y="5897880"/>
-            <a:ext cx="10607040" cy="457200"/>
+            <a:off x="777240" y="5806440"/>
+            <a:ext cx="10698480" cy="502920"/>
           </a:xfrm>
           <a:prstGeom prst="rect">
             <a:avLst/>
@@ -4522,13 +4297,13 @@
           <a:p>
             <a:pPr algn="l"/>
             <a:r>
-              <a:rPr sz="1000" b="0">
+              <a:rPr sz="1200" b="0">
                 <a:solidFill>
                   <a:srgbClr val="708087"/>
                 </a:solidFill>
                 <a:latin typeface="Aptos"/>
               </a:rPr>
-              <a:t>Source: https://www.jll.com/en-uk/insights/market-dynamics/central-london-office</a:t>
+              <a:t>Investigation design shown here; this slide does not assert a current market verdict.</a:t>
             </a:r>
           </a:p>
         </p:txBody>
@@ -4589,7 +4364,7 @@
                 </a:solidFill>
                 <a:latin typeface="Aptos"/>
               </a:rPr>
-              <a:t>LONDON MARKET MONITOR  /  CHANGE BRIEFING  ·  LIVE RESEARCH</a:t>
+              <a:t>LONDON MARKET MONITOR  /  TRUST  ·  MARKET INTELLIGENCE</a:t>
             </a:r>
           </a:p>
         </p:txBody>
@@ -4659,7 +4434,7 @@
                 </a:solidFill>
                 <a:latin typeface="Georgia"/>
               </a:rPr>
-              <a:t>Separate a changed market from a changed source</a:t>
+              <a:t>Every important claim has a trail back to evidence.</a:t>
             </a:r>
           </a:p>
         </p:txBody>
@@ -4673,7 +4448,7 @@
         <p:spPr>
           <a:xfrm>
             <a:off x="731520" y="1965960"/>
-            <a:ext cx="4892040" cy="1645920"/>
+            <a:ext cx="4892040" cy="1691640"/>
           </a:xfrm>
           <a:prstGeom prst="rect">
             <a:avLst/>
@@ -4739,7 +4514,7 @@
                 </a:solidFill>
                 <a:latin typeface="Aptos"/>
               </a:rPr>
-              <a:t>NEW REPORT</a:t>
+              <a:t>SHOW THE CALCULATION</a:t>
             </a:r>
           </a:p>
         </p:txBody>
@@ -4753,7 +4528,7 @@
         <p:spPr>
           <a:xfrm>
             <a:off x="932688" y="2587752"/>
-            <a:ext cx="4489703" cy="868680"/>
+            <a:ext cx="4489703" cy="914400"/>
           </a:xfrm>
           <a:prstGeom prst="rect">
             <a:avLst/>
@@ -4774,7 +4549,7 @@
                 </a:solidFill>
                 <a:latin typeface="Aptos"/>
               </a:rPr>
-              <a:t>Discoveries establish coverage; they do not alone prove market movement.</a:t>
+              <a:t>Source values, units and reporting periods alongside derived deltas. Transparent screening thresholds.</a:t>
             </a:r>
           </a:p>
         </p:txBody>
@@ -4788,7 +4563,7 @@
         <p:spPr>
           <a:xfrm>
             <a:off x="6263640" y="1965960"/>
-            <a:ext cx="4892040" cy="1645920"/>
+            <a:ext cx="4892040" cy="1691640"/>
           </a:xfrm>
           <a:prstGeom prst="rect">
             <a:avLst/>
@@ -4854,7 +4629,7 @@
                 </a:solidFill>
                 <a:latin typeface="Aptos"/>
               </a:rPr>
-              <a:t>REVISED CONTENT</a:t>
+              <a:t>KEEP DISAGREEMENT</a:t>
             </a:r>
           </a:p>
         </p:txBody>
@@ -4868,7 +4643,7 @@
         <p:spPr>
           <a:xfrm>
             <a:off x="6464807" y="2587752"/>
-            <a:ext cx="4489703" cy="868680"/>
+            <a:ext cx="4489703" cy="914400"/>
           </a:xfrm>
           <a:prstGeom prst="rect">
             <a:avLst/>
@@ -4889,7 +4664,7 @@
                 </a:solidFill>
                 <a:latin typeface="Aptos"/>
               </a:rPr>
-              <a:t>Same URL, different checksum: retain both versions and source IDs.</a:t>
+              <a:t>Different numbers, definitions or dates remain visible. Conflicting reports are never averaged into one answer.</a:t>
             </a:r>
           </a:p>
         </p:txBody>
@@ -4902,8 +4677,8 @@
         </p:nvSpPr>
         <p:spPr>
           <a:xfrm>
-            <a:off x="731520" y="3749039"/>
-            <a:ext cx="4892040" cy="1645920"/>
+            <a:off x="731520" y="3794760"/>
+            <a:ext cx="4892040" cy="1691640"/>
           </a:xfrm>
           <a:prstGeom prst="rect">
             <a:avLst/>
@@ -4947,7 +4722,7 @@
         </p:nvSpPr>
         <p:spPr>
           <a:xfrm>
-            <a:off x="932688" y="3931920"/>
+            <a:off x="932688" y="3977640"/>
             <a:ext cx="4489703" cy="274320"/>
           </a:xfrm>
           <a:prstGeom prst="rect">
@@ -4969,7 +4744,7 @@
                 </a:solidFill>
                 <a:latin typeface="Aptos"/>
               </a:rPr>
-              <a:t>COMPARABLE CHANGE</a:t>
+              <a:t>EXPLAIN POSSIBLE DRIVERS</a:t>
             </a:r>
           </a:p>
         </p:txBody>
@@ -4982,8 +4757,8 @@
         </p:nvSpPr>
         <p:spPr>
           <a:xfrm>
-            <a:off x="932688" y="4370831"/>
-            <a:ext cx="4489703" cy="868680"/>
+            <a:off x="932688" y="4416552"/>
+            <a:ext cx="4489703" cy="914400"/>
           </a:xfrm>
           <a:prstGeom prst="rect">
             <a:avLst/>
@@ -5004,7 +4779,7 @@
                 </a:solidFill>
                 <a:latin typeface="Aptos"/>
               </a:rPr>
-              <a:t>Match units, periods and definitions; calculate differences in code.</a:t>
+              <a:t>Cited facts are separate from interpretation. Consistency and correlation are not proof of causation.</a:t>
             </a:r>
           </a:p>
         </p:txBody>
@@ -5017,8 +4792,8 @@
         </p:nvSpPr>
         <p:spPr>
           <a:xfrm>
-            <a:off x="6263640" y="3749039"/>
-            <a:ext cx="4892040" cy="1645920"/>
+            <a:off x="6263640" y="3794760"/>
+            <a:ext cx="4892040" cy="1691640"/>
           </a:xfrm>
           <a:prstGeom prst="rect">
             <a:avLst/>
@@ -5062,7 +4837,7 @@
         </p:nvSpPr>
         <p:spPr>
           <a:xfrm>
-            <a:off x="6464807" y="3931920"/>
+            <a:off x="6464807" y="3977640"/>
             <a:ext cx="4489703" cy="274320"/>
           </a:xfrm>
           <a:prstGeom prst="rect">
@@ -5084,7 +4859,7 @@
                 </a:solidFill>
                 <a:latin typeface="Aptos"/>
               </a:rPr>
-              <a:t>BUSINESS IMPLICATION</a:t>
+              <a:t>MAKE VERIFICATION QUICK</a:t>
             </a:r>
           </a:p>
         </p:txBody>
@@ -5097,8 +4872,8 @@
         </p:nvSpPr>
         <p:spPr>
           <a:xfrm>
-            <a:off x="6464807" y="4370831"/>
-            <a:ext cx="4489703" cy="868680"/>
+            <a:off x="6464807" y="4416552"/>
+            <a:ext cx="4489703" cy="914400"/>
           </a:xfrm>
           <a:prstGeom prst="rect">
             <a:avLst/>
@@ -5119,7 +4894,7 @@
                 </a:solidFill>
                 <a:latin typeface="Aptos"/>
               </a:rPr>
-              <a:t>Qualify timing and supply risks; expose disagreement and collection gaps.</a:t>
+              <a:t>Open the publisher, title, date, URL and relevant passage. Missing evidence stays visible, including unsupported forecasts.</a:t>
             </a:r>
           </a:p>
         </p:txBody>
@@ -5180,7 +4955,7 @@
                 </a:solidFill>
                 <a:latin typeface="Aptos"/>
               </a:rPr>
-              <a:t>LONDON MARKET MONITOR  /  READINESS  ·  LIVE RESEARCH</a:t>
+              <a:t>LONDON MARKET MONITOR  /  FROM POC TO PRACTICE  ·  MARKET INTELLIGENCE</a:t>
             </a:r>
           </a:p>
         </p:txBody>
@@ -5250,7 +5025,7 @@
                 </a:solidFill>
                 <a:latin typeface="Georgia"/>
               </a:rPr>
-              <a:t>Implemented; full live readiness still needs verification</a:t>
+              <a:t>Prove the research workflow. Then automate it.</a:t>
             </a:r>
           </a:p>
         </p:txBody>
@@ -5263,8 +5038,8 @@
         </p:nvSpPr>
         <p:spPr>
           <a:xfrm>
-            <a:off x="731520" y="1920240"/>
-            <a:ext cx="3337560" cy="3474720"/>
+            <a:off x="731520" y="1965960"/>
+            <a:ext cx="3337560" cy="3566160"/>
           </a:xfrm>
           <a:prstGeom prst="rect">
             <a:avLst/>
@@ -5308,7 +5083,7 @@
         </p:nvSpPr>
         <p:spPr>
           <a:xfrm>
-            <a:off x="932688" y="2103120"/>
+            <a:off x="932688" y="2148840"/>
             <a:ext cx="2935224" cy="274320"/>
           </a:xfrm>
           <a:prstGeom prst="rect">
@@ -5330,7 +5105,7 @@
                 </a:solidFill>
                 <a:latin typeface="Aptos"/>
               </a:rPr>
-              <a:t>DELIVERED</a:t>
+              <a:t>POC TODAY</a:t>
             </a:r>
           </a:p>
         </p:txBody>
@@ -5343,8 +5118,8 @@
         </p:nvSpPr>
         <p:spPr>
           <a:xfrm>
-            <a:off x="932688" y="2542032"/>
-            <a:ext cx="2935224" cy="2697479"/>
+            <a:off x="932688" y="2587752"/>
+            <a:ext cx="2935224" cy="2788920"/>
           </a:xfrm>
           <a:prstGeom prst="rect">
             <a:avLst/>
@@ -5365,11 +5140,11 @@
                 </a:solidFill>
                 <a:latin typeface="Aptos"/>
               </a:rPr>
-              <a:t>Tool-driven chat
-Semantic evidence
-Manual refresh + briefing
-Source versions + citations
-Explicit demo isolation</a:t>
+              <a:t>On-demand market briefs
+Hypothesis investigations
+Source-backed watchlists
+Manual evidence refresh
+Implications to investigate, not investment recommendations.</a:t>
             </a:r>
           </a:p>
         </p:txBody>
@@ -5382,8 +5157,8 @@
         </p:nvSpPr>
         <p:spPr>
           <a:xfrm>
-            <a:off x="4434840" y="1920240"/>
-            <a:ext cx="3337560" cy="3474720"/>
+            <a:off x="4434840" y="1965960"/>
+            <a:ext cx="3337560" cy="3566160"/>
           </a:xfrm>
           <a:prstGeom prst="rect">
             <a:avLst/>
@@ -5427,7 +5202,7 @@
         </p:nvSpPr>
         <p:spPr>
           <a:xfrm>
-            <a:off x="4636007" y="2103120"/>
+            <a:off x="4636007" y="2148840"/>
             <a:ext cx="2935224" cy="274320"/>
           </a:xfrm>
           <a:prstGeom prst="rect">
@@ -5449,7 +5224,7 @@
                 </a:solidFill>
                 <a:latin typeface="Aptos"/>
               </a:rPr>
-              <a:t>VERIFIED</a:t>
+              <a:t>MEASURE THE VALUE</a:t>
             </a:r>
           </a:p>
         </p:txBody>
@@ -5462,8 +5237,8 @@
         </p:nvSpPr>
         <p:spPr>
           <a:xfrm>
-            <a:off x="4636007" y="2542032"/>
-            <a:ext cx="2935224" cy="2697479"/>
+            <a:off x="4636007" y="2587752"/>
+            <a:ext cx="2935224" cy="2788920"/>
           </a:xfrm>
           <a:prstGeom prst="rect">
             <a:avLst/>
@@ -5484,11 +5259,11 @@
                 </a:solidFill>
                 <a:latin typeface="Aptos"/>
               </a:rPr>
-              <a:t>Automated grounding tests
-Deterministic evaluation
-Real model tool calls
-Real semantic retrieval
-Compose configuration</a:t>
+              <a:t>Time to a usable meeting brief
+Time to verify a claim
+Material developments found
+Missing or disputed evidence exposed
+Compare with the team's manual research baseline; no savings are claimed yet.</a:t>
             </a:r>
           </a:p>
         </p:txBody>
@@ -5501,8 +5276,8 @@
         </p:nvSpPr>
         <p:spPr>
           <a:xfrm>
-            <a:off x="8138160" y="1920240"/>
-            <a:ext cx="3337560" cy="3474720"/>
+            <a:off x="8138160" y="1965960"/>
+            <a:ext cx="3337560" cy="3566160"/>
           </a:xfrm>
           <a:prstGeom prst="rect">
             <a:avLst/>
@@ -5546,7 +5321,7 @@
         </p:nvSpPr>
         <p:spPr>
           <a:xfrm>
-            <a:off x="8339328" y="2103120"/>
+            <a:off x="8339328" y="2148840"/>
             <a:ext cx="2935224" cy="274320"/>
           </a:xfrm>
           <a:prstGeom prst="rect">
@@ -5568,7 +5343,7 @@
                 </a:solidFill>
                 <a:latin typeface="Aptos"/>
               </a:rPr>
-              <a:t>REMAINING BLOCKER</a:t>
+              <a:t>NEXT, AFTER VALIDATION</a:t>
             </a:r>
           </a:p>
         </p:txBody>
@@ -5581,8 +5356,8 @@
         </p:nvSpPr>
         <p:spPr>
           <a:xfrm>
-            <a:off x="8339328" y="2542032"/>
-            <a:ext cx="2935224" cy="2697479"/>
+            <a:off x="8339328" y="2587752"/>
+            <a:ext cx="2935224" cy="2788920"/>
           </a:xfrm>
           <a:prstGeom prst="rect">
             <a:avLst/>
@@ -5603,8 +5378,11 @@
                 </a:solidFill>
                 <a:latin typeface="Aptos"/>
               </a:rPr>
-              <a:t>Free host disk capacity and restore Docker health.
-Then verify Firecrawl search + scrape, full Compose startup and persistence.</a:t>
+              <a:t>Automated monitoring
+Material-change alerts
+Private reports and leasing data
+Team-specific watchlists
+Prioritize additions using observed workflow needs.</a:t>
             </a:r>
           </a:p>
         </p:txBody>

--- a/deliverables/london-office-market-agent.pptx
+++ b/deliverables/london-office-market-agent.pptx
@@ -6,10 +6,11 @@
   </p:sldMasterIdLst>
   <p:sldIdLst>
     <p:sldId id="256" r:id="rId7"/>
-    <p:sldId id="257" r:id="rId8"/>
-    <p:sldId id="258" r:id="rId9"/>
-    <p:sldId id="259" r:id="rId10"/>
-    <p:sldId id="260" r:id="rId11"/>
+    <p:sldId id="257" r:id="rId9"/>
+    <p:sldId id="258" r:id="rId10"/>
+    <p:sldId id="259" r:id="rId11"/>
+    <p:sldId id="260" r:id="rId12"/>
+    <p:sldId id="261" r:id="rId13"/>
   </p:sldIdLst>
   <p:sldSz cx="12191695" cy="6858000" type="screen4x3"/>
   <p:notesSz cx="6858000" cy="9144000"/>
@@ -109,6 +110,776 @@
     </a:lvl9pPr>
   </p:defaultTextStyle>
 </p:presentation>
+</file>
+
+<file path=ppt/notesMasters/notesMaster1.xml><?xml version="1.0" encoding="utf-8"?>
+<p:notesMaster xmlns:a="http://schemas.openxmlformats.org/drawingml/2006/main" xmlns:p="http://schemas.openxmlformats.org/presentationml/2006/main" xmlns:r="http://schemas.openxmlformats.org/officeDocument/2006/relationships">
+  <p:cSld>
+    <p:bg>
+      <p:bgRef idx="1001">
+        <a:schemeClr val="bg1"/>
+      </p:bgRef>
+    </p:bg>
+    <p:spTree>
+      <p:nvGrpSpPr>
+        <p:cNvPr id="1" name=""/>
+        <p:cNvGrpSpPr/>
+        <p:nvPr/>
+      </p:nvGrpSpPr>
+      <p:grpSpPr>
+        <a:xfrm>
+          <a:off x="0" y="0"/>
+          <a:ext cx="0" cy="0"/>
+          <a:chOff x="0" y="0"/>
+          <a:chExt cx="0" cy="0"/>
+        </a:xfrm>
+      </p:grpSpPr>
+      <p:sp>
+        <p:nvSpPr>
+          <p:cNvPr id="2" name="Header Placeholder 1"/>
+          <p:cNvSpPr>
+            <a:spLocks noGrp="1"/>
+          </p:cNvSpPr>
+          <p:nvPr>
+            <p:ph type="hdr" sz="quarter"/>
+          </p:nvPr>
+        </p:nvSpPr>
+        <p:spPr>
+          <a:xfrm>
+            <a:off x="0" y="0"/>
+            <a:ext cx="2971800" cy="457200"/>
+          </a:xfrm>
+          <a:prstGeom prst="rect">
+            <a:avLst/>
+          </a:prstGeom>
+        </p:spPr>
+        <p:txBody>
+          <a:bodyPr vert="horz" lIns="91440" tIns="45720" rIns="91440" bIns="45720" rtlCol="0"/>
+          <a:lstStyle>
+            <a:lvl1pPr algn="l">
+              <a:defRPr sz="1200"/>
+            </a:lvl1pPr>
+          </a:lstStyle>
+          <a:p>
+            <a:endParaRPr lang="en-US"/>
+          </a:p>
+        </p:txBody>
+      </p:sp>
+      <p:sp>
+        <p:nvSpPr>
+          <p:cNvPr id="3" name="Date Placeholder 2"/>
+          <p:cNvSpPr>
+            <a:spLocks noGrp="1"/>
+          </p:cNvSpPr>
+          <p:nvPr>
+            <p:ph type="dt" idx="1"/>
+          </p:nvPr>
+        </p:nvSpPr>
+        <p:spPr>
+          <a:xfrm>
+            <a:off x="3884613" y="0"/>
+            <a:ext cx="2971800" cy="457200"/>
+          </a:xfrm>
+          <a:prstGeom prst="rect">
+            <a:avLst/>
+          </a:prstGeom>
+        </p:spPr>
+        <p:txBody>
+          <a:bodyPr vert="horz" lIns="91440" tIns="45720" rIns="91440" bIns="45720" rtlCol="0"/>
+          <a:lstStyle>
+            <a:lvl1pPr algn="r">
+              <a:defRPr sz="1200"/>
+            </a:lvl1pPr>
+          </a:lstStyle>
+          <a:p>
+            <a:fld id="{0F89C1C7-3DCD-1040-A9CF-14679D8B5DDD}" type="datetimeFigureOut">
+              <a:rPr lang="en-US" smtClean="0"/>
+              <a:t>10/17/16</a:t>
+            </a:fld>
+            <a:endParaRPr lang="en-US"/>
+          </a:p>
+        </p:txBody>
+      </p:sp>
+      <p:sp>
+        <p:nvSpPr>
+          <p:cNvPr id="4" name="Slide Image Placeholder 3"/>
+          <p:cNvSpPr>
+            <a:spLocks noGrp="1" noRot="1" noChangeAspect="1"/>
+          </p:cNvSpPr>
+          <p:nvPr>
+            <p:ph type="sldImg" idx="2"/>
+          </p:nvPr>
+        </p:nvSpPr>
+        <p:spPr>
+          <a:xfrm>
+            <a:off x="1143000" y="685800"/>
+            <a:ext cx="4572000" cy="3429000"/>
+          </a:xfrm>
+          <a:prstGeom prst="rect">
+            <a:avLst/>
+          </a:prstGeom>
+          <a:noFill/>
+          <a:ln w="12700">
+            <a:solidFill>
+              <a:prstClr val="black"/>
+            </a:solidFill>
+          </a:ln>
+        </p:spPr>
+        <p:txBody>
+          <a:bodyPr vert="horz" lIns="91440" tIns="45720" rIns="91440" bIns="45720" rtlCol="0" anchor="ctr"/>
+          <a:lstStyle/>
+          <a:p>
+            <a:endParaRPr lang="en-US"/>
+          </a:p>
+        </p:txBody>
+      </p:sp>
+      <p:sp>
+        <p:nvSpPr>
+          <p:cNvPr id="5" name="Notes Placeholder 4"/>
+          <p:cNvSpPr>
+            <a:spLocks noGrp="1"/>
+          </p:cNvSpPr>
+          <p:nvPr>
+            <p:ph type="body" sz="quarter" idx="3"/>
+          </p:nvPr>
+        </p:nvSpPr>
+        <p:spPr>
+          <a:xfrm>
+            <a:off x="685800" y="4343400"/>
+            <a:ext cx="5486400" cy="4114800"/>
+          </a:xfrm>
+          <a:prstGeom prst="rect">
+            <a:avLst/>
+          </a:prstGeom>
+        </p:spPr>
+        <p:txBody>
+          <a:bodyPr vert="horz" lIns="91440" tIns="45720" rIns="91440" bIns="45720" rtlCol="0"/>
+          <a:lstStyle/>
+          <a:p>
+            <a:pPr lvl="0"/>
+            <a:r>
+              <a:rPr lang="en-US" smtClean="0"/>
+              <a:t>Click to edit Master text styles</a:t>
+            </a:r>
+          </a:p>
+          <a:p>
+            <a:pPr lvl="1"/>
+            <a:r>
+              <a:rPr lang="en-US" smtClean="0"/>
+              <a:t>Second level</a:t>
+            </a:r>
+          </a:p>
+          <a:p>
+            <a:pPr lvl="2"/>
+            <a:r>
+              <a:rPr lang="en-US" smtClean="0"/>
+              <a:t>Third level</a:t>
+            </a:r>
+          </a:p>
+          <a:p>
+            <a:pPr lvl="3"/>
+            <a:r>
+              <a:rPr lang="en-US" smtClean="0"/>
+              <a:t>Fourth level</a:t>
+            </a:r>
+          </a:p>
+          <a:p>
+            <a:pPr lvl="4"/>
+            <a:r>
+              <a:rPr lang="en-US" smtClean="0"/>
+              <a:t>Fifth level</a:t>
+            </a:r>
+            <a:endParaRPr lang="en-US"/>
+          </a:p>
+        </p:txBody>
+      </p:sp>
+      <p:sp>
+        <p:nvSpPr>
+          <p:cNvPr id="6" name="Footer Placeholder 5"/>
+          <p:cNvSpPr>
+            <a:spLocks noGrp="1"/>
+          </p:cNvSpPr>
+          <p:nvPr>
+            <p:ph type="ftr" sz="quarter" idx="4"/>
+          </p:nvPr>
+        </p:nvSpPr>
+        <p:spPr>
+          <a:xfrm>
+            <a:off x="0" y="8685213"/>
+            <a:ext cx="2971800" cy="457200"/>
+          </a:xfrm>
+          <a:prstGeom prst="rect">
+            <a:avLst/>
+          </a:prstGeom>
+        </p:spPr>
+        <p:txBody>
+          <a:bodyPr vert="horz" lIns="91440" tIns="45720" rIns="91440" bIns="45720" rtlCol="0" anchor="b"/>
+          <a:lstStyle>
+            <a:lvl1pPr algn="l">
+              <a:defRPr sz="1200"/>
+            </a:lvl1pPr>
+          </a:lstStyle>
+          <a:p>
+            <a:endParaRPr lang="en-US"/>
+          </a:p>
+        </p:txBody>
+      </p:sp>
+      <p:sp>
+        <p:nvSpPr>
+          <p:cNvPr id="7" name="Slide Number Placeholder 6"/>
+          <p:cNvSpPr>
+            <a:spLocks noGrp="1"/>
+          </p:cNvSpPr>
+          <p:nvPr>
+            <p:ph type="sldNum" sz="quarter" idx="5"/>
+          </p:nvPr>
+        </p:nvSpPr>
+        <p:spPr>
+          <a:xfrm>
+            <a:off x="3884613" y="8685213"/>
+            <a:ext cx="2971800" cy="457200"/>
+          </a:xfrm>
+          <a:prstGeom prst="rect">
+            <a:avLst/>
+          </a:prstGeom>
+        </p:spPr>
+        <p:txBody>
+          <a:bodyPr vert="horz" lIns="91440" tIns="45720" rIns="91440" bIns="45720" rtlCol="0" anchor="b"/>
+          <a:lstStyle>
+            <a:lvl1pPr algn="r">
+              <a:defRPr sz="1200"/>
+            </a:lvl1pPr>
+          </a:lstStyle>
+          <a:p>
+            <a:fld id="{BB5E49A5-4136-284D-997B-48E1D791AD67}" type="slidenum">
+              <a:rPr lang="en-US" smtClean="0"/>
+              <a:t>‹#›</a:t>
+            </a:fld>
+            <a:endParaRPr lang="en-US"/>
+          </a:p>
+        </p:txBody>
+      </p:sp>
+    </p:spTree>
+    <p:extLst>
+      <p:ext uri="{BB962C8B-B14F-4D97-AF65-F5344CB8AC3E}">
+        <p14:creationId xmlns:p14="http://schemas.microsoft.com/office/powerpoint/2010/main" val="2623252185"/>
+      </p:ext>
+    </p:extLst>
+  </p:cSld>
+  <p:clrMap bg1="lt1" tx1="dk1" bg2="lt2" tx2="dk2" accent1="accent1" accent2="accent2" accent3="accent3" accent4="accent4" accent5="accent5" accent6="accent6" hlink="hlink" folHlink="folHlink"/>
+  <p:notesStyle>
+    <a:lvl1pPr marL="0" algn="l" defTabSz="457200" rtl="0" eaLnBrk="1" latinLnBrk="0" hangingPunct="1">
+      <a:defRPr sz="1200" kern="1200">
+        <a:solidFill>
+          <a:schemeClr val="tx1"/>
+        </a:solidFill>
+        <a:latin typeface="+mn-lt"/>
+        <a:ea typeface="+mn-ea"/>
+        <a:cs typeface="+mn-cs"/>
+      </a:defRPr>
+    </a:lvl1pPr>
+    <a:lvl2pPr marL="457200" algn="l" defTabSz="457200" rtl="0" eaLnBrk="1" latinLnBrk="0" hangingPunct="1">
+      <a:defRPr sz="1200" kern="1200">
+        <a:solidFill>
+          <a:schemeClr val="tx1"/>
+        </a:solidFill>
+        <a:latin typeface="+mn-lt"/>
+        <a:ea typeface="+mn-ea"/>
+        <a:cs typeface="+mn-cs"/>
+      </a:defRPr>
+    </a:lvl2pPr>
+    <a:lvl3pPr marL="914400" algn="l" defTabSz="457200" rtl="0" eaLnBrk="1" latinLnBrk="0" hangingPunct="1">
+      <a:defRPr sz="1200" kern="1200">
+        <a:solidFill>
+          <a:schemeClr val="tx1"/>
+        </a:solidFill>
+        <a:latin typeface="+mn-lt"/>
+        <a:ea typeface="+mn-ea"/>
+        <a:cs typeface="+mn-cs"/>
+      </a:defRPr>
+    </a:lvl3pPr>
+    <a:lvl4pPr marL="1371600" algn="l" defTabSz="457200" rtl="0" eaLnBrk="1" latinLnBrk="0" hangingPunct="1">
+      <a:defRPr sz="1200" kern="1200">
+        <a:solidFill>
+          <a:schemeClr val="tx1"/>
+        </a:solidFill>
+        <a:latin typeface="+mn-lt"/>
+        <a:ea typeface="+mn-ea"/>
+        <a:cs typeface="+mn-cs"/>
+      </a:defRPr>
+    </a:lvl4pPr>
+    <a:lvl5pPr marL="1828800" algn="l" defTabSz="457200" rtl="0" eaLnBrk="1" latinLnBrk="0" hangingPunct="1">
+      <a:defRPr sz="1200" kern="1200">
+        <a:solidFill>
+          <a:schemeClr val="tx1"/>
+        </a:solidFill>
+        <a:latin typeface="+mn-lt"/>
+        <a:ea typeface="+mn-ea"/>
+        <a:cs typeface="+mn-cs"/>
+      </a:defRPr>
+    </a:lvl5pPr>
+    <a:lvl6pPr marL="2286000" algn="l" defTabSz="457200" rtl="0" eaLnBrk="1" latinLnBrk="0" hangingPunct="1">
+      <a:defRPr sz="1200" kern="1200">
+        <a:solidFill>
+          <a:schemeClr val="tx1"/>
+        </a:solidFill>
+        <a:latin typeface="+mn-lt"/>
+        <a:ea typeface="+mn-ea"/>
+        <a:cs typeface="+mn-cs"/>
+      </a:defRPr>
+    </a:lvl6pPr>
+    <a:lvl7pPr marL="2743200" algn="l" defTabSz="457200" rtl="0" eaLnBrk="1" latinLnBrk="0" hangingPunct="1">
+      <a:defRPr sz="1200" kern="1200">
+        <a:solidFill>
+          <a:schemeClr val="tx1"/>
+        </a:solidFill>
+        <a:latin typeface="+mn-lt"/>
+        <a:ea typeface="+mn-ea"/>
+        <a:cs typeface="+mn-cs"/>
+      </a:defRPr>
+    </a:lvl7pPr>
+    <a:lvl8pPr marL="3200400" algn="l" defTabSz="457200" rtl="0" eaLnBrk="1" latinLnBrk="0" hangingPunct="1">
+      <a:defRPr sz="1200" kern="1200">
+        <a:solidFill>
+          <a:schemeClr val="tx1"/>
+        </a:solidFill>
+        <a:latin typeface="+mn-lt"/>
+        <a:ea typeface="+mn-ea"/>
+        <a:cs typeface="+mn-cs"/>
+      </a:defRPr>
+    </a:lvl8pPr>
+    <a:lvl9pPr marL="3657600" algn="l" defTabSz="457200" rtl="0" eaLnBrk="1" latinLnBrk="0" hangingPunct="1">
+      <a:defRPr sz="1200" kern="1200">
+        <a:solidFill>
+          <a:schemeClr val="tx1"/>
+        </a:solidFill>
+        <a:latin typeface="+mn-lt"/>
+        <a:ea typeface="+mn-ea"/>
+        <a:cs typeface="+mn-cs"/>
+      </a:defRPr>
+    </a:lvl9pPr>
+  </p:notesStyle>
+</p:notesMaster>
+</file>
+
+<file path=ppt/notesSlides/notesSlide1.xml><?xml version="1.0" encoding="utf-8"?>
+<p:notes xmlns:a="http://schemas.openxmlformats.org/drawingml/2006/main" xmlns:p="http://schemas.openxmlformats.org/presentationml/2006/main" xmlns:r="http://schemas.openxmlformats.org/officeDocument/2006/relationships">
+  <p:cSld>
+    <p:spTree>
+      <p:nvGrpSpPr>
+        <p:cNvPr id="1" name=""/>
+        <p:cNvGrpSpPr/>
+        <p:nvPr/>
+      </p:nvGrpSpPr>
+      <p:grpSpPr>
+        <a:xfrm>
+          <a:off x="0" y="0"/>
+          <a:ext cx="0" cy="0"/>
+          <a:chOff x="0" y="0"/>
+          <a:chExt cx="0" cy="0"/>
+        </a:xfrm>
+      </p:grpSpPr>
+      <p:sp>
+        <p:nvSpPr>
+          <p:cNvPr id="2" name="Slide Image Placeholder 1"/>
+          <p:cNvSpPr>
+            <a:spLocks noGrp="1"/>
+          </p:cNvSpPr>
+          <p:nvPr>
+            <p:ph type="sldImg" idx="2"/>
+          </p:nvPr>
+        </p:nvSpPr>
+        <p:spPr/>
+      </p:sp>
+      <p:sp>
+        <p:nvSpPr>
+          <p:cNvPr id="3" name="Notes Placeholder 2"/>
+          <p:cNvSpPr>
+            <a:spLocks noGrp="1"/>
+          </p:cNvSpPr>
+          <p:nvPr>
+            <p:ph type="body" idx="3" sz="quarter"/>
+          </p:nvPr>
+        </p:nvSpPr>
+        <p:spPr/>
+        <p:txBody>
+          <a:bodyPr/>
+          <a:lstStyle/>
+          <a:p>
+            <a:r>
+              <a:t>Executive question: Why does this matter? The assessment calls for a runnable Python PoC and a 3-6 slide business deck. The value proposition is a traceable basis for discussion, without claiming measured time savings or investment advice. Vacancy means empty space; take-up means space leased. Coverage depends on accessible reports.</a:t>
+            </a:r>
+          </a:p>
+        </p:txBody>
+      </p:sp>
+      <p:sp>
+        <p:nvSpPr>
+          <p:cNvPr id="4" name="Slide Number Placeholder 3"/>
+          <p:cNvSpPr>
+            <a:spLocks noGrp="1"/>
+          </p:cNvSpPr>
+          <p:nvPr>
+            <p:ph type="sldNum" idx="5" sz="quarter"/>
+          </p:nvPr>
+        </p:nvSpPr>
+        <p:spPr/>
+      </p:sp>
+    </p:spTree>
+  </p:cSld>
+  <p:clrMapOvr>
+    <a:masterClrMapping/>
+  </p:clrMapOvr>
+</p:notes>
+</file>
+
+<file path=ppt/notesSlides/notesSlide2.xml><?xml version="1.0" encoding="utf-8"?>
+<p:notes xmlns:a="http://schemas.openxmlformats.org/drawingml/2006/main" xmlns:p="http://schemas.openxmlformats.org/presentationml/2006/main" xmlns:r="http://schemas.openxmlformats.org/officeDocument/2006/relationships">
+  <p:cSld>
+    <p:spTree>
+      <p:nvGrpSpPr>
+        <p:cNvPr id="1" name=""/>
+        <p:cNvGrpSpPr/>
+        <p:nvPr/>
+      </p:nvGrpSpPr>
+      <p:grpSpPr>
+        <a:xfrm>
+          <a:off x="0" y="0"/>
+          <a:ext cx="0" cy="0"/>
+          <a:chOff x="0" y="0"/>
+          <a:chExt cx="0" cy="0"/>
+        </a:xfrm>
+      </p:grpSpPr>
+      <p:sp>
+        <p:nvSpPr>
+          <p:cNvPr id="2" name="Slide Image Placeholder 1"/>
+          <p:cNvSpPr>
+            <a:spLocks noGrp="1"/>
+          </p:cNvSpPr>
+          <p:nvPr>
+            <p:ph type="sldImg" idx="2"/>
+          </p:nvPr>
+        </p:nvSpPr>
+        <p:spPr/>
+      </p:sp>
+      <p:sp>
+        <p:nvSpPr>
+          <p:cNvPr id="3" name="Notes Placeholder 2"/>
+          <p:cNvSpPr>
+            <a:spLocks noGrp="1"/>
+          </p:cNvSpPr>
+          <p:nvPr>
+            <p:ph type="body" idx="3" sz="quarter"/>
+          </p:nvPr>
+        </p:nvSpPr>
+        <p:spPr/>
+        <p:txBody>
+          <a:bodyPr/>
+          <a:lstStyle/>
+          <a:p>
+            <a:r>
+              <a:t>Executive question: Which decision will this support? Preserve the three existing workflows, but frame each around its business use. Monitor needs a comparison period or a saved refresh baseline. Investigate tests a hypothesis and may return insufficient evidence. Prepare returns up to five dated developments when coverage supports them. Higher rent alone does not establish outperformance.</a:t>
+            </a:r>
+          </a:p>
+        </p:txBody>
+      </p:sp>
+      <p:sp>
+        <p:nvSpPr>
+          <p:cNvPr id="4" name="Slide Number Placeholder 3"/>
+          <p:cNvSpPr>
+            <a:spLocks noGrp="1"/>
+          </p:cNvSpPr>
+          <p:nvPr>
+            <p:ph type="sldNum" idx="5" sz="quarter"/>
+          </p:nvPr>
+        </p:nvSpPr>
+        <p:spPr/>
+      </p:sp>
+    </p:spTree>
+  </p:cSld>
+  <p:clrMapOvr>
+    <a:masterClrMapping/>
+  </p:clrMapOvr>
+</p:notes>
+</file>
+
+<file path=ppt/notesSlides/notesSlide3.xml><?xml version="1.0" encoding="utf-8"?>
+<p:notes xmlns:a="http://schemas.openxmlformats.org/drawingml/2006/main" xmlns:p="http://schemas.openxmlformats.org/presentationml/2006/main" xmlns:r="http://schemas.openxmlformats.org/officeDocument/2006/relationships">
+  <p:cSld>
+    <p:spTree>
+      <p:nvGrpSpPr>
+        <p:cNvPr id="1" name=""/>
+        <p:cNvGrpSpPr/>
+        <p:nvPr/>
+      </p:nvGrpSpPr>
+      <p:grpSpPr>
+        <a:xfrm>
+          <a:off x="0" y="0"/>
+          <a:ext cx="0" cy="0"/>
+          <a:chOff x="0" y="0"/>
+          <a:chExt cx="0" cy="0"/>
+        </a:xfrm>
+      </p:grpSpPr>
+      <p:sp>
+        <p:nvSpPr>
+          <p:cNvPr id="2" name="Slide Image Placeholder 1"/>
+          <p:cNvSpPr>
+            <a:spLocks noGrp="1"/>
+          </p:cNvSpPr>
+          <p:nvPr>
+            <p:ph type="sldImg" idx="2"/>
+          </p:nvPr>
+        </p:nvSpPr>
+        <p:spPr/>
+      </p:sp>
+      <p:sp>
+        <p:nvSpPr>
+          <p:cNvPr id="3" name="Notes Placeholder 2"/>
+          <p:cNvSpPr>
+            <a:spLocks noGrp="1"/>
+          </p:cNvSpPr>
+          <p:nvPr>
+            <p:ph type="body" idx="3" sz="quarter"/>
+          </p:nvPr>
+        </p:nvSpPr>
+        <p:spPr/>
+        <p:txBody>
+          <a:bodyPr/>
+          <a:lstStyle/>
+          <a:p>
+            <a:r>
+              <a:t>Executive question: How does it work? This is a simplified logical workflow, not a literal sequence of one-time calls. The agent can retrieve, search and read again as needed within bounded calls. Supplied text can be ingested through the API; the PoC does not provide a general document-upload interface or private-data connector. Stored evidence uses semantic retrieval; validated numerical metrics use SQLite and deterministic calculations. Verification catches some citation and numerical errors; it does not guarantee source truth or every inference. Provider controls are omitted because they do not help the executive decision.</a:t>
+            </a:r>
+          </a:p>
+        </p:txBody>
+      </p:sp>
+      <p:sp>
+        <p:nvSpPr>
+          <p:cNvPr id="4" name="Slide Number Placeholder 3"/>
+          <p:cNvSpPr>
+            <a:spLocks noGrp="1"/>
+          </p:cNvSpPr>
+          <p:nvPr>
+            <p:ph type="sldNum" idx="5" sz="quarter"/>
+          </p:nvPr>
+        </p:nvSpPr>
+        <p:spPr/>
+      </p:sp>
+    </p:spTree>
+  </p:cSld>
+  <p:clrMapOvr>
+    <a:masterClrMapping/>
+  </p:clrMapOvr>
+</p:notes>
+</file>
+
+<file path=ppt/notesSlides/notesSlide4.xml><?xml version="1.0" encoding="utf-8"?>
+<p:notes xmlns:a="http://schemas.openxmlformats.org/drawingml/2006/main" xmlns:p="http://schemas.openxmlformats.org/presentationml/2006/main" xmlns:r="http://schemas.openxmlformats.org/officeDocument/2006/relationships">
+  <p:cSld>
+    <p:spTree>
+      <p:nvGrpSpPr>
+        <p:cNvPr id="1" name=""/>
+        <p:cNvGrpSpPr/>
+        <p:nvPr/>
+      </p:nvGrpSpPr>
+      <p:grpSpPr>
+        <a:xfrm>
+          <a:off x="0" y="0"/>
+          <a:ext cx="0" cy="0"/>
+          <a:chOff x="0" y="0"/>
+          <a:chExt cx="0" cy="0"/>
+        </a:xfrm>
+      </p:grpSpPr>
+      <p:sp>
+        <p:nvSpPr>
+          <p:cNvPr id="2" name="Slide Image Placeholder 1"/>
+          <p:cNvSpPr>
+            <a:spLocks noGrp="1"/>
+          </p:cNvSpPr>
+          <p:nvPr>
+            <p:ph type="sldImg" idx="2"/>
+          </p:nvPr>
+        </p:nvSpPr>
+        <p:spPr/>
+      </p:sp>
+      <p:sp>
+        <p:nvSpPr>
+          <p:cNvPr id="3" name="Notes Placeholder 2"/>
+          <p:cNvSpPr>
+            <a:spLocks noGrp="1"/>
+          </p:cNvSpPr>
+          <p:nvPr>
+            <p:ph type="body" idx="3" sz="quarter"/>
+          </p:nvPr>
+        </p:nvSpPr>
+        <p:spPr/>
+        <p:txBody>
+          <a:bodyPr/>
+          <a:lstStyle/>
+          <a:p>
+            <a:r>
+              <a:t>Executive question: What do I receive? This is an edited excerpt from the actual 10 September 2026 run in deliverables/live-run.json, not a new model answer or an independently verified market assertion. Slide citation [1] maps to run citation [1]; slide [2] maps to run [3]. Links open the publishers. The run took about 105 seconds and returned a partial brief after a claim failed checks. Its missing overall synthesis is preserved visibly. The missing Knight Frank Q2 table was a retrieval limitation, not proof that the publisher did not report rents. Normally the opening brief connects findings, followed by detail and evidence. This example demonstrates a useful supported finding while keeping the unresolved comparison explicit.</a:t>
+            </a:r>
+          </a:p>
+        </p:txBody>
+      </p:sp>
+      <p:sp>
+        <p:nvSpPr>
+          <p:cNvPr id="4" name="Slide Number Placeholder 3"/>
+          <p:cNvSpPr>
+            <a:spLocks noGrp="1"/>
+          </p:cNvSpPr>
+          <p:nvPr>
+            <p:ph type="sldNum" idx="5" sz="quarter"/>
+          </p:nvPr>
+        </p:nvSpPr>
+        <p:spPr/>
+      </p:sp>
+    </p:spTree>
+  </p:cSld>
+  <p:clrMapOvr>
+    <a:masterClrMapping/>
+  </p:clrMapOvr>
+</p:notes>
+</file>
+
+<file path=ppt/notesSlides/notesSlide5.xml><?xml version="1.0" encoding="utf-8"?>
+<p:notes xmlns:a="http://schemas.openxmlformats.org/drawingml/2006/main" xmlns:p="http://schemas.openxmlformats.org/presentationml/2006/main" xmlns:r="http://schemas.openxmlformats.org/officeDocument/2006/relationships">
+  <p:cSld>
+    <p:spTree>
+      <p:nvGrpSpPr>
+        <p:cNvPr id="1" name=""/>
+        <p:cNvGrpSpPr/>
+        <p:nvPr/>
+      </p:nvGrpSpPr>
+      <p:grpSpPr>
+        <a:xfrm>
+          <a:off x="0" y="0"/>
+          <a:ext cx="0" cy="0"/>
+          <a:chOff x="0" y="0"/>
+          <a:chExt cx="0" cy="0"/>
+        </a:xfrm>
+      </p:grpSpPr>
+      <p:sp>
+        <p:nvSpPr>
+          <p:cNvPr id="2" name="Slide Image Placeholder 1"/>
+          <p:cNvSpPr>
+            <a:spLocks noGrp="1"/>
+          </p:cNvSpPr>
+          <p:nvPr>
+            <p:ph type="sldImg" idx="2"/>
+          </p:nvPr>
+        </p:nvSpPr>
+        <p:spPr/>
+      </p:sp>
+      <p:sp>
+        <p:nvSpPr>
+          <p:cNvPr id="3" name="Notes Placeholder 2"/>
+          <p:cNvSpPr>
+            <a:spLocks noGrp="1"/>
+          </p:cNvSpPr>
+          <p:nvPr>
+            <p:ph type="body" idx="3" sz="quarter"/>
+          </p:nvPr>
+        </p:nvSpPr>
+        <p:spPr/>
+        <p:txBody>
+          <a:bodyPr/>
+          <a:lstStyle/>
+          <a:p>
+            <a:r>
+              <a:t>Executive question: Why should we trust it? These are review controls, not a guarantee. Numerical comparisons need compatible inputs. Different definitions can explain apparent disagreements; genuine disagreements stay separate. Unknown dates remain unknown. Unsupported claims may be omitted, and responses may be partial or evidence-only. Source quotations and calculation inputs provide an audit path. The example on slide 4 shows why comparing unlike periods can mislead.</a:t>
+            </a:r>
+          </a:p>
+        </p:txBody>
+      </p:sp>
+      <p:sp>
+        <p:nvSpPr>
+          <p:cNvPr id="4" name="Slide Number Placeholder 3"/>
+          <p:cNvSpPr>
+            <a:spLocks noGrp="1"/>
+          </p:cNvSpPr>
+          <p:nvPr>
+            <p:ph type="sldNum" idx="5" sz="quarter"/>
+          </p:nvPr>
+        </p:nvSpPr>
+        <p:spPr/>
+      </p:sp>
+    </p:spTree>
+  </p:cSld>
+  <p:clrMapOvr>
+    <a:masterClrMapping/>
+  </p:clrMapOvr>
+</p:notes>
+</file>
+
+<file path=ppt/notesSlides/notesSlide6.xml><?xml version="1.0" encoding="utf-8"?>
+<p:notes xmlns:a="http://schemas.openxmlformats.org/drawingml/2006/main" xmlns:p="http://schemas.openxmlformats.org/presentationml/2006/main" xmlns:r="http://schemas.openxmlformats.org/officeDocument/2006/relationships">
+  <p:cSld>
+    <p:spTree>
+      <p:nvGrpSpPr>
+        <p:cNvPr id="1" name=""/>
+        <p:cNvGrpSpPr/>
+        <p:nvPr/>
+      </p:nvGrpSpPr>
+      <p:grpSpPr>
+        <a:xfrm>
+          <a:off x="0" y="0"/>
+          <a:ext cx="0" cy="0"/>
+          <a:chOff x="0" y="0"/>
+          <a:chExt cx="0" cy="0"/>
+        </a:xfrm>
+      </p:grpSpPr>
+      <p:sp>
+        <p:nvSpPr>
+          <p:cNvPr id="2" name="Slide Image Placeholder 1"/>
+          <p:cNvSpPr>
+            <a:spLocks noGrp="1"/>
+          </p:cNvSpPr>
+          <p:nvPr>
+            <p:ph type="sldImg" idx="2"/>
+          </p:nvPr>
+        </p:nvSpPr>
+        <p:spPr/>
+      </p:sp>
+      <p:sp>
+        <p:nvSpPr>
+          <p:cNvPr id="3" name="Notes Placeholder 2"/>
+          <p:cNvSpPr>
+            <a:spLocks noGrp="1"/>
+          </p:cNvSpPr>
+          <p:nvPr>
+            <p:ph type="body" idx="3" sz="quarter"/>
+          </p:nvPr>
+        </p:nvSpPr>
+        <p:spPr/>
+        <p:txBody>
+          <a:bodyPr/>
+          <a:lstStyle/>
+          <a:p>
+            <a:r>
+              <a:t>Executive question: How do we adopt it? This is a working, bounded research PoC. Choose one recurring question, assign a reviewer and compare the workflow with the team's current process. Refresh is manual; first use creates a baseline. Source access and reporting dates constrain coverage. It does not provide guaranteed forecasts or unattended monitoring. Documents and briefs persist, while conversation context is in memory. Expand scope only after the pilot demonstrates a need. No measured time savings are claimed. README contains operator setup and validation instructions.</a:t>
+            </a:r>
+          </a:p>
+        </p:txBody>
+      </p:sp>
+      <p:sp>
+        <p:nvSpPr>
+          <p:cNvPr id="4" name="Slide Number Placeholder 3"/>
+          <p:cNvSpPr>
+            <a:spLocks noGrp="1"/>
+          </p:cNvSpPr>
+          <p:nvPr>
+            <p:ph type="sldNum" idx="5" sz="quarter"/>
+          </p:nvPr>
+        </p:nvSpPr>
+        <p:spPr/>
+      </p:sp>
+    </p:spTree>
+  </p:cSld>
+  <p:clrMapOvr>
+    <a:masterClrMapping/>
+  </p:clrMapOvr>
+</p:notes>
 </file>
 
 <file path=ppt/slideLayouts/slideLayout1.xml><?xml version="1.0" encoding="utf-8"?>
@@ -3088,7 +3859,7 @@
     <p:bg>
       <p:bgPr>
         <a:solidFill>
-          <a:srgbClr val="F4F1EA"/>
+          <a:srgbClr val="102331"/>
         </a:solidFill>
         <a:effectLst/>
       </p:bgPr>
@@ -3108,8 +3879,8 @@
         </p:nvSpPr>
         <p:spPr>
           <a:xfrm>
-            <a:off x="594360" y="365760"/>
-            <a:ext cx="7315200" cy="228600"/>
+            <a:off x="594360" y="329184"/>
+            <a:ext cx="9144000" cy="201168"/>
           </a:xfrm>
           <a:prstGeom prst="rect">
             <a:avLst/>
@@ -3117,20 +3888,24 @@
           <a:noFill/>
         </p:spPr>
         <p:txBody>
-          <a:bodyPr wrap="square" lIns="18288" rIns="18288" anchor="t">
+          <a:bodyPr wrap="square" lIns="18288" rIns="18288" tIns="0" bIns="0" anchor="t">
             <a:spAutoFit/>
           </a:bodyPr>
           <a:lstStyle/>
           <a:p>
-            <a:pPr algn="l"/>
-            <a:r>
-              <a:rPr sz="900" b="1">
-                <a:solidFill>
-                  <a:srgbClr val="1B8077"/>
-                </a:solidFill>
-                <a:latin typeface="Aptos"/>
+            <a:pPr>
+              <a:spcAft>
+                <a:spcPts val="800"/>
+              </a:spcAft>
+            </a:pPr>
+            <a:r>
+              <a:rPr sz="1000" b="1">
+                <a:solidFill>
+                  <a:srgbClr val="ADDAD1"/>
+                </a:solidFill>
+                <a:latin typeface="Arial"/>
               </a:rPr>
-              <a:t>LONDON MARKET MONITOR  /  THE PROBLEM  ·  MARKET INTELLIGENCE</a:t>
+              <a:t>LONDON MARKET MONITOR  /  PROBLEM</a:t>
             </a:r>
           </a:p>
         </p:txBody>
@@ -3143,8 +3918,8 @@
         </p:nvSpPr>
         <p:spPr>
           <a:xfrm>
-            <a:off x="10972800" y="365760"/>
-            <a:ext cx="640080" cy="228600"/>
+            <a:off x="594360" y="877824"/>
+            <a:ext cx="10972800" cy="1051560"/>
           </a:xfrm>
           <a:prstGeom prst="rect">
             <a:avLst/>
@@ -3152,20 +3927,40 @@
           <a:noFill/>
         </p:spPr>
         <p:txBody>
-          <a:bodyPr wrap="square" lIns="18288" rIns="18288" anchor="t">
+          <a:bodyPr wrap="square" lIns="18288" rIns="18288" tIns="0" bIns="0" anchor="t">
             <a:spAutoFit/>
           </a:bodyPr>
           <a:lstStyle/>
           <a:p>
-            <a:pPr algn="r"/>
-            <a:r>
-              <a:rPr sz="900" b="1">
-                <a:solidFill>
-                  <a:srgbClr val="708087"/>
-                </a:solidFill>
-                <a:latin typeface="Aptos"/>
+            <a:pPr>
+              <a:spcAft>
+                <a:spcPts val="800"/>
+              </a:spcAft>
+            </a:pPr>
+            <a:r>
+              <a:rPr sz="2900" b="1">
+                <a:solidFill>
+                  <a:srgbClr val="FFFDF8"/>
+                </a:solidFill>
+                <a:latin typeface="Arial"/>
               </a:rPr>
-              <a:t>01</a:t>
+              <a:t>Turn London office market noise into a</a:t>
+            </a:r>
+          </a:p>
+          <a:p>
+            <a:pPr>
+              <a:spcAft>
+                <a:spcPts val="800"/>
+              </a:spcAft>
+            </a:pPr>
+            <a:r>
+              <a:rPr sz="2900" b="1">
+                <a:solidFill>
+                  <a:srgbClr val="FFFDF8"/>
+                </a:solidFill>
+                <a:latin typeface="Arial"/>
+              </a:rPr>
+              <a:t>cited, decision-ready brief</a:t>
             </a:r>
           </a:p>
         </p:txBody>
@@ -3178,8 +3973,8 @@
         </p:nvSpPr>
         <p:spPr>
           <a:xfrm>
-            <a:off x="594360" y="960120"/>
-            <a:ext cx="10789920" cy="731520"/>
+            <a:off x="612648" y="2011680"/>
+            <a:ext cx="10881360" cy="594360"/>
           </a:xfrm>
           <a:prstGeom prst="rect">
             <a:avLst/>
@@ -3187,20 +3982,24 @@
           <a:noFill/>
         </p:spPr>
         <p:txBody>
-          <a:bodyPr wrap="square" lIns="18288" rIns="18288" anchor="t">
+          <a:bodyPr wrap="square" lIns="18288" rIns="18288" tIns="0" bIns="0" anchor="t">
             <a:spAutoFit/>
           </a:bodyPr>
           <a:lstStyle/>
           <a:p>
-            <a:pPr algn="l"/>
-            <a:r>
-              <a:rPr sz="3000" b="1">
-                <a:solidFill>
-                  <a:srgbClr val="102331"/>
-                </a:solidFill>
-                <a:latin typeface="Georgia"/>
+            <a:pPr>
+              <a:spcAft>
+                <a:spcPts val="800"/>
+              </a:spcAft>
+            </a:pPr>
+            <a:r>
+              <a:rPr sz="1700" b="0">
+                <a:solidFill>
+                  <a:srgbClr val="ADDAD1"/>
+                </a:solidFill>
+                <a:latin typeface="Arial"/>
               </a:rPr>
-              <a:t>Too much reading. Too little time to interpret.</a:t>
+              <a:t>The challenge is turning fragmented evidence into a defensible meeting position.</a:t>
             </a:r>
           </a:p>
         </p:txBody>
@@ -3213,8 +4012,8 @@
         </p:nvSpPr>
         <p:spPr>
           <a:xfrm>
-            <a:off x="731520" y="2011680"/>
-            <a:ext cx="5577840" cy="1554480"/>
+            <a:off x="612648" y="6419088"/>
+            <a:ext cx="9601200" cy="201168"/>
           </a:xfrm>
           <a:prstGeom prst="rect">
             <a:avLst/>
@@ -3222,21 +4021,24 @@
           <a:noFill/>
         </p:spPr>
         <p:txBody>
-          <a:bodyPr wrap="square" lIns="18288" rIns="18288" anchor="t">
+          <a:bodyPr wrap="square" lIns="18288" rIns="18288" tIns="0" bIns="0" anchor="t">
             <a:spAutoFit/>
           </a:bodyPr>
           <a:lstStyle/>
           <a:p>
-            <a:pPr algn="l"/>
-            <a:r>
-              <a:rPr sz="3100" b="1">
-                <a:solidFill>
-                  <a:srgbClr val="102331"/>
-                </a:solidFill>
-                <a:latin typeface="Georgia"/>
+            <a:pPr>
+              <a:spcAft>
+                <a:spcPts val="800"/>
+              </a:spcAft>
+            </a:pPr>
+            <a:r>
+              <a:rPr sz="900" b="0">
+                <a:solidFill>
+                  <a:srgbClr val="ADDAD1"/>
+                </a:solidFill>
+                <a:latin typeface="Arial"/>
               </a:rPr>
-              <a:t>Reports, headlines, macro data.
-One decision to prepare for.</a:t>
+              <a:t>EXECUTIVE DECISION BRIEF  |  10 SEPTEMBER 2026</a:t>
             </a:r>
           </a:p>
         </p:txBody>
@@ -3249,8 +4051,8 @@
         </p:nvSpPr>
         <p:spPr>
           <a:xfrm>
-            <a:off x="749808" y="3977639"/>
-            <a:ext cx="5394960" cy="1188720"/>
+            <a:off x="10972800" y="6400800"/>
+            <a:ext cx="640080" cy="219456"/>
           </a:xfrm>
           <a:prstGeom prst="rect">
             <a:avLst/>
@@ -3258,20 +4060,24 @@
           <a:noFill/>
         </p:spPr>
         <p:txBody>
-          <a:bodyPr wrap="square" lIns="18288" rIns="18288" anchor="t">
+          <a:bodyPr wrap="square" lIns="18288" rIns="18288" tIns="0" bIns="0" anchor="t">
             <a:spAutoFit/>
           </a:bodyPr>
           <a:lstStyle/>
           <a:p>
-            <a:pPr algn="l"/>
-            <a:r>
-              <a:rPr sz="1800" b="0">
-                <a:solidFill>
-                  <a:srgbClr val="708087"/>
-                </a:solidFill>
-                <a:latin typeface="Aptos"/>
+            <a:pPr>
+              <a:spcAft>
+                <a:spcPts val="800"/>
+              </a:spcAft>
+            </a:pPr>
+            <a:r>
+              <a:rPr sz="1000" b="0">
+                <a:solidFill>
+                  <a:srgbClr val="ADDAD1"/>
+                </a:solidFill>
+                <a:latin typeface="Arial"/>
               </a:rPr>
-              <a:t>Teams repeatedly find reports, reconcile periods and rebuild the same evidence trail. The important change can be buried in a familiar market summary.</a:t>
+              <a:t>01 / 06</a:t>
             </a:r>
           </a:p>
         </p:txBody>
@@ -3284,18 +4090,18 @@
         </p:nvSpPr>
         <p:spPr>
           <a:xfrm>
-            <a:off x="6858000" y="2011680"/>
-            <a:ext cx="4572000" cy="3383280"/>
+            <a:off x="640080" y="2606040"/>
+            <a:ext cx="3566160" cy="2331720"/>
           </a:xfrm>
           <a:prstGeom prst="rect">
             <a:avLst/>
           </a:prstGeom>
           <a:solidFill>
-            <a:srgbClr val="FFFDF8"/>
+            <a:srgbClr val="193340"/>
           </a:solidFill>
           <a:ln>
             <a:solidFill>
-              <a:srgbClr val="D7D5CB"/>
+              <a:srgbClr val="38545E"/>
             </a:solidFill>
           </a:ln>
         </p:spPr>
@@ -3329,8 +4135,8 @@
         </p:nvSpPr>
         <p:spPr>
           <a:xfrm>
-            <a:off x="7059168" y="2194560"/>
-            <a:ext cx="4169663" cy="274320"/>
+            <a:off x="841247" y="2816352"/>
+            <a:ext cx="3154680" cy="365760"/>
           </a:xfrm>
           <a:prstGeom prst="rect">
             <a:avLst/>
@@ -3338,20 +4144,24 @@
           <a:noFill/>
         </p:spPr>
         <p:txBody>
-          <a:bodyPr wrap="square" lIns="18288" rIns="18288" anchor="t">
+          <a:bodyPr wrap="square" lIns="18288" rIns="18288" tIns="0" bIns="0" anchor="t">
             <a:spAutoFit/>
           </a:bodyPr>
           <a:lstStyle/>
           <a:p>
-            <a:pPr algn="l"/>
-            <a:r>
-              <a:rPr sz="900" b="1">
-                <a:solidFill>
-                  <a:srgbClr val="1B8077"/>
-                </a:solidFill>
-                <a:latin typeface="Aptos"/>
+            <a:pPr>
+              <a:spcAft>
+                <a:spcPts val="800"/>
+              </a:spcAft>
+            </a:pPr>
+            <a:r>
+              <a:rPr sz="1900" b="1">
+                <a:solidFill>
+                  <a:srgbClr val="ADDAD1"/>
+                </a:solidFill>
+                <a:latin typeface="Arial"/>
               </a:rPr>
-              <a:t>THE BUSINESS OUTCOME</a:t>
+              <a:t>Fragmented evidence</a:t>
             </a:r>
           </a:p>
         </p:txBody>
@@ -3364,8 +4174,8 @@
         </p:nvSpPr>
         <p:spPr>
           <a:xfrm>
-            <a:off x="7059168" y="2633472"/>
-            <a:ext cx="4169663" cy="2606040"/>
+            <a:off x="841247" y="3383280"/>
+            <a:ext cx="3127248" cy="1325880"/>
           </a:xfrm>
           <a:prstGeom prst="rect">
             <a:avLst/>
@@ -3373,21 +4183,348 @@
           <a:noFill/>
         </p:spPr>
         <p:txBody>
-          <a:bodyPr wrap="square" lIns="18288" rIns="18288" anchor="t">
+          <a:bodyPr wrap="square" lIns="18288" rIns="18288" tIns="0" bIns="0" anchor="t">
             <a:spAutoFit/>
           </a:bodyPr>
           <a:lstStyle/>
           <a:p>
-            <a:pPr algn="l"/>
-            <a:r>
-              <a:rPr sz="1500" b="0">
-                <a:solidFill>
-                  <a:srgbClr val="102331"/>
-                </a:solidFill>
-                <a:latin typeface="Aptos"/>
+            <a:pPr>
+              <a:spcAft>
+                <a:spcPts val="800"/>
+              </a:spcAft>
+            </a:pPr>
+            <a:r>
+              <a:rPr sz="1800" b="0">
+                <a:solidFill>
+                  <a:srgbClr val="FFFDF8"/>
+                </a:solidFill>
+                <a:latin typeface="Arial"/>
               </a:rPr>
-              <a:t>Move from raw information to important changes, plausible drivers and implications worth investigating.
-Bring the evidence into the meeting, with the uncertainty intact.</a:t>
+              <a:t>Broker reports, market news and economic signals arrive in different formats and periods.</a:t>
+            </a:r>
+          </a:p>
+        </p:txBody>
+      </p:sp>
+      <p:sp>
+        <p:nvSpPr>
+          <p:cNvPr id="10" name="Rectangle 9"/>
+          <p:cNvSpPr/>
+          <p:nvPr/>
+        </p:nvSpPr>
+        <p:spPr>
+          <a:xfrm>
+            <a:off x="4434840" y="2606040"/>
+            <a:ext cx="3566160" cy="2331720"/>
+          </a:xfrm>
+          <a:prstGeom prst="rect">
+            <a:avLst/>
+          </a:prstGeom>
+          <a:solidFill>
+            <a:srgbClr val="193340"/>
+          </a:solidFill>
+          <a:ln>
+            <a:solidFill>
+              <a:srgbClr val="38545E"/>
+            </a:solidFill>
+          </a:ln>
+        </p:spPr>
+        <p:style>
+          <a:lnRef idx="1">
+            <a:schemeClr val="accent1"/>
+          </a:lnRef>
+          <a:fillRef idx="3">
+            <a:schemeClr val="accent1"/>
+          </a:fillRef>
+          <a:effectRef idx="2">
+            <a:schemeClr val="accent1"/>
+          </a:effectRef>
+          <a:fontRef idx="minor">
+            <a:schemeClr val="lt1"/>
+          </a:fontRef>
+        </p:style>
+        <p:txBody>
+          <a:bodyPr rtlCol="0" anchor="ctr"/>
+          <a:lstStyle/>
+          <a:p>
+            <a:pPr algn="ctr"/>
+          </a:p>
+        </p:txBody>
+      </p:sp>
+      <p:sp>
+        <p:nvSpPr>
+          <p:cNvPr id="11" name="TextBox 10"/>
+          <p:cNvSpPr txBox="1"/>
+          <p:nvPr/>
+        </p:nvSpPr>
+        <p:spPr>
+          <a:xfrm>
+            <a:off x="4636008" y="2816352"/>
+            <a:ext cx="3154680" cy="365760"/>
+          </a:xfrm>
+          <a:prstGeom prst="rect">
+            <a:avLst/>
+          </a:prstGeom>
+          <a:noFill/>
+        </p:spPr>
+        <p:txBody>
+          <a:bodyPr wrap="square" lIns="18288" rIns="18288" tIns="0" bIns="0" anchor="t">
+            <a:spAutoFit/>
+          </a:bodyPr>
+          <a:lstStyle/>
+          <a:p>
+            <a:pPr>
+              <a:spcAft>
+                <a:spcPts val="800"/>
+              </a:spcAft>
+            </a:pPr>
+            <a:r>
+              <a:rPr sz="1900" b="1">
+                <a:solidFill>
+                  <a:srgbClr val="ADDAD1"/>
+                </a:solidFill>
+                <a:latin typeface="Arial"/>
+              </a:rPr>
+              <a:t>Decision risk</a:t>
+            </a:r>
+          </a:p>
+        </p:txBody>
+      </p:sp>
+      <p:sp>
+        <p:nvSpPr>
+          <p:cNvPr id="12" name="TextBox 11"/>
+          <p:cNvSpPr txBox="1"/>
+          <p:nvPr/>
+        </p:nvSpPr>
+        <p:spPr>
+          <a:xfrm>
+            <a:off x="4636008" y="3383280"/>
+            <a:ext cx="3127248" cy="1325880"/>
+          </a:xfrm>
+          <a:prstGeom prst="rect">
+            <a:avLst/>
+          </a:prstGeom>
+          <a:noFill/>
+        </p:spPr>
+        <p:txBody>
+          <a:bodyPr wrap="square" lIns="18288" rIns="18288" tIns="0" bIns="0" anchor="t">
+            <a:spAutoFit/>
+          </a:bodyPr>
+          <a:lstStyle/>
+          <a:p>
+            <a:pPr>
+              <a:spcAft>
+                <a:spcPts val="800"/>
+              </a:spcAft>
+            </a:pPr>
+            <a:r>
+              <a:rPr sz="1800" b="0">
+                <a:solidFill>
+                  <a:srgbClr val="FFFDF8"/>
+                </a:solidFill>
+                <a:latin typeface="Arial"/>
+              </a:rPr>
+              <a:t>A headline rent or isolated deal can obscure the wider picture of demand, supply and vacancy.</a:t>
+            </a:r>
+          </a:p>
+        </p:txBody>
+      </p:sp>
+      <p:sp>
+        <p:nvSpPr>
+          <p:cNvPr id="13" name="Rectangle 12"/>
+          <p:cNvSpPr/>
+          <p:nvPr/>
+        </p:nvSpPr>
+        <p:spPr>
+          <a:xfrm>
+            <a:off x="8229600" y="2606040"/>
+            <a:ext cx="3566160" cy="2331720"/>
+          </a:xfrm>
+          <a:prstGeom prst="rect">
+            <a:avLst/>
+          </a:prstGeom>
+          <a:solidFill>
+            <a:srgbClr val="193340"/>
+          </a:solidFill>
+          <a:ln>
+            <a:solidFill>
+              <a:srgbClr val="38545E"/>
+            </a:solidFill>
+          </a:ln>
+        </p:spPr>
+        <p:style>
+          <a:lnRef idx="1">
+            <a:schemeClr val="accent1"/>
+          </a:lnRef>
+          <a:fillRef idx="3">
+            <a:schemeClr val="accent1"/>
+          </a:fillRef>
+          <a:effectRef idx="2">
+            <a:schemeClr val="accent1"/>
+          </a:effectRef>
+          <a:fontRef idx="minor">
+            <a:schemeClr val="lt1"/>
+          </a:fontRef>
+        </p:style>
+        <p:txBody>
+          <a:bodyPr rtlCol="0" anchor="ctr"/>
+          <a:lstStyle/>
+          <a:p>
+            <a:pPr algn="ctr"/>
+          </a:p>
+        </p:txBody>
+      </p:sp>
+      <p:sp>
+        <p:nvSpPr>
+          <p:cNvPr id="14" name="TextBox 13"/>
+          <p:cNvSpPr txBox="1"/>
+          <p:nvPr/>
+        </p:nvSpPr>
+        <p:spPr>
+          <a:xfrm>
+            <a:off x="8430768" y="2816352"/>
+            <a:ext cx="3154680" cy="365760"/>
+          </a:xfrm>
+          <a:prstGeom prst="rect">
+            <a:avLst/>
+          </a:prstGeom>
+          <a:noFill/>
+        </p:spPr>
+        <p:txBody>
+          <a:bodyPr wrap="square" lIns="18288" rIns="18288" tIns="0" bIns="0" anchor="t">
+            <a:spAutoFit/>
+          </a:bodyPr>
+          <a:lstStyle/>
+          <a:p>
+            <a:pPr>
+              <a:spcAft>
+                <a:spcPts val="800"/>
+              </a:spcAft>
+            </a:pPr>
+            <a:r>
+              <a:rPr sz="1900" b="1">
+                <a:solidFill>
+                  <a:srgbClr val="ADDAD1"/>
+                </a:solidFill>
+                <a:latin typeface="Arial"/>
+              </a:rPr>
+              <a:t>A clearer position</a:t>
+            </a:r>
+          </a:p>
+        </p:txBody>
+      </p:sp>
+      <p:sp>
+        <p:nvSpPr>
+          <p:cNvPr id="15" name="TextBox 14"/>
+          <p:cNvSpPr txBox="1"/>
+          <p:nvPr/>
+        </p:nvSpPr>
+        <p:spPr>
+          <a:xfrm>
+            <a:off x="8430768" y="3383280"/>
+            <a:ext cx="3127248" cy="1325880"/>
+          </a:xfrm>
+          <a:prstGeom prst="rect">
+            <a:avLst/>
+          </a:prstGeom>
+          <a:noFill/>
+        </p:spPr>
+        <p:txBody>
+          <a:bodyPr wrap="square" lIns="18288" rIns="18288" tIns="0" bIns="0" anchor="t">
+            <a:spAutoFit/>
+          </a:bodyPr>
+          <a:lstStyle/>
+          <a:p>
+            <a:pPr>
+              <a:spcAft>
+                <a:spcPts val="800"/>
+              </a:spcAft>
+            </a:pPr>
+            <a:r>
+              <a:rPr sz="1800" b="0">
+                <a:solidFill>
+                  <a:srgbClr val="FFFDF8"/>
+                </a:solidFill>
+                <a:latin typeface="Arial"/>
+              </a:rPr>
+              <a:t>Bring the takeaway, supporting sources and unresolved questions into the same conversation.</a:t>
+            </a:r>
+          </a:p>
+        </p:txBody>
+      </p:sp>
+      <p:sp>
+        <p:nvSpPr>
+          <p:cNvPr id="16" name="TextBox 15"/>
+          <p:cNvSpPr txBox="1"/>
+          <p:nvPr/>
+        </p:nvSpPr>
+        <p:spPr>
+          <a:xfrm>
+            <a:off x="658368" y="5349240"/>
+            <a:ext cx="10789920" cy="365760"/>
+          </a:xfrm>
+          <a:prstGeom prst="rect">
+            <a:avLst/>
+          </a:prstGeom>
+          <a:noFill/>
+        </p:spPr>
+        <p:txBody>
+          <a:bodyPr wrap="square" lIns="18288" rIns="18288" tIns="0" bIns="0" anchor="t">
+            <a:spAutoFit/>
+          </a:bodyPr>
+          <a:lstStyle/>
+          <a:p>
+            <a:pPr>
+              <a:spcAft>
+                <a:spcPts val="800"/>
+              </a:spcAft>
+            </a:pPr>
+            <a:r>
+              <a:rPr sz="1900" b="0">
+                <a:solidFill>
+                  <a:srgbClr val="FFFDF8"/>
+                </a:solidFill>
+                <a:latin typeface="Arial"/>
+              </a:rPr>
+              <a:t>Rents  /  Vacancy  /  Leasing demand  /  New supply  /  Economic drivers</a:t>
+            </a:r>
+          </a:p>
+        </p:txBody>
+      </p:sp>
+      <p:sp>
+        <p:nvSpPr>
+          <p:cNvPr id="17" name="TextBox 16"/>
+          <p:cNvSpPr txBox="1"/>
+          <p:nvPr/>
+        </p:nvSpPr>
+        <p:spPr>
+          <a:xfrm>
+            <a:off x="658368" y="5852160"/>
+            <a:ext cx="10789920" cy="274320"/>
+          </a:xfrm>
+          <a:prstGeom prst="rect">
+            <a:avLst/>
+          </a:prstGeom>
+          <a:noFill/>
+        </p:spPr>
+        <p:txBody>
+          <a:bodyPr wrap="square" lIns="18288" rIns="18288" tIns="0" bIns="0" anchor="t">
+            <a:spAutoFit/>
+          </a:bodyPr>
+          <a:lstStyle/>
+          <a:p>
+            <a:pPr>
+              <a:spcAft>
+                <a:spcPts val="800"/>
+              </a:spcAft>
+            </a:pPr>
+            <a:r>
+              <a:rPr sz="1600" b="0">
+                <a:solidFill>
+                  <a:srgbClr val="ADDAD1"/>
+                </a:solidFill>
+                <a:latin typeface="Arial"/>
+              </a:rPr>
+              <a:t>London focus: City, West End, Canary Wharf and Midtown / Fringe</a:t>
             </a:r>
           </a:p>
         </p:txBody>
@@ -3406,7 +4543,7 @@
     <p:bg>
       <p:bgPr>
         <a:solidFill>
-          <a:srgbClr val="102331"/>
+          <a:srgbClr val="F4F1EA"/>
         </a:solidFill>
         <a:effectLst/>
       </p:bgPr>
@@ -3426,8 +4563,8 @@
         </p:nvSpPr>
         <p:spPr>
           <a:xfrm>
-            <a:off x="594360" y="365760"/>
-            <a:ext cx="7315200" cy="228600"/>
+            <a:off x="594360" y="329184"/>
+            <a:ext cx="9144000" cy="201168"/>
           </a:xfrm>
           <a:prstGeom prst="rect">
             <a:avLst/>
@@ -3435,20 +4572,24 @@
           <a:noFill/>
         </p:spPr>
         <p:txBody>
-          <a:bodyPr wrap="square" lIns="18288" rIns="18288" anchor="t">
+          <a:bodyPr wrap="square" lIns="18288" rIns="18288" tIns="0" bIns="0" anchor="t">
             <a:spAutoFit/>
           </a:bodyPr>
           <a:lstStyle/>
           <a:p>
-            <a:pPr algn="l"/>
-            <a:r>
-              <a:rPr sz="900" b="1">
-                <a:solidFill>
-                  <a:srgbClr val="A4D4CD"/>
-                </a:solidFill>
-                <a:latin typeface="Aptos"/>
+            <a:pPr>
+              <a:spcAft>
+                <a:spcPts val="800"/>
+              </a:spcAft>
+            </a:pPr>
+            <a:r>
+              <a:rPr sz="1000" b="1">
+                <a:solidFill>
+                  <a:srgbClr val="1B8077"/>
+                </a:solidFill>
+                <a:latin typeface="Arial"/>
               </a:rPr>
-              <a:t>LONDON MARKET MONITOR  /  THE WORKFLOW  ·  MARKET INTELLIGENCE</a:t>
+              <a:t>LONDON MARKET MONITOR  /  DECISION</a:t>
             </a:r>
           </a:p>
         </p:txBody>
@@ -3461,8 +4602,8 @@
         </p:nvSpPr>
         <p:spPr>
           <a:xfrm>
-            <a:off x="10972800" y="365760"/>
-            <a:ext cx="640080" cy="228600"/>
+            <a:off x="594360" y="877824"/>
+            <a:ext cx="10972800" cy="1051560"/>
           </a:xfrm>
           <a:prstGeom prst="rect">
             <a:avLst/>
@@ -3470,20 +4611,24 @@
           <a:noFill/>
         </p:spPr>
         <p:txBody>
-          <a:bodyPr wrap="square" lIns="18288" rIns="18288" anchor="t">
+          <a:bodyPr wrap="square" lIns="18288" rIns="18288" tIns="0" bIns="0" anchor="t">
             <a:spAutoFit/>
           </a:bodyPr>
           <a:lstStyle/>
           <a:p>
-            <a:pPr algn="r"/>
-            <a:r>
-              <a:rPr sz="900" b="1">
-                <a:solidFill>
-                  <a:srgbClr val="A0B4B7"/>
-                </a:solidFill>
-                <a:latin typeface="Aptos"/>
+            <a:pPr>
+              <a:spcAft>
+                <a:spcPts val="800"/>
+              </a:spcAft>
+            </a:pPr>
+            <a:r>
+              <a:rPr sz="2900" b="1">
+                <a:solidFill>
+                  <a:srgbClr val="102331"/>
+                </a:solidFill>
+                <a:latin typeface="Arial"/>
               </a:rPr>
-              <a:t>02</a:t>
+              <a:t>Start with the decision you need to prepare for</a:t>
             </a:r>
           </a:p>
         </p:txBody>
@@ -3496,8 +4641,8 @@
         </p:nvSpPr>
         <p:spPr>
           <a:xfrm>
-            <a:off x="594360" y="960120"/>
-            <a:ext cx="10789920" cy="731520"/>
+            <a:off x="612648" y="1691640"/>
+            <a:ext cx="10881360" cy="594360"/>
           </a:xfrm>
           <a:prstGeom prst="rect">
             <a:avLst/>
@@ -3505,44 +4650,126 @@
           <a:noFill/>
         </p:spPr>
         <p:txBody>
-          <a:bodyPr wrap="square" lIns="18288" rIns="18288" anchor="t">
+          <a:bodyPr wrap="square" lIns="18288" rIns="18288" tIns="0" bIns="0" anchor="t">
             <a:spAutoFit/>
           </a:bodyPr>
           <a:lstStyle/>
           <a:p>
-            <a:pPr algn="l"/>
-            <a:r>
-              <a:rPr sz="3000" b="1">
-                <a:solidFill>
-                  <a:srgbClr val="FFFDF8"/>
-                </a:solidFill>
-                <a:latin typeface="Georgia"/>
+            <a:pPr>
+              <a:spcAft>
+                <a:spcPts val="800"/>
+              </a:spcAft>
+            </a:pPr>
+            <a:r>
+              <a:rPr sz="1700" b="0">
+                <a:solidFill>
+                  <a:srgbClr val="52676D"/>
+                </a:solidFill>
+                <a:latin typeface="Arial"/>
               </a:rPr>
-              <a:t>Ask what changed. Leave ready to discuss it.</a:t>
-            </a:r>
-          </a:p>
-        </p:txBody>
-      </p:sp>
-      <p:sp>
-        <p:nvSpPr>
-          <p:cNvPr id="5" name="Rectangle 4"/>
+              <a:t>Define the business question, the market and the period before assessing the evidence.</a:t>
+            </a:r>
+          </a:p>
+        </p:txBody>
+      </p:sp>
+      <p:sp>
+        <p:nvSpPr>
+          <p:cNvPr id="5" name="TextBox 4"/>
+          <p:cNvSpPr txBox="1"/>
+          <p:nvPr/>
+        </p:nvSpPr>
+        <p:spPr>
+          <a:xfrm>
+            <a:off x="612648" y="6419088"/>
+            <a:ext cx="9601200" cy="201168"/>
+          </a:xfrm>
+          <a:prstGeom prst="rect">
+            <a:avLst/>
+          </a:prstGeom>
+          <a:noFill/>
+        </p:spPr>
+        <p:txBody>
+          <a:bodyPr wrap="square" lIns="18288" rIns="18288" tIns="0" bIns="0" anchor="t">
+            <a:spAutoFit/>
+          </a:bodyPr>
+          <a:lstStyle/>
+          <a:p>
+            <a:pPr>
+              <a:spcAft>
+                <a:spcPts val="800"/>
+              </a:spcAft>
+            </a:pPr>
+            <a:r>
+              <a:rPr sz="900" b="0">
+                <a:solidFill>
+                  <a:srgbClr val="52676D"/>
+                </a:solidFill>
+                <a:latin typeface="Arial"/>
+              </a:rPr>
+              <a:t>EXECUTIVE DECISION BRIEF  |  10 SEPTEMBER 2026</a:t>
+            </a:r>
+          </a:p>
+        </p:txBody>
+      </p:sp>
+      <p:sp>
+        <p:nvSpPr>
+          <p:cNvPr id="6" name="TextBox 5"/>
+          <p:cNvSpPr txBox="1"/>
+          <p:nvPr/>
+        </p:nvSpPr>
+        <p:spPr>
+          <a:xfrm>
+            <a:off x="10972800" y="6400800"/>
+            <a:ext cx="640080" cy="219456"/>
+          </a:xfrm>
+          <a:prstGeom prst="rect">
+            <a:avLst/>
+          </a:prstGeom>
+          <a:noFill/>
+        </p:spPr>
+        <p:txBody>
+          <a:bodyPr wrap="square" lIns="18288" rIns="18288" tIns="0" bIns="0" anchor="t">
+            <a:spAutoFit/>
+          </a:bodyPr>
+          <a:lstStyle/>
+          <a:p>
+            <a:pPr>
+              <a:spcAft>
+                <a:spcPts val="800"/>
+              </a:spcAft>
+            </a:pPr>
+            <a:r>
+              <a:rPr sz="1000" b="0">
+                <a:solidFill>
+                  <a:srgbClr val="52676D"/>
+                </a:solidFill>
+                <a:latin typeface="Arial"/>
+              </a:rPr>
+              <a:t>02 / 06</a:t>
+            </a:r>
+          </a:p>
+        </p:txBody>
+      </p:sp>
+      <p:sp>
+        <p:nvSpPr>
+          <p:cNvPr id="7" name="Rectangle 6"/>
           <p:cNvSpPr/>
           <p:nvPr/>
         </p:nvSpPr>
         <p:spPr>
           <a:xfrm>
-            <a:off x="731520" y="2011680"/>
-            <a:ext cx="3337560" cy="3291840"/>
+            <a:off x="640080" y="2514600"/>
+            <a:ext cx="3566160" cy="3474720"/>
           </a:xfrm>
           <a:prstGeom prst="rect">
             <a:avLst/>
           </a:prstGeom>
           <a:solidFill>
-            <a:srgbClr val="193340"/>
+            <a:srgbClr val="FFFDF8"/>
           </a:solidFill>
           <a:ln>
             <a:solidFill>
-              <a:srgbClr val="38545E"/>
+              <a:srgbClr val="D7D5CB"/>
             </a:solidFill>
           </a:ln>
         </p:spPr>
@@ -3570,14 +4797,14 @@
       </p:sp>
       <p:sp>
         <p:nvSpPr>
-          <p:cNvPr id="6" name="TextBox 5"/>
+          <p:cNvPr id="8" name="TextBox 7"/>
           <p:cNvSpPr txBox="1"/>
           <p:nvPr/>
         </p:nvSpPr>
         <p:spPr>
           <a:xfrm>
-            <a:off x="932688" y="2194560"/>
-            <a:ext cx="2935224" cy="274320"/>
+            <a:off x="859536" y="2743200"/>
+            <a:ext cx="3108960" cy="228600"/>
           </a:xfrm>
           <a:prstGeom prst="rect">
             <a:avLst/>
@@ -3585,18 +4812,22 @@
           <a:noFill/>
         </p:spPr>
         <p:txBody>
-          <a:bodyPr wrap="square" lIns="18288" rIns="18288" anchor="t">
+          <a:bodyPr wrap="square" lIns="18288" rIns="18288" tIns="0" bIns="0" anchor="t">
             <a:spAutoFit/>
           </a:bodyPr>
           <a:lstStyle/>
           <a:p>
-            <a:pPr algn="l"/>
-            <a:r>
-              <a:rPr sz="900" b="1">
-                <a:solidFill>
-                  <a:srgbClr val="A4D4CD"/>
-                </a:solidFill>
-                <a:latin typeface="Aptos"/>
+            <a:pPr>
+              <a:spcAft>
+                <a:spcPts val="800"/>
+              </a:spcAft>
+            </a:pPr>
+            <a:r>
+              <a:rPr sz="1100" b="1">
+                <a:solidFill>
+                  <a:srgbClr val="1B8077"/>
+                </a:solidFill>
+                <a:latin typeface="Arial"/>
               </a:rPr>
               <a:t>MONITOR</a:t>
             </a:r>
@@ -3605,14 +4836,14 @@
       </p:sp>
       <p:sp>
         <p:nvSpPr>
-          <p:cNvPr id="7" name="TextBox 6"/>
+          <p:cNvPr id="9" name="TextBox 8"/>
           <p:cNvSpPr txBox="1"/>
           <p:nvPr/>
         </p:nvSpPr>
         <p:spPr>
           <a:xfrm>
-            <a:off x="932688" y="2633472"/>
-            <a:ext cx="2935224" cy="2514600"/>
+            <a:off x="859536" y="3136392"/>
+            <a:ext cx="3108960" cy="640080"/>
           </a:xfrm>
           <a:prstGeom prst="rect">
             <a:avLst/>
@@ -3620,45 +4851,126 @@
           <a:noFill/>
         </p:spPr>
         <p:txBody>
-          <a:bodyPr wrap="square" lIns="18288" rIns="18288" anchor="t">
+          <a:bodyPr wrap="square" lIns="18288" rIns="18288" tIns="0" bIns="0" anchor="t">
             <a:spAutoFit/>
           </a:bodyPr>
           <a:lstStyle/>
           <a:p>
-            <a:pPr algn="l"/>
-            <a:r>
-              <a:rPr sz="1500" b="0">
-                <a:solidFill>
-                  <a:srgbClr val="F4F1EA"/>
-                </a:solidFill>
-                <a:latin typeface="Aptos"/>
+            <a:pPr>
+              <a:spcAft>
+                <a:spcPts val="800"/>
+              </a:spcAft>
+            </a:pPr>
+            <a:r>
+              <a:rPr sz="2300" b="1">
+                <a:solidFill>
+                  <a:srgbClr val="102331"/>
+                </a:solidFill>
+                <a:latin typeface="Arial"/>
               </a:rPr>
-              <a:t>What happened since I last checked?
-Material movements, new evidence and changing risks, compared with an explicit baseline.</a:t>
-            </a:r>
-          </a:p>
-        </p:txBody>
-      </p:sp>
-      <p:sp>
-        <p:nvSpPr>
-          <p:cNvPr id="8" name="Rectangle 7"/>
+              <a:t>Reset priorities</a:t>
+            </a:r>
+          </a:p>
+        </p:txBody>
+      </p:sp>
+      <p:sp>
+        <p:nvSpPr>
+          <p:cNvPr id="10" name="TextBox 9"/>
+          <p:cNvSpPr txBox="1"/>
+          <p:nvPr/>
+        </p:nvSpPr>
+        <p:spPr>
+          <a:xfrm>
+            <a:off x="859536" y="3959352"/>
+            <a:ext cx="3108960" cy="777240"/>
+          </a:xfrm>
+          <a:prstGeom prst="rect">
+            <a:avLst/>
+          </a:prstGeom>
+          <a:noFill/>
+        </p:spPr>
+        <p:txBody>
+          <a:bodyPr wrap="square" lIns="18288" rIns="18288" tIns="0" bIns="0" anchor="t">
+            <a:spAutoFit/>
+          </a:bodyPr>
+          <a:lstStyle/>
+          <a:p>
+            <a:pPr>
+              <a:spcAft>
+                <a:spcPts val="800"/>
+              </a:spcAft>
+            </a:pPr>
+            <a:r>
+              <a:rPr sz="1900" b="0">
+                <a:solidFill>
+                  <a:srgbClr val="102331"/>
+                </a:solidFill>
+                <a:latin typeface="Arial"/>
+              </a:rPr>
+              <a:t>What changed versus the previous quarter?</a:t>
+            </a:r>
+          </a:p>
+        </p:txBody>
+      </p:sp>
+      <p:sp>
+        <p:nvSpPr>
+          <p:cNvPr id="11" name="TextBox 10"/>
+          <p:cNvSpPr txBox="1"/>
+          <p:nvPr/>
+        </p:nvSpPr>
+        <p:spPr>
+          <a:xfrm>
+            <a:off x="859536" y="4956048"/>
+            <a:ext cx="3108960" cy="868680"/>
+          </a:xfrm>
+          <a:prstGeom prst="rect">
+            <a:avLst/>
+          </a:prstGeom>
+          <a:noFill/>
+        </p:spPr>
+        <p:txBody>
+          <a:bodyPr wrap="square" lIns="18288" rIns="18288" tIns="0" bIns="0" anchor="t">
+            <a:spAutoFit/>
+          </a:bodyPr>
+          <a:lstStyle/>
+          <a:p>
+            <a:pPr>
+              <a:spcAft>
+                <a:spcPts val="800"/>
+              </a:spcAft>
+            </a:pPr>
+            <a:r>
+              <a:rPr sz="1700" b="0">
+                <a:solidFill>
+                  <a:srgbClr val="52676D"/>
+                </a:solidFill>
+                <a:latin typeface="Arial"/>
+              </a:rPr>
+              <a:t>Identify material movements and decide what needs attention.</a:t>
+            </a:r>
+          </a:p>
+        </p:txBody>
+      </p:sp>
+      <p:sp>
+        <p:nvSpPr>
+          <p:cNvPr id="12" name="Rectangle 11"/>
           <p:cNvSpPr/>
           <p:nvPr/>
         </p:nvSpPr>
         <p:spPr>
           <a:xfrm>
-            <a:off x="4434840" y="2011680"/>
-            <a:ext cx="3337560" cy="3291840"/>
+            <a:off x="4434840" y="2514600"/>
+            <a:ext cx="3566160" cy="3474720"/>
           </a:xfrm>
           <a:prstGeom prst="rect">
             <a:avLst/>
           </a:prstGeom>
           <a:solidFill>
-            <a:srgbClr val="193340"/>
+            <a:srgbClr val="FFFDF8"/>
           </a:solidFill>
           <a:ln>
             <a:solidFill>
-              <a:srgbClr val="38545E"/>
+              <a:srgbClr val="D7D5CB"/>
             </a:solidFill>
           </a:ln>
         </p:spPr>
@@ -3686,14 +4998,14 @@
       </p:sp>
       <p:sp>
         <p:nvSpPr>
-          <p:cNvPr id="9" name="TextBox 8"/>
+          <p:cNvPr id="13" name="TextBox 12"/>
           <p:cNvSpPr txBox="1"/>
           <p:nvPr/>
         </p:nvSpPr>
         <p:spPr>
           <a:xfrm>
-            <a:off x="4636007" y="2194560"/>
-            <a:ext cx="2935224" cy="274320"/>
+            <a:off x="4654296" y="2743200"/>
+            <a:ext cx="3108960" cy="228600"/>
           </a:xfrm>
           <a:prstGeom prst="rect">
             <a:avLst/>
@@ -3701,18 +5013,22 @@
           <a:noFill/>
         </p:spPr>
         <p:txBody>
-          <a:bodyPr wrap="square" lIns="18288" rIns="18288" anchor="t">
+          <a:bodyPr wrap="square" lIns="18288" rIns="18288" tIns="0" bIns="0" anchor="t">
             <a:spAutoFit/>
           </a:bodyPr>
           <a:lstStyle/>
           <a:p>
-            <a:pPr algn="l"/>
-            <a:r>
-              <a:rPr sz="900" b="1">
-                <a:solidFill>
-                  <a:srgbClr val="A4D4CD"/>
-                </a:solidFill>
-                <a:latin typeface="Aptos"/>
+            <a:pPr>
+              <a:spcAft>
+                <a:spcPts val="800"/>
+              </a:spcAft>
+            </a:pPr>
+            <a:r>
+              <a:rPr sz="1100" b="1">
+                <a:solidFill>
+                  <a:srgbClr val="1B8077"/>
+                </a:solidFill>
+                <a:latin typeface="Arial"/>
               </a:rPr>
               <a:t>INVESTIGATE</a:t>
             </a:r>
@@ -3721,14 +5037,14 @@
       </p:sp>
       <p:sp>
         <p:nvSpPr>
-          <p:cNvPr id="10" name="TextBox 9"/>
+          <p:cNvPr id="14" name="TextBox 13"/>
           <p:cNvSpPr txBox="1"/>
           <p:nvPr/>
         </p:nvSpPr>
         <p:spPr>
           <a:xfrm>
-            <a:off x="4636007" y="2633472"/>
-            <a:ext cx="2935224" cy="2514600"/>
+            <a:off x="4654296" y="3136392"/>
+            <a:ext cx="3108960" cy="640080"/>
           </a:xfrm>
           <a:prstGeom prst="rect">
             <a:avLst/>
@@ -3736,45 +5052,126 @@
           <a:noFill/>
         </p:spPr>
         <p:txBody>
-          <a:bodyPr wrap="square" lIns="18288" rIns="18288" anchor="t">
+          <a:bodyPr wrap="square" lIns="18288" rIns="18288" tIns="0" bIns="0" anchor="t">
             <a:spAutoFit/>
           </a:bodyPr>
           <a:lstStyle/>
           <a:p>
-            <a:pPr algn="l"/>
-            <a:r>
-              <a:rPr sz="1500" b="0">
-                <a:solidFill>
-                  <a:srgbClr val="F4F1EA"/>
-                </a:solidFill>
-                <a:latin typeface="Aptos"/>
+            <a:pPr>
+              <a:spcAft>
+                <a:spcPts val="800"/>
+              </a:spcAft>
+            </a:pPr>
+            <a:r>
+              <a:rPr sz="2300" b="1">
+                <a:solidFill>
+                  <a:srgbClr val="102331"/>
+                </a:solidFill>
+                <a:latin typeface="Arial"/>
               </a:rPr>
-              <a:t>I heard West End is outperforming City. Is it true?
-Test the claim across rents, vacancy, demand, supply and commentary.</a:t>
-            </a:r>
-          </a:p>
-        </p:txBody>
-      </p:sp>
-      <p:sp>
-        <p:nvSpPr>
-          <p:cNvPr id="11" name="Rectangle 10"/>
+              <a:t>Challenge a view</a:t>
+            </a:r>
+          </a:p>
+        </p:txBody>
+      </p:sp>
+      <p:sp>
+        <p:nvSpPr>
+          <p:cNvPr id="15" name="TextBox 14"/>
+          <p:cNvSpPr txBox="1"/>
+          <p:nvPr/>
+        </p:nvSpPr>
+        <p:spPr>
+          <a:xfrm>
+            <a:off x="4654296" y="3959352"/>
+            <a:ext cx="3108960" cy="777240"/>
+          </a:xfrm>
+          <a:prstGeom prst="rect">
+            <a:avLst/>
+          </a:prstGeom>
+          <a:noFill/>
+        </p:spPr>
+        <p:txBody>
+          <a:bodyPr wrap="square" lIns="18288" rIns="18288" tIns="0" bIns="0" anchor="t">
+            <a:spAutoFit/>
+          </a:bodyPr>
+          <a:lstStyle/>
+          <a:p>
+            <a:pPr>
+              <a:spcAft>
+                <a:spcPts val="800"/>
+              </a:spcAft>
+            </a:pPr>
+            <a:r>
+              <a:rPr sz="1900" b="0">
+                <a:solidFill>
+                  <a:srgbClr val="102331"/>
+                </a:solidFill>
+                <a:latin typeface="Arial"/>
+              </a:rPr>
+              <a:t>Is West End outperforming City?</a:t>
+            </a:r>
+          </a:p>
+        </p:txBody>
+      </p:sp>
+      <p:sp>
+        <p:nvSpPr>
+          <p:cNvPr id="16" name="TextBox 15"/>
+          <p:cNvSpPr txBox="1"/>
+          <p:nvPr/>
+        </p:nvSpPr>
+        <p:spPr>
+          <a:xfrm>
+            <a:off x="4654296" y="4956048"/>
+            <a:ext cx="3108960" cy="868680"/>
+          </a:xfrm>
+          <a:prstGeom prst="rect">
+            <a:avLst/>
+          </a:prstGeom>
+          <a:noFill/>
+        </p:spPr>
+        <p:txBody>
+          <a:bodyPr wrap="square" lIns="18288" rIns="18288" tIns="0" bIns="0" anchor="t">
+            <a:spAutoFit/>
+          </a:bodyPr>
+          <a:lstStyle/>
+          <a:p>
+            <a:pPr>
+              <a:spcAft>
+                <a:spcPts val="800"/>
+              </a:spcAft>
+            </a:pPr>
+            <a:r>
+              <a:rPr sz="1700" b="0">
+                <a:solidFill>
+                  <a:srgbClr val="52676D"/>
+                </a:solidFill>
+                <a:latin typeface="Arial"/>
+              </a:rPr>
+              <a:t>Test the evidence for and against a view before adopting it.</a:t>
+            </a:r>
+          </a:p>
+        </p:txBody>
+      </p:sp>
+      <p:sp>
+        <p:nvSpPr>
+          <p:cNvPr id="17" name="Rectangle 16"/>
           <p:cNvSpPr/>
           <p:nvPr/>
         </p:nvSpPr>
         <p:spPr>
           <a:xfrm>
-            <a:off x="8138160" y="2011680"/>
-            <a:ext cx="3337560" cy="3291840"/>
+            <a:off x="8229600" y="2514600"/>
+            <a:ext cx="3566160" cy="3474720"/>
           </a:xfrm>
           <a:prstGeom prst="rect">
             <a:avLst/>
           </a:prstGeom>
           <a:solidFill>
-            <a:srgbClr val="193340"/>
+            <a:srgbClr val="FFFDF8"/>
           </a:solidFill>
           <a:ln>
             <a:solidFill>
-              <a:srgbClr val="38545E"/>
+              <a:srgbClr val="D7D5CB"/>
             </a:solidFill>
           </a:ln>
         </p:spPr>
@@ -3802,14 +5199,14 @@
       </p:sp>
       <p:sp>
         <p:nvSpPr>
-          <p:cNvPr id="12" name="TextBox 11"/>
+          <p:cNvPr id="18" name="TextBox 17"/>
           <p:cNvSpPr txBox="1"/>
           <p:nvPr/>
         </p:nvSpPr>
         <p:spPr>
           <a:xfrm>
-            <a:off x="8339328" y="2194560"/>
-            <a:ext cx="2935224" cy="274320"/>
+            <a:off x="8449056" y="2743200"/>
+            <a:ext cx="3108960" cy="228600"/>
           </a:xfrm>
           <a:prstGeom prst="rect">
             <a:avLst/>
@@ -3817,18 +5214,22 @@
           <a:noFill/>
         </p:spPr>
         <p:txBody>
-          <a:bodyPr wrap="square" lIns="18288" rIns="18288" anchor="t">
+          <a:bodyPr wrap="square" lIns="18288" rIns="18288" tIns="0" bIns="0" anchor="t">
             <a:spAutoFit/>
           </a:bodyPr>
           <a:lstStyle/>
           <a:p>
-            <a:pPr algn="l"/>
-            <a:r>
-              <a:rPr sz="900" b="1">
-                <a:solidFill>
-                  <a:srgbClr val="A4D4CD"/>
-                </a:solidFill>
-                <a:latin typeface="Aptos"/>
+            <a:pPr>
+              <a:spcAft>
+                <a:spcPts val="800"/>
+              </a:spcAft>
+            </a:pPr>
+            <a:r>
+              <a:rPr sz="1100" b="1">
+                <a:solidFill>
+                  <a:srgbClr val="1B8077"/>
+                </a:solidFill>
+                <a:latin typeface="Arial"/>
               </a:rPr>
               <a:t>PREPARE</a:t>
             </a:r>
@@ -3837,14 +5238,14 @@
       </p:sp>
       <p:sp>
         <p:nvSpPr>
-          <p:cNvPr id="13" name="TextBox 12"/>
+          <p:cNvPr id="19" name="TextBox 18"/>
           <p:cNvSpPr txBox="1"/>
           <p:nvPr/>
         </p:nvSpPr>
         <p:spPr>
           <a:xfrm>
-            <a:off x="8339328" y="2633472"/>
-            <a:ext cx="2935224" cy="2514600"/>
+            <a:off x="8449056" y="3136392"/>
+            <a:ext cx="3108960" cy="640080"/>
           </a:xfrm>
           <a:prstGeom prst="rect">
             <a:avLst/>
@@ -3852,35 +5253,38 @@
           <a:noFill/>
         </p:spPr>
         <p:txBody>
-          <a:bodyPr wrap="square" lIns="18288" rIns="18288" anchor="t">
+          <a:bodyPr wrap="square" lIns="18288" rIns="18288" tIns="0" bIns="0" anchor="t">
             <a:spAutoFit/>
           </a:bodyPr>
           <a:lstStyle/>
           <a:p>
-            <a:pPr algn="l"/>
-            <a:r>
-              <a:rPr sz="1500" b="0">
-                <a:solidFill>
-                  <a:srgbClr val="F4F1EA"/>
-                </a:solidFill>
-                <a:latin typeface="Aptos"/>
+            <a:pPr>
+              <a:spcAft>
+                <a:spcPts val="800"/>
+              </a:spcAft>
+            </a:pPr>
+            <a:r>
+              <a:rPr sz="2300" b="1">
+                <a:solidFill>
+                  <a:srgbClr val="102331"/>
+                </a:solidFill>
+                <a:latin typeface="Arial"/>
               </a:rPr>
-              <a:t>What belongs in my meeting brief?
-Up to five developments, their business implications and the sources to verify them.</a:t>
-            </a:r>
-          </a:p>
-        </p:txBody>
-      </p:sp>
-      <p:sp>
-        <p:nvSpPr>
-          <p:cNvPr id="14" name="TextBox 13"/>
+              <a:t>Align the team</a:t>
+            </a:r>
+          </a:p>
+        </p:txBody>
+      </p:sp>
+      <p:sp>
+        <p:nvSpPr>
+          <p:cNvPr id="20" name="TextBox 19"/>
           <p:cNvSpPr txBox="1"/>
           <p:nvPr/>
         </p:nvSpPr>
         <p:spPr>
           <a:xfrm>
-            <a:off x="777240" y="5577840"/>
-            <a:ext cx="10698480" cy="548640"/>
+            <a:off x="8449056" y="3959352"/>
+            <a:ext cx="3108960" cy="777240"/>
           </a:xfrm>
           <a:prstGeom prst="rect">
             <a:avLst/>
@@ -3888,20 +5292,63 @@
           <a:noFill/>
         </p:spPr>
         <p:txBody>
-          <a:bodyPr wrap="square" lIns="18288" rIns="18288" anchor="t">
+          <a:bodyPr wrap="square" lIns="18288" rIns="18288" tIns="0" bIns="0" anchor="t">
             <a:spAutoFit/>
           </a:bodyPr>
           <a:lstStyle/>
           <a:p>
-            <a:pPr algn="l"/>
-            <a:r>
-              <a:rPr sz="1500" b="0">
-                <a:solidFill>
-                  <a:srgbClr val="F4F1EA"/>
-                </a:solidFill>
-                <a:latin typeface="Aptos"/>
+            <a:pPr>
+              <a:spcAft>
+                <a:spcPts val="800"/>
+              </a:spcAft>
+            </a:pPr>
+            <a:r>
+              <a:rPr sz="1900" b="0">
+                <a:solidFill>
+                  <a:srgbClr val="102331"/>
+                </a:solidFill>
+                <a:latin typeface="Arial"/>
               </a:rPr>
-              <a:t>Follow the thread: expand a point  →  inspect the evidence  →  compare last quarter  →  decide what to watch</a:t>
+              <a:t>What are the key developments this month?</a:t>
+            </a:r>
+          </a:p>
+        </p:txBody>
+      </p:sp>
+      <p:sp>
+        <p:nvSpPr>
+          <p:cNvPr id="21" name="TextBox 20"/>
+          <p:cNvSpPr txBox="1"/>
+          <p:nvPr/>
+        </p:nvSpPr>
+        <p:spPr>
+          <a:xfrm>
+            <a:off x="8449056" y="4956048"/>
+            <a:ext cx="3108960" cy="868680"/>
+          </a:xfrm>
+          <a:prstGeom prst="rect">
+            <a:avLst/>
+          </a:prstGeom>
+          <a:noFill/>
+        </p:spPr>
+        <p:txBody>
+          <a:bodyPr wrap="square" lIns="18288" rIns="18288" tIns="0" bIns="0" anchor="t">
+            <a:spAutoFit/>
+          </a:bodyPr>
+          <a:lstStyle/>
+          <a:p>
+            <a:pPr>
+              <a:spcAft>
+                <a:spcPts val="800"/>
+              </a:spcAft>
+            </a:pPr>
+            <a:r>
+              <a:rPr sz="1700" b="0">
+                <a:solidFill>
+                  <a:srgbClr val="52676D"/>
+                </a:solidFill>
+                <a:latin typeface="Arial"/>
+              </a:rPr>
+              <a:t>Agree the meeting position, open questions and what to watch.</a:t>
             </a:r>
           </a:p>
         </p:txBody>
@@ -3940,8 +5387,8 @@
         </p:nvSpPr>
         <p:spPr>
           <a:xfrm>
-            <a:off x="594360" y="365760"/>
-            <a:ext cx="7315200" cy="228600"/>
+            <a:off x="594360" y="329184"/>
+            <a:ext cx="9144000" cy="201168"/>
           </a:xfrm>
           <a:prstGeom prst="rect">
             <a:avLst/>
@@ -3949,20 +5396,24 @@
           <a:noFill/>
         </p:spPr>
         <p:txBody>
-          <a:bodyPr wrap="square" lIns="18288" rIns="18288" anchor="t">
+          <a:bodyPr wrap="square" lIns="18288" rIns="18288" tIns="0" bIns="0" anchor="t">
             <a:spAutoFit/>
           </a:bodyPr>
           <a:lstStyle/>
           <a:p>
-            <a:pPr algn="l"/>
-            <a:r>
-              <a:rPr sz="900" b="1">
+            <a:pPr>
+              <a:spcAft>
+                <a:spcPts val="800"/>
+              </a:spcAft>
+            </a:pPr>
+            <a:r>
+              <a:rPr sz="1000" b="1">
                 <a:solidFill>
                   <a:srgbClr val="1B8077"/>
                 </a:solidFill>
-                <a:latin typeface="Aptos"/>
+                <a:latin typeface="Arial"/>
               </a:rPr>
-              <a:t>LONDON MARKET MONITOR  /  EXAMPLE INVESTIGATION  ·  MARKET INTELLIGENCE</a:t>
+              <a:t>LONDON MARKET MONITOR  /  HOW IT WORKS</a:t>
             </a:r>
           </a:p>
         </p:txBody>
@@ -3975,8 +5426,8 @@
         </p:nvSpPr>
         <p:spPr>
           <a:xfrm>
-            <a:off x="10972800" y="365760"/>
-            <a:ext cx="640080" cy="228600"/>
+            <a:off x="594360" y="877824"/>
+            <a:ext cx="10972800" cy="1051560"/>
           </a:xfrm>
           <a:prstGeom prst="rect">
             <a:avLst/>
@@ -3984,20 +5435,24 @@
           <a:noFill/>
         </p:spPr>
         <p:txBody>
-          <a:bodyPr wrap="square" lIns="18288" rIns="18288" anchor="t">
+          <a:bodyPr wrap="square" lIns="18288" rIns="18288" tIns="0" bIns="0" anchor="t">
             <a:spAutoFit/>
           </a:bodyPr>
           <a:lstStyle/>
           <a:p>
-            <a:pPr algn="r"/>
-            <a:r>
-              <a:rPr sz="900" b="1">
-                <a:solidFill>
-                  <a:srgbClr val="708087"/>
-                </a:solidFill>
-                <a:latin typeface="Aptos"/>
+            <a:pPr>
+              <a:spcAft>
+                <a:spcPts val="800"/>
+              </a:spcAft>
+            </a:pPr>
+            <a:r>
+              <a:rPr sz="2900" b="1">
+                <a:solidFill>
+                  <a:srgbClr val="102331"/>
+                </a:solidFill>
+                <a:latin typeface="Arial"/>
               </a:rPr>
-              <a:t>03</a:t>
+              <a:t>Bring your sources. Ask your question. Get cited answers.</a:t>
             </a:r>
           </a:p>
         </p:txBody>
@@ -4010,8 +5465,8 @@
         </p:nvSpPr>
         <p:spPr>
           <a:xfrm>
-            <a:off x="594360" y="960120"/>
-            <a:ext cx="10789920" cy="731520"/>
+            <a:off x="612648" y="1691640"/>
+            <a:ext cx="10881360" cy="594360"/>
           </a:xfrm>
           <a:prstGeom prst="rect">
             <a:avLst/>
@@ -4019,34 +5474,116 @@
           <a:noFill/>
         </p:spPr>
         <p:txBody>
-          <a:bodyPr wrap="square" lIns="18288" rIns="18288" anchor="t">
+          <a:bodyPr wrap="square" lIns="18288" rIns="18288" tIns="0" bIns="0" anchor="t">
             <a:spAutoFit/>
           </a:bodyPr>
           <a:lstStyle/>
           <a:p>
-            <a:pPr algn="l"/>
-            <a:r>
-              <a:rPr sz="3000" b="1">
-                <a:solidFill>
-                  <a:srgbClr val="102331"/>
-                </a:solidFill>
-                <a:latin typeface="Georgia"/>
+            <a:pPr>
+              <a:spcAft>
+                <a:spcPts val="800"/>
+              </a:spcAft>
+            </a:pPr>
+            <a:r>
+              <a:rPr sz="1700" b="0">
+                <a:solidFill>
+                  <a:srgbClr val="52676D"/>
+                </a:solidFill>
+                <a:latin typeface="Arial"/>
               </a:rPr>
-              <a:t>Is West End outperforming City?</a:t>
-            </a:r>
-          </a:p>
-        </p:txBody>
-      </p:sp>
-      <p:sp>
-        <p:nvSpPr>
-          <p:cNvPr id="5" name="Rectangle 4"/>
+              <a:t>A question-led workflow turns accessible reports into a brief you can inspect.</a:t>
+            </a:r>
+          </a:p>
+        </p:txBody>
+      </p:sp>
+      <p:sp>
+        <p:nvSpPr>
+          <p:cNvPr id="5" name="TextBox 4"/>
+          <p:cNvSpPr txBox="1"/>
+          <p:nvPr/>
+        </p:nvSpPr>
+        <p:spPr>
+          <a:xfrm>
+            <a:off x="612648" y="6419088"/>
+            <a:ext cx="9601200" cy="201168"/>
+          </a:xfrm>
+          <a:prstGeom prst="rect">
+            <a:avLst/>
+          </a:prstGeom>
+          <a:noFill/>
+        </p:spPr>
+        <p:txBody>
+          <a:bodyPr wrap="square" lIns="18288" rIns="18288" tIns="0" bIns="0" anchor="t">
+            <a:spAutoFit/>
+          </a:bodyPr>
+          <a:lstStyle/>
+          <a:p>
+            <a:pPr>
+              <a:spcAft>
+                <a:spcPts val="800"/>
+              </a:spcAft>
+            </a:pPr>
+            <a:r>
+              <a:rPr sz="900" b="0">
+                <a:solidFill>
+                  <a:srgbClr val="52676D"/>
+                </a:solidFill>
+                <a:latin typeface="Arial"/>
+              </a:rPr>
+              <a:t>EXECUTIVE DECISION BRIEF  |  10 SEPTEMBER 2026</a:t>
+            </a:r>
+          </a:p>
+        </p:txBody>
+      </p:sp>
+      <p:sp>
+        <p:nvSpPr>
+          <p:cNvPr id="6" name="TextBox 5"/>
+          <p:cNvSpPr txBox="1"/>
+          <p:nvPr/>
+        </p:nvSpPr>
+        <p:spPr>
+          <a:xfrm>
+            <a:off x="10972800" y="6400800"/>
+            <a:ext cx="640080" cy="219456"/>
+          </a:xfrm>
+          <a:prstGeom prst="rect">
+            <a:avLst/>
+          </a:prstGeom>
+          <a:noFill/>
+        </p:spPr>
+        <p:txBody>
+          <a:bodyPr wrap="square" lIns="18288" rIns="18288" tIns="0" bIns="0" anchor="t">
+            <a:spAutoFit/>
+          </a:bodyPr>
+          <a:lstStyle/>
+          <a:p>
+            <a:pPr>
+              <a:spcAft>
+                <a:spcPts val="800"/>
+              </a:spcAft>
+            </a:pPr>
+            <a:r>
+              <a:rPr sz="1000" b="0">
+                <a:solidFill>
+                  <a:srgbClr val="52676D"/>
+                </a:solidFill>
+                <a:latin typeface="Arial"/>
+              </a:rPr>
+              <a:t>03 / 06</a:t>
+            </a:r>
+          </a:p>
+        </p:txBody>
+      </p:sp>
+      <p:sp>
+        <p:nvSpPr>
+          <p:cNvPr id="7" name="Rectangle 6"/>
           <p:cNvSpPr/>
           <p:nvPr/>
         </p:nvSpPr>
         <p:spPr>
           <a:xfrm>
-            <a:off x="731520" y="1965960"/>
-            <a:ext cx="5074920" cy="3611880"/>
+            <a:off x="640080" y="2788920"/>
+            <a:ext cx="2011680" cy="2057400"/>
           </a:xfrm>
           <a:prstGeom prst="rect">
             <a:avLst/>
@@ -4084,14 +5621,14 @@
       </p:sp>
       <p:sp>
         <p:nvSpPr>
-          <p:cNvPr id="6" name="TextBox 5"/>
+          <p:cNvPr id="8" name="TextBox 7"/>
           <p:cNvSpPr txBox="1"/>
           <p:nvPr/>
         </p:nvSpPr>
         <p:spPr>
           <a:xfrm>
-            <a:off x="932688" y="2148840"/>
-            <a:ext cx="4672583" cy="274320"/>
+            <a:off x="768096" y="3017520"/>
+            <a:ext cx="1773936" cy="502920"/>
           </a:xfrm>
           <a:prstGeom prst="rect">
             <a:avLst/>
@@ -4099,34 +5636,38 @@
           <a:noFill/>
         </p:spPr>
         <p:txBody>
-          <a:bodyPr wrap="square" lIns="18288" rIns="18288" anchor="t">
+          <a:bodyPr wrap="square" lIns="18288" rIns="18288" tIns="0" bIns="0" anchor="t">
             <a:spAutoFit/>
           </a:bodyPr>
           <a:lstStyle/>
           <a:p>
-            <a:pPr algn="l"/>
-            <a:r>
-              <a:rPr sz="900" b="1">
+            <a:pPr>
+              <a:spcAft>
+                <a:spcPts val="800"/>
+              </a:spcAft>
+            </a:pPr>
+            <a:r>
+              <a:rPr sz="1700" b="1">
                 <a:solidFill>
                   <a:srgbClr val="1B8077"/>
                 </a:solidFill>
-                <a:latin typeface="Aptos"/>
+                <a:latin typeface="Arial"/>
               </a:rPr>
-              <a:t>TEST THE HYPOTHESIS</a:t>
-            </a:r>
-          </a:p>
-        </p:txBody>
-      </p:sp>
-      <p:sp>
-        <p:nvSpPr>
-          <p:cNvPr id="7" name="TextBox 6"/>
+              <a:t>Sources</a:t>
+            </a:r>
+          </a:p>
+        </p:txBody>
+      </p:sp>
+      <p:sp>
+        <p:nvSpPr>
+          <p:cNvPr id="9" name="TextBox 8"/>
           <p:cNvSpPr txBox="1"/>
           <p:nvPr/>
         </p:nvSpPr>
         <p:spPr>
           <a:xfrm>
-            <a:off x="932688" y="2587752"/>
-            <a:ext cx="4672583" cy="2834640"/>
+            <a:off x="768096" y="3703320"/>
+            <a:ext cx="1737360" cy="960120"/>
           </a:xfrm>
           <a:prstGeom prst="rect">
             <a:avLst/>
@@ -4134,49 +5675,47 @@
           <a:noFill/>
         </p:spPr>
         <p:txBody>
-          <a:bodyPr wrap="square" lIns="18288" rIns="18288" anchor="t">
+          <a:bodyPr wrap="square" lIns="18288" rIns="18288" tIns="0" bIns="0" anchor="t">
             <a:spAutoFit/>
           </a:bodyPr>
           <a:lstStyle/>
           <a:p>
-            <a:pPr algn="l"/>
-            <a:r>
-              <a:rPr sz="1500" b="0">
+            <a:pPr>
+              <a:spcAft>
+                <a:spcPts val="800"/>
+              </a:spcAft>
+            </a:pPr>
+            <a:r>
+              <a:rPr sz="1600" b="0">
                 <a:solidFill>
                   <a:srgbClr val="102331"/>
                 </a:solidFill>
-                <a:latin typeface="Aptos"/>
+                <a:latin typeface="Arial"/>
               </a:rPr>
-              <a:t>Rents: compare growth, not just rent levels.
-Vacancy: align coverage and Grade A definitions.
-Take-up: compare the same reporting periods.
-Supply: distinguish future space from pre-lets.
-Commentary + macro: look for drivers and counterevidence.</a:t>
-            </a:r>
-          </a:p>
-        </p:txBody>
-      </p:sp>
-      <p:sp>
-        <p:nvSpPr>
-          <p:cNvPr id="8" name="Rectangle 7"/>
+              <a:t>Public reports, market news and supplied text</a:t>
+            </a:r>
+          </a:p>
+        </p:txBody>
+      </p:sp>
+      <p:sp>
+        <p:nvSpPr>
+          <p:cNvPr id="10" name="Right Arrow 9"/>
           <p:cNvSpPr/>
           <p:nvPr/>
         </p:nvSpPr>
         <p:spPr>
           <a:xfrm>
-            <a:off x="6217920" y="1965960"/>
-            <a:ext cx="5212080" cy="3611880"/>
-          </a:xfrm>
-          <a:prstGeom prst="rect">
+            <a:off x="2679191" y="3611880"/>
+            <a:ext cx="219456" cy="228600"/>
+          </a:xfrm>
+          <a:prstGeom prst="rightArrow">
             <a:avLst/>
           </a:prstGeom>
           <a:solidFill>
-            <a:srgbClr val="FFFDF8"/>
+            <a:srgbClr val="1B8077"/>
           </a:solidFill>
           <a:ln>
-            <a:solidFill>
-              <a:srgbClr val="D7D5CB"/>
-            </a:solidFill>
+            <a:noFill/>
           </a:ln>
         </p:spPr>
         <p:style>
@@ -4203,14 +5742,59 @@
       </p:sp>
       <p:sp>
         <p:nvSpPr>
-          <p:cNvPr id="9" name="TextBox 8"/>
+          <p:cNvPr id="11" name="Rectangle 10"/>
+          <p:cNvSpPr/>
+          <p:nvPr/>
+        </p:nvSpPr>
+        <p:spPr>
+          <a:xfrm>
+            <a:off x="2944368" y="2788920"/>
+            <a:ext cx="2011680" cy="2057400"/>
+          </a:xfrm>
+          <a:prstGeom prst="rect">
+            <a:avLst/>
+          </a:prstGeom>
+          <a:solidFill>
+            <a:srgbClr val="FFFDF8"/>
+          </a:solidFill>
+          <a:ln>
+            <a:solidFill>
+              <a:srgbClr val="D7D5CB"/>
+            </a:solidFill>
+          </a:ln>
+        </p:spPr>
+        <p:style>
+          <a:lnRef idx="1">
+            <a:schemeClr val="accent1"/>
+          </a:lnRef>
+          <a:fillRef idx="3">
+            <a:schemeClr val="accent1"/>
+          </a:fillRef>
+          <a:effectRef idx="2">
+            <a:schemeClr val="accent1"/>
+          </a:effectRef>
+          <a:fontRef idx="minor">
+            <a:schemeClr val="lt1"/>
+          </a:fontRef>
+        </p:style>
+        <p:txBody>
+          <a:bodyPr rtlCol="0" anchor="ctr"/>
+          <a:lstStyle/>
+          <a:p>
+            <a:pPr algn="ctr"/>
+          </a:p>
+        </p:txBody>
+      </p:sp>
+      <p:sp>
+        <p:nvSpPr>
+          <p:cNvPr id="12" name="TextBox 11"/>
           <p:cNvSpPr txBox="1"/>
           <p:nvPr/>
         </p:nvSpPr>
         <p:spPr>
           <a:xfrm>
-            <a:off x="6419088" y="2148840"/>
-            <a:ext cx="4809744" cy="274320"/>
+            <a:off x="3072384" y="3017520"/>
+            <a:ext cx="1773936" cy="502920"/>
           </a:xfrm>
           <a:prstGeom prst="rect">
             <a:avLst/>
@@ -4218,34 +5802,38 @@
           <a:noFill/>
         </p:spPr>
         <p:txBody>
-          <a:bodyPr wrap="square" lIns="18288" rIns="18288" anchor="t">
+          <a:bodyPr wrap="square" lIns="18288" rIns="18288" tIns="0" bIns="0" anchor="t">
             <a:spAutoFit/>
           </a:bodyPr>
           <a:lstStyle/>
           <a:p>
-            <a:pPr algn="l"/>
-            <a:r>
-              <a:rPr sz="900" b="1">
+            <a:pPr>
+              <a:spcAft>
+                <a:spcPts val="800"/>
+              </a:spcAft>
+            </a:pPr>
+            <a:r>
+              <a:rPr sz="1700" b="1">
                 <a:solidFill>
                   <a:srgbClr val="1B8077"/>
                 </a:solidFill>
-                <a:latin typeface="Aptos"/>
+                <a:latin typeface="Arial"/>
               </a:rPr>
-              <a:t>A USEFUL CONCLUSION</a:t>
-            </a:r>
-          </a:p>
-        </p:txBody>
-      </p:sp>
-      <p:sp>
-        <p:nvSpPr>
-          <p:cNvPr id="10" name="TextBox 9"/>
+              <a:t>Retrieve / Filter</a:t>
+            </a:r>
+          </a:p>
+        </p:txBody>
+      </p:sp>
+      <p:sp>
+        <p:nvSpPr>
+          <p:cNvPr id="13" name="TextBox 12"/>
           <p:cNvSpPr txBox="1"/>
           <p:nvPr/>
         </p:nvSpPr>
         <p:spPr>
           <a:xfrm>
-            <a:off x="6419088" y="2587752"/>
-            <a:ext cx="4809744" cy="2834640"/>
+            <a:off x="3072384" y="3703320"/>
+            <a:ext cx="1737360" cy="960120"/>
           </a:xfrm>
           <a:prstGeom prst="rect">
             <a:avLst/>
@@ -4253,36 +5841,126 @@
           <a:noFill/>
         </p:spPr>
         <p:txBody>
-          <a:bodyPr wrap="square" lIns="18288" rIns="18288" anchor="t">
+          <a:bodyPr wrap="square" lIns="18288" rIns="18288" tIns="0" bIns="0" anchor="t">
             <a:spAutoFit/>
           </a:bodyPr>
           <a:lstStyle/>
           <a:p>
-            <a:pPr algn="l"/>
-            <a:r>
-              <a:rPr sz="1500" b="0">
+            <a:pPr>
+              <a:spcAft>
+                <a:spcPts val="800"/>
+              </a:spcAft>
+            </a:pPr>
+            <a:r>
+              <a:rPr sz="1600" b="0">
                 <a:solidFill>
                   <a:srgbClr val="102331"/>
                 </a:solidFill>
-                <a:latin typeface="Aptos"/>
+                <a:latin typeface="Arial"/>
               </a:rPr>
-              <a:t>Supported · Partially supported
-Not supported · Insufficient evidence
-Explain which indicators support the claim, which challenge it and what is missing. Keep facts separate from interpretation.</a:t>
-            </a:r>
-          </a:p>
-        </p:txBody>
-      </p:sp>
-      <p:sp>
-        <p:nvSpPr>
-          <p:cNvPr id="11" name="TextBox 10"/>
+              <a:t>Find evidence relevant to the question and period</a:t>
+            </a:r>
+          </a:p>
+        </p:txBody>
+      </p:sp>
+      <p:sp>
+        <p:nvSpPr>
+          <p:cNvPr id="14" name="Right Arrow 13"/>
+          <p:cNvSpPr/>
+          <p:nvPr/>
+        </p:nvSpPr>
+        <p:spPr>
+          <a:xfrm>
+            <a:off x="4983479" y="3611880"/>
+            <a:ext cx="219456" cy="228600"/>
+          </a:xfrm>
+          <a:prstGeom prst="rightArrow">
+            <a:avLst/>
+          </a:prstGeom>
+          <a:solidFill>
+            <a:srgbClr val="1B8077"/>
+          </a:solidFill>
+          <a:ln>
+            <a:noFill/>
+          </a:ln>
+        </p:spPr>
+        <p:style>
+          <a:lnRef idx="1">
+            <a:schemeClr val="accent1"/>
+          </a:lnRef>
+          <a:fillRef idx="3">
+            <a:schemeClr val="accent1"/>
+          </a:fillRef>
+          <a:effectRef idx="2">
+            <a:schemeClr val="accent1"/>
+          </a:effectRef>
+          <a:fontRef idx="minor">
+            <a:schemeClr val="lt1"/>
+          </a:fontRef>
+        </p:style>
+        <p:txBody>
+          <a:bodyPr rtlCol="0" anchor="ctr"/>
+          <a:lstStyle/>
+          <a:p>
+            <a:pPr algn="ctr"/>
+          </a:p>
+        </p:txBody>
+      </p:sp>
+      <p:sp>
+        <p:nvSpPr>
+          <p:cNvPr id="15" name="Rectangle 14"/>
+          <p:cNvSpPr/>
+          <p:nvPr/>
+        </p:nvSpPr>
+        <p:spPr>
+          <a:xfrm>
+            <a:off x="5248656" y="2788920"/>
+            <a:ext cx="2011680" cy="2057400"/>
+          </a:xfrm>
+          <a:prstGeom prst="rect">
+            <a:avLst/>
+          </a:prstGeom>
+          <a:solidFill>
+            <a:srgbClr val="FFFDF8"/>
+          </a:solidFill>
+          <a:ln>
+            <a:solidFill>
+              <a:srgbClr val="D7D5CB"/>
+            </a:solidFill>
+          </a:ln>
+        </p:spPr>
+        <p:style>
+          <a:lnRef idx="1">
+            <a:schemeClr val="accent1"/>
+          </a:lnRef>
+          <a:fillRef idx="3">
+            <a:schemeClr val="accent1"/>
+          </a:fillRef>
+          <a:effectRef idx="2">
+            <a:schemeClr val="accent1"/>
+          </a:effectRef>
+          <a:fontRef idx="minor">
+            <a:schemeClr val="lt1"/>
+          </a:fontRef>
+        </p:style>
+        <p:txBody>
+          <a:bodyPr rtlCol="0" anchor="ctr"/>
+          <a:lstStyle/>
+          <a:p>
+            <a:pPr algn="ctr"/>
+          </a:p>
+        </p:txBody>
+      </p:sp>
+      <p:sp>
+        <p:nvSpPr>
+          <p:cNvPr id="16" name="TextBox 15"/>
           <p:cNvSpPr txBox="1"/>
           <p:nvPr/>
         </p:nvSpPr>
         <p:spPr>
           <a:xfrm>
-            <a:off x="777240" y="5806440"/>
-            <a:ext cx="10698480" cy="502920"/>
+            <a:off x="5376672" y="3017520"/>
+            <a:ext cx="1773936" cy="502920"/>
           </a:xfrm>
           <a:prstGeom prst="rect">
             <a:avLst/>
@@ -4290,20 +5968,473 @@
           <a:noFill/>
         </p:spPr>
         <p:txBody>
-          <a:bodyPr wrap="square" lIns="18288" rIns="18288" anchor="t">
+          <a:bodyPr wrap="square" lIns="18288" rIns="18288" tIns="0" bIns="0" anchor="t">
             <a:spAutoFit/>
           </a:bodyPr>
           <a:lstStyle/>
           <a:p>
-            <a:pPr algn="l"/>
-            <a:r>
-              <a:rPr sz="1200" b="0">
-                <a:solidFill>
-                  <a:srgbClr val="708087"/>
-                </a:solidFill>
-                <a:latin typeface="Aptos"/>
+            <a:pPr>
+              <a:spcAft>
+                <a:spcPts val="800"/>
+              </a:spcAft>
+            </a:pPr>
+            <a:r>
+              <a:rPr sz="1700" b="1">
+                <a:solidFill>
+                  <a:srgbClr val="1B8077"/>
+                </a:solidFill>
+                <a:latin typeface="Arial"/>
               </a:rPr>
-              <a:t>Investigation design shown here; this slide does not assert a current market verdict.</a:t>
+              <a:t>Compare / Reason</a:t>
+            </a:r>
+          </a:p>
+        </p:txBody>
+      </p:sp>
+      <p:sp>
+        <p:nvSpPr>
+          <p:cNvPr id="17" name="TextBox 16"/>
+          <p:cNvSpPr txBox="1"/>
+          <p:nvPr/>
+        </p:nvSpPr>
+        <p:spPr>
+          <a:xfrm>
+            <a:off x="5376672" y="3703320"/>
+            <a:ext cx="1737360" cy="960120"/>
+          </a:xfrm>
+          <a:prstGeom prst="rect">
+            <a:avLst/>
+          </a:prstGeom>
+          <a:noFill/>
+        </p:spPr>
+        <p:txBody>
+          <a:bodyPr wrap="square" lIns="18288" rIns="18288" tIns="0" bIns="0" anchor="t">
+            <a:spAutoFit/>
+          </a:bodyPr>
+          <a:lstStyle/>
+          <a:p>
+            <a:pPr>
+              <a:spcAft>
+                <a:spcPts val="800"/>
+              </a:spcAft>
+            </a:pPr>
+            <a:r>
+              <a:rPr sz="1600" b="0">
+                <a:solidFill>
+                  <a:srgbClr val="102331"/>
+                </a:solidFill>
+                <a:latin typeface="Arial"/>
+              </a:rPr>
+              <a:t>Match measures and weigh the findings</a:t>
+            </a:r>
+          </a:p>
+        </p:txBody>
+      </p:sp>
+      <p:sp>
+        <p:nvSpPr>
+          <p:cNvPr id="18" name="Right Arrow 17"/>
+          <p:cNvSpPr/>
+          <p:nvPr/>
+        </p:nvSpPr>
+        <p:spPr>
+          <a:xfrm>
+            <a:off x="7287768" y="3611880"/>
+            <a:ext cx="219456" cy="228600"/>
+          </a:xfrm>
+          <a:prstGeom prst="rightArrow">
+            <a:avLst/>
+          </a:prstGeom>
+          <a:solidFill>
+            <a:srgbClr val="1B8077"/>
+          </a:solidFill>
+          <a:ln>
+            <a:noFill/>
+          </a:ln>
+        </p:spPr>
+        <p:style>
+          <a:lnRef idx="1">
+            <a:schemeClr val="accent1"/>
+          </a:lnRef>
+          <a:fillRef idx="3">
+            <a:schemeClr val="accent1"/>
+          </a:fillRef>
+          <a:effectRef idx="2">
+            <a:schemeClr val="accent1"/>
+          </a:effectRef>
+          <a:fontRef idx="minor">
+            <a:schemeClr val="lt1"/>
+          </a:fontRef>
+        </p:style>
+        <p:txBody>
+          <a:bodyPr rtlCol="0" anchor="ctr"/>
+          <a:lstStyle/>
+          <a:p>
+            <a:pPr algn="ctr"/>
+          </a:p>
+        </p:txBody>
+      </p:sp>
+      <p:sp>
+        <p:nvSpPr>
+          <p:cNvPr id="19" name="Rectangle 18"/>
+          <p:cNvSpPr/>
+          <p:nvPr/>
+        </p:nvSpPr>
+        <p:spPr>
+          <a:xfrm>
+            <a:off x="7552944" y="2788920"/>
+            <a:ext cx="2011680" cy="2057400"/>
+          </a:xfrm>
+          <a:prstGeom prst="rect">
+            <a:avLst/>
+          </a:prstGeom>
+          <a:solidFill>
+            <a:srgbClr val="FFFDF8"/>
+          </a:solidFill>
+          <a:ln>
+            <a:solidFill>
+              <a:srgbClr val="D7D5CB"/>
+            </a:solidFill>
+          </a:ln>
+        </p:spPr>
+        <p:style>
+          <a:lnRef idx="1">
+            <a:schemeClr val="accent1"/>
+          </a:lnRef>
+          <a:fillRef idx="3">
+            <a:schemeClr val="accent1"/>
+          </a:fillRef>
+          <a:effectRef idx="2">
+            <a:schemeClr val="accent1"/>
+          </a:effectRef>
+          <a:fontRef idx="minor">
+            <a:schemeClr val="lt1"/>
+          </a:fontRef>
+        </p:style>
+        <p:txBody>
+          <a:bodyPr rtlCol="0" anchor="ctr"/>
+          <a:lstStyle/>
+          <a:p>
+            <a:pPr algn="ctr"/>
+          </a:p>
+        </p:txBody>
+      </p:sp>
+      <p:sp>
+        <p:nvSpPr>
+          <p:cNvPr id="20" name="TextBox 19"/>
+          <p:cNvSpPr txBox="1"/>
+          <p:nvPr/>
+        </p:nvSpPr>
+        <p:spPr>
+          <a:xfrm>
+            <a:off x="7680960" y="3017520"/>
+            <a:ext cx="1773936" cy="502920"/>
+          </a:xfrm>
+          <a:prstGeom prst="rect">
+            <a:avLst/>
+          </a:prstGeom>
+          <a:noFill/>
+        </p:spPr>
+        <p:txBody>
+          <a:bodyPr wrap="square" lIns="18288" rIns="18288" tIns="0" bIns="0" anchor="t">
+            <a:spAutoFit/>
+          </a:bodyPr>
+          <a:lstStyle/>
+          <a:p>
+            <a:pPr>
+              <a:spcAft>
+                <a:spcPts val="800"/>
+              </a:spcAft>
+            </a:pPr>
+            <a:r>
+              <a:rPr sz="1700" b="1">
+                <a:solidFill>
+                  <a:srgbClr val="1B8077"/>
+                </a:solidFill>
+                <a:latin typeface="Arial"/>
+              </a:rPr>
+              <a:t>Verify</a:t>
+            </a:r>
+          </a:p>
+        </p:txBody>
+      </p:sp>
+      <p:sp>
+        <p:nvSpPr>
+          <p:cNvPr id="21" name="TextBox 20"/>
+          <p:cNvSpPr txBox="1"/>
+          <p:nvPr/>
+        </p:nvSpPr>
+        <p:spPr>
+          <a:xfrm>
+            <a:off x="7680960" y="3703320"/>
+            <a:ext cx="1737360" cy="960120"/>
+          </a:xfrm>
+          <a:prstGeom prst="rect">
+            <a:avLst/>
+          </a:prstGeom>
+          <a:noFill/>
+        </p:spPr>
+        <p:txBody>
+          <a:bodyPr wrap="square" lIns="18288" rIns="18288" tIns="0" bIns="0" anchor="t">
+            <a:spAutoFit/>
+          </a:bodyPr>
+          <a:lstStyle/>
+          <a:p>
+            <a:pPr>
+              <a:spcAft>
+                <a:spcPts val="800"/>
+              </a:spcAft>
+            </a:pPr>
+            <a:r>
+              <a:rPr sz="1600" b="0">
+                <a:solidFill>
+                  <a:srgbClr val="102331"/>
+                </a:solidFill>
+                <a:latin typeface="Arial"/>
+              </a:rPr>
+              <a:t>Check citations and numerical support</a:t>
+            </a:r>
+          </a:p>
+        </p:txBody>
+      </p:sp>
+      <p:sp>
+        <p:nvSpPr>
+          <p:cNvPr id="22" name="Right Arrow 21"/>
+          <p:cNvSpPr/>
+          <p:nvPr/>
+        </p:nvSpPr>
+        <p:spPr>
+          <a:xfrm>
+            <a:off x="9592056" y="3611880"/>
+            <a:ext cx="219456" cy="228600"/>
+          </a:xfrm>
+          <a:prstGeom prst="rightArrow">
+            <a:avLst/>
+          </a:prstGeom>
+          <a:solidFill>
+            <a:srgbClr val="1B8077"/>
+          </a:solidFill>
+          <a:ln>
+            <a:noFill/>
+          </a:ln>
+        </p:spPr>
+        <p:style>
+          <a:lnRef idx="1">
+            <a:schemeClr val="accent1"/>
+          </a:lnRef>
+          <a:fillRef idx="3">
+            <a:schemeClr val="accent1"/>
+          </a:fillRef>
+          <a:effectRef idx="2">
+            <a:schemeClr val="accent1"/>
+          </a:effectRef>
+          <a:fontRef idx="minor">
+            <a:schemeClr val="lt1"/>
+          </a:fontRef>
+        </p:style>
+        <p:txBody>
+          <a:bodyPr rtlCol="0" anchor="ctr"/>
+          <a:lstStyle/>
+          <a:p>
+            <a:pPr algn="ctr"/>
+          </a:p>
+        </p:txBody>
+      </p:sp>
+      <p:sp>
+        <p:nvSpPr>
+          <p:cNvPr id="23" name="Rectangle 22"/>
+          <p:cNvSpPr/>
+          <p:nvPr/>
+        </p:nvSpPr>
+        <p:spPr>
+          <a:xfrm>
+            <a:off x="9857232" y="2788920"/>
+            <a:ext cx="2011680" cy="2057400"/>
+          </a:xfrm>
+          <a:prstGeom prst="rect">
+            <a:avLst/>
+          </a:prstGeom>
+          <a:solidFill>
+            <a:srgbClr val="FFFDF8"/>
+          </a:solidFill>
+          <a:ln>
+            <a:solidFill>
+              <a:srgbClr val="D7D5CB"/>
+            </a:solidFill>
+          </a:ln>
+        </p:spPr>
+        <p:style>
+          <a:lnRef idx="1">
+            <a:schemeClr val="accent1"/>
+          </a:lnRef>
+          <a:fillRef idx="3">
+            <a:schemeClr val="accent1"/>
+          </a:fillRef>
+          <a:effectRef idx="2">
+            <a:schemeClr val="accent1"/>
+          </a:effectRef>
+          <a:fontRef idx="minor">
+            <a:schemeClr val="lt1"/>
+          </a:fontRef>
+        </p:style>
+        <p:txBody>
+          <a:bodyPr rtlCol="0" anchor="ctr"/>
+          <a:lstStyle/>
+          <a:p>
+            <a:pPr algn="ctr"/>
+          </a:p>
+        </p:txBody>
+      </p:sp>
+      <p:sp>
+        <p:nvSpPr>
+          <p:cNvPr id="24" name="TextBox 23"/>
+          <p:cNvSpPr txBox="1"/>
+          <p:nvPr/>
+        </p:nvSpPr>
+        <p:spPr>
+          <a:xfrm>
+            <a:off x="9985248" y="3017520"/>
+            <a:ext cx="1773936" cy="502920"/>
+          </a:xfrm>
+          <a:prstGeom prst="rect">
+            <a:avLst/>
+          </a:prstGeom>
+          <a:noFill/>
+        </p:spPr>
+        <p:txBody>
+          <a:bodyPr wrap="square" lIns="18288" rIns="18288" tIns="0" bIns="0" anchor="t">
+            <a:spAutoFit/>
+          </a:bodyPr>
+          <a:lstStyle/>
+          <a:p>
+            <a:pPr>
+              <a:spcAft>
+                <a:spcPts val="800"/>
+              </a:spcAft>
+            </a:pPr>
+            <a:r>
+              <a:rPr sz="1700" b="1">
+                <a:solidFill>
+                  <a:srgbClr val="1B8077"/>
+                </a:solidFill>
+                <a:latin typeface="Arial"/>
+              </a:rPr>
+              <a:t>Cited Brief</a:t>
+            </a:r>
+          </a:p>
+        </p:txBody>
+      </p:sp>
+      <p:sp>
+        <p:nvSpPr>
+          <p:cNvPr id="25" name="TextBox 24"/>
+          <p:cNvSpPr txBox="1"/>
+          <p:nvPr/>
+        </p:nvSpPr>
+        <p:spPr>
+          <a:xfrm>
+            <a:off x="9985248" y="3703320"/>
+            <a:ext cx="1737360" cy="960120"/>
+          </a:xfrm>
+          <a:prstGeom prst="rect">
+            <a:avLst/>
+          </a:prstGeom>
+          <a:noFill/>
+        </p:spPr>
+        <p:txBody>
+          <a:bodyPr wrap="square" lIns="18288" rIns="18288" tIns="0" bIns="0" anchor="t">
+            <a:spAutoFit/>
+          </a:bodyPr>
+          <a:lstStyle/>
+          <a:p>
+            <a:pPr>
+              <a:spcAft>
+                <a:spcPts val="800"/>
+              </a:spcAft>
+            </a:pPr>
+            <a:r>
+              <a:rPr sz="1600" b="0">
+                <a:solidFill>
+                  <a:srgbClr val="102331"/>
+                </a:solidFill>
+                <a:latin typeface="Arial"/>
+              </a:rPr>
+              <a:t>State the takeaway, sources and gaps</a:t>
+            </a:r>
+          </a:p>
+        </p:txBody>
+      </p:sp>
+      <p:sp>
+        <p:nvSpPr>
+          <p:cNvPr id="26" name="TextBox 25"/>
+          <p:cNvSpPr txBox="1"/>
+          <p:nvPr/>
+        </p:nvSpPr>
+        <p:spPr>
+          <a:xfrm>
+            <a:off x="685800" y="5303520"/>
+            <a:ext cx="10789920" cy="365760"/>
+          </a:xfrm>
+          <a:prstGeom prst="rect">
+            <a:avLst/>
+          </a:prstGeom>
+          <a:noFill/>
+        </p:spPr>
+        <p:txBody>
+          <a:bodyPr wrap="square" lIns="18288" rIns="18288" tIns="0" bIns="0" anchor="t">
+            <a:spAutoFit/>
+          </a:bodyPr>
+          <a:lstStyle/>
+          <a:p>
+            <a:pPr>
+              <a:spcAft>
+                <a:spcPts val="800"/>
+              </a:spcAft>
+            </a:pPr>
+            <a:r>
+              <a:rPr sz="2000" b="1">
+                <a:solidFill>
+                  <a:srgbClr val="102331"/>
+                </a:solidFill>
+                <a:latin typeface="Arial"/>
+              </a:rPr>
+              <a:t>Your team sets the question. The agent assembles evidence. People make the decision.</a:t>
+            </a:r>
+          </a:p>
+        </p:txBody>
+      </p:sp>
+      <p:sp>
+        <p:nvSpPr>
+          <p:cNvPr id="27" name="TextBox 26"/>
+          <p:cNvSpPr txBox="1"/>
+          <p:nvPr/>
+        </p:nvSpPr>
+        <p:spPr>
+          <a:xfrm>
+            <a:off x="685800" y="5852160"/>
+            <a:ext cx="10789920" cy="274320"/>
+          </a:xfrm>
+          <a:prstGeom prst="rect">
+            <a:avLst/>
+          </a:prstGeom>
+          <a:noFill/>
+        </p:spPr>
+        <p:txBody>
+          <a:bodyPr wrap="square" lIns="18288" rIns="18288" tIns="0" bIns="0" anchor="t">
+            <a:spAutoFit/>
+          </a:bodyPr>
+          <a:lstStyle/>
+          <a:p>
+            <a:pPr>
+              <a:spcAft>
+                <a:spcPts val="800"/>
+              </a:spcAft>
+            </a:pPr>
+            <a:r>
+              <a:rPr sz="1700" b="0">
+                <a:solidFill>
+                  <a:srgbClr val="52676D"/>
+                </a:solidFill>
+                <a:latin typeface="Arial"/>
+              </a:rPr>
+              <a:t>Source passages stay available for review; gaps remain visible in the answer.</a:t>
             </a:r>
           </a:p>
         </p:txBody>
@@ -4342,8 +6473,8 @@
         </p:nvSpPr>
         <p:spPr>
           <a:xfrm>
-            <a:off x="594360" y="365760"/>
-            <a:ext cx="7315200" cy="228600"/>
+            <a:off x="594360" y="329184"/>
+            <a:ext cx="9144000" cy="201168"/>
           </a:xfrm>
           <a:prstGeom prst="rect">
             <a:avLst/>
@@ -4351,20 +6482,24 @@
           <a:noFill/>
         </p:spPr>
         <p:txBody>
-          <a:bodyPr wrap="square" lIns="18288" rIns="18288" anchor="t">
+          <a:bodyPr wrap="square" lIns="18288" rIns="18288" tIns="0" bIns="0" anchor="t">
             <a:spAutoFit/>
           </a:bodyPr>
           <a:lstStyle/>
           <a:p>
-            <a:pPr algn="l"/>
-            <a:r>
-              <a:rPr sz="900" b="1">
-                <a:solidFill>
-                  <a:srgbClr val="A4D4CD"/>
-                </a:solidFill>
-                <a:latin typeface="Aptos"/>
+            <a:pPr>
+              <a:spcAft>
+                <a:spcPts val="800"/>
+              </a:spcAft>
+            </a:pPr>
+            <a:r>
+              <a:rPr sz="1000" b="1">
+                <a:solidFill>
+                  <a:srgbClr val="ADDAD1"/>
+                </a:solidFill>
+                <a:latin typeface="Arial"/>
               </a:rPr>
-              <a:t>LONDON MARKET MONITOR  /  TRUST  ·  MARKET INTELLIGENCE</a:t>
+              <a:t>LONDON MARKET MONITOR  /  OUTPUT</a:t>
             </a:r>
           </a:p>
         </p:txBody>
@@ -4377,8 +6512,8 @@
         </p:nvSpPr>
         <p:spPr>
           <a:xfrm>
-            <a:off x="10972800" y="365760"/>
-            <a:ext cx="640080" cy="228600"/>
+            <a:off x="594360" y="877824"/>
+            <a:ext cx="10972800" cy="1051560"/>
           </a:xfrm>
           <a:prstGeom prst="rect">
             <a:avLst/>
@@ -4386,20 +6521,24 @@
           <a:noFill/>
         </p:spPr>
         <p:txBody>
-          <a:bodyPr wrap="square" lIns="18288" rIns="18288" anchor="t">
+          <a:bodyPr wrap="square" lIns="18288" rIns="18288" tIns="0" bIns="0" anchor="t">
             <a:spAutoFit/>
           </a:bodyPr>
           <a:lstStyle/>
           <a:p>
-            <a:pPr algn="r"/>
-            <a:r>
-              <a:rPr sz="900" b="1">
-                <a:solidFill>
-                  <a:srgbClr val="A0B4B7"/>
-                </a:solidFill>
-                <a:latin typeface="Aptos"/>
+            <a:pPr>
+              <a:spcAft>
+                <a:spcPts val="800"/>
+              </a:spcAft>
+            </a:pPr>
+            <a:r>
+              <a:rPr sz="2900" b="1">
+                <a:solidFill>
+                  <a:srgbClr val="FFFDF8"/>
+                </a:solidFill>
+                <a:latin typeface="Arial"/>
               </a:rPr>
-              <a:t>04</a:t>
+              <a:t>See the takeaway first. Go deeper only when you need to.</a:t>
             </a:r>
           </a:p>
         </p:txBody>
@@ -4412,8 +6551,8 @@
         </p:nvSpPr>
         <p:spPr>
           <a:xfrm>
-            <a:off x="594360" y="960120"/>
-            <a:ext cx="10789920" cy="731520"/>
+            <a:off x="612648" y="1691640"/>
+            <a:ext cx="10881360" cy="594360"/>
           </a:xfrm>
           <a:prstGeom prst="rect">
             <a:avLst/>
@@ -4421,34 +6560,116 @@
           <a:noFill/>
         </p:spPr>
         <p:txBody>
-          <a:bodyPr wrap="square" lIns="18288" rIns="18288" anchor="t">
+          <a:bodyPr wrap="square" lIns="18288" rIns="18288" tIns="0" bIns="0" anchor="t">
             <a:spAutoFit/>
           </a:bodyPr>
           <a:lstStyle/>
           <a:p>
-            <a:pPr algn="l"/>
-            <a:r>
-              <a:rPr sz="3000" b="1">
-                <a:solidFill>
-                  <a:srgbClr val="FFFDF8"/>
-                </a:solidFill>
-                <a:latin typeface="Georgia"/>
+            <a:pPr>
+              <a:spcAft>
+                <a:spcPts val="800"/>
+              </a:spcAft>
+            </a:pPr>
+            <a:r>
+              <a:rPr sz="1700" b="0">
+                <a:solidFill>
+                  <a:srgbClr val="ADDAD1"/>
+                </a:solidFill>
+                <a:latin typeface="Arial"/>
               </a:rPr>
-              <a:t>Every important claim has a trail back to evidence.</a:t>
-            </a:r>
-          </a:p>
-        </p:txBody>
-      </p:sp>
-      <p:sp>
-        <p:nvSpPr>
-          <p:cNvPr id="5" name="Rectangle 4"/>
+              <a:t>Live example: do publishers disagree on City and West End prime rents?</a:t>
+            </a:r>
+          </a:p>
+        </p:txBody>
+      </p:sp>
+      <p:sp>
+        <p:nvSpPr>
+          <p:cNvPr id="5" name="TextBox 4"/>
+          <p:cNvSpPr txBox="1"/>
+          <p:nvPr/>
+        </p:nvSpPr>
+        <p:spPr>
+          <a:xfrm>
+            <a:off x="612648" y="6419088"/>
+            <a:ext cx="9601200" cy="201168"/>
+          </a:xfrm>
+          <a:prstGeom prst="rect">
+            <a:avLst/>
+          </a:prstGeom>
+          <a:noFill/>
+        </p:spPr>
+        <p:txBody>
+          <a:bodyPr wrap="square" lIns="18288" rIns="18288" tIns="0" bIns="0" anchor="t">
+            <a:spAutoFit/>
+          </a:bodyPr>
+          <a:lstStyle/>
+          <a:p>
+            <a:pPr>
+              <a:spcAft>
+                <a:spcPts val="800"/>
+              </a:spcAft>
+            </a:pPr>
+            <a:r>
+              <a:rPr sz="900" b="0">
+                <a:solidFill>
+                  <a:srgbClr val="ADDAD1"/>
+                </a:solidFill>
+                <a:latin typeface="Arial"/>
+              </a:rPr>
+              <a:t>EXECUTIVE DECISION BRIEF  |  10 SEPTEMBER 2026</a:t>
+            </a:r>
+          </a:p>
+        </p:txBody>
+      </p:sp>
+      <p:sp>
+        <p:nvSpPr>
+          <p:cNvPr id="6" name="TextBox 5"/>
+          <p:cNvSpPr txBox="1"/>
+          <p:nvPr/>
+        </p:nvSpPr>
+        <p:spPr>
+          <a:xfrm>
+            <a:off x="10972800" y="6400800"/>
+            <a:ext cx="640080" cy="219456"/>
+          </a:xfrm>
+          <a:prstGeom prst="rect">
+            <a:avLst/>
+          </a:prstGeom>
+          <a:noFill/>
+        </p:spPr>
+        <p:txBody>
+          <a:bodyPr wrap="square" lIns="18288" rIns="18288" tIns="0" bIns="0" anchor="t">
+            <a:spAutoFit/>
+          </a:bodyPr>
+          <a:lstStyle/>
+          <a:p>
+            <a:pPr>
+              <a:spcAft>
+                <a:spcPts val="800"/>
+              </a:spcAft>
+            </a:pPr>
+            <a:r>
+              <a:rPr sz="1000" b="0">
+                <a:solidFill>
+                  <a:srgbClr val="ADDAD1"/>
+                </a:solidFill>
+                <a:latin typeface="Arial"/>
+              </a:rPr>
+              <a:t>04 / 06</a:t>
+            </a:r>
+          </a:p>
+        </p:txBody>
+      </p:sp>
+      <p:sp>
+        <p:nvSpPr>
+          <p:cNvPr id="7" name="Rectangle 6"/>
           <p:cNvSpPr/>
           <p:nvPr/>
         </p:nvSpPr>
         <p:spPr>
           <a:xfrm>
-            <a:off x="731520" y="1965960"/>
-            <a:ext cx="4892040" cy="1691640"/>
+            <a:off x="640080" y="2468880"/>
+            <a:ext cx="6812280" cy="2971800"/>
           </a:xfrm>
           <a:prstGeom prst="rect">
             <a:avLst/>
@@ -4486,14 +6707,14 @@
       </p:sp>
       <p:sp>
         <p:nvSpPr>
-          <p:cNvPr id="6" name="TextBox 5"/>
+          <p:cNvPr id="8" name="TextBox 7"/>
           <p:cNvSpPr txBox="1"/>
           <p:nvPr/>
         </p:nvSpPr>
         <p:spPr>
           <a:xfrm>
-            <a:off x="932688" y="2148840"/>
-            <a:ext cx="4489703" cy="274320"/>
+            <a:off x="868680" y="2697480"/>
+            <a:ext cx="6309360" cy="228600"/>
           </a:xfrm>
           <a:prstGeom prst="rect">
             <a:avLst/>
@@ -4501,34 +6722,38 @@
           <a:noFill/>
         </p:spPr>
         <p:txBody>
-          <a:bodyPr wrap="square" lIns="18288" rIns="18288" anchor="t">
+          <a:bodyPr wrap="square" lIns="18288" rIns="18288" tIns="0" bIns="0" anchor="t">
             <a:spAutoFit/>
           </a:bodyPr>
           <a:lstStyle/>
           <a:p>
-            <a:pPr algn="l"/>
-            <a:r>
-              <a:rPr sz="900" b="1">
-                <a:solidFill>
-                  <a:srgbClr val="A4D4CD"/>
-                </a:solidFill>
-                <a:latin typeface="Aptos"/>
+            <a:pPr>
+              <a:spcAft>
+                <a:spcPts val="800"/>
+              </a:spcAft>
+            </a:pPr>
+            <a:r>
+              <a:rPr sz="1100" b="1">
+                <a:solidFill>
+                  <a:srgbClr val="ADDAD1"/>
+                </a:solidFill>
+                <a:latin typeface="Arial"/>
               </a:rPr>
-              <a:t>SHOW THE CALCULATION</a:t>
-            </a:r>
-          </a:p>
-        </p:txBody>
-      </p:sp>
-      <p:sp>
-        <p:nvSpPr>
-          <p:cNvPr id="7" name="TextBox 6"/>
+              <a:t>RECORDED AGENT OUTPUT / EDITED EXCERPT</a:t>
+            </a:r>
+          </a:p>
+        </p:txBody>
+      </p:sp>
+      <p:sp>
+        <p:nvSpPr>
+          <p:cNvPr id="9" name="TextBox 8"/>
           <p:cNvSpPr txBox="1"/>
           <p:nvPr/>
         </p:nvSpPr>
         <p:spPr>
           <a:xfrm>
-            <a:off x="932688" y="2587752"/>
-            <a:ext cx="4489703" cy="914400"/>
+            <a:off x="868680" y="3154680"/>
+            <a:ext cx="6309360" cy="1280160"/>
           </a:xfrm>
           <a:prstGeom prst="rect">
             <a:avLst/>
@@ -4536,79 +6761,38 @@
           <a:noFill/>
         </p:spPr>
         <p:txBody>
-          <a:bodyPr wrap="square" lIns="18288" rIns="18288" anchor="t">
+          <a:bodyPr wrap="square" lIns="18288" rIns="18288" tIns="0" bIns="0" anchor="t">
             <a:spAutoFit/>
           </a:bodyPr>
           <a:lstStyle/>
           <a:p>
-            <a:pPr algn="l"/>
-            <a:r>
-              <a:rPr sz="1500" b="0">
-                <a:solidFill>
-                  <a:srgbClr val="F4F1EA"/>
-                </a:solidFill>
-                <a:latin typeface="Aptos"/>
+            <a:pPr>
+              <a:spcAft>
+                <a:spcPts val="800"/>
+              </a:spcAft>
+            </a:pPr>
+            <a:r>
+              <a:rPr sz="2100" b="0">
+                <a:solidFill>
+                  <a:srgbClr val="FFFDF8"/>
+                </a:solidFill>
+                <a:latin typeface="Arial"/>
               </a:rPr>
-              <a:t>Source values, units and reporting periods alongside derived deltas. Transparent screening thresholds.</a:t>
-            </a:r>
-          </a:p>
-        </p:txBody>
-      </p:sp>
-      <p:sp>
-        <p:nvSpPr>
-          <p:cNvPr id="8" name="Rectangle 7"/>
-          <p:cNvSpPr/>
-          <p:nvPr/>
-        </p:nvSpPr>
-        <p:spPr>
-          <a:xfrm>
-            <a:off x="6263640" y="1965960"/>
-            <a:ext cx="4892040" cy="1691640"/>
-          </a:xfrm>
-          <a:prstGeom prst="rect">
-            <a:avLst/>
-          </a:prstGeom>
-          <a:solidFill>
-            <a:srgbClr val="193340"/>
-          </a:solidFill>
-          <a:ln>
-            <a:solidFill>
-              <a:srgbClr val="38545E"/>
-            </a:solidFill>
-          </a:ln>
-        </p:spPr>
-        <p:style>
-          <a:lnRef idx="1">
-            <a:schemeClr val="accent1"/>
-          </a:lnRef>
-          <a:fillRef idx="3">
-            <a:schemeClr val="accent1"/>
-          </a:fillRef>
-          <a:effectRef idx="2">
-            <a:schemeClr val="accent1"/>
-          </a:effectRef>
-          <a:fontRef idx="minor">
-            <a:schemeClr val="lt1"/>
-          </a:fontRef>
-        </p:style>
-        <p:txBody>
-          <a:bodyPr rtlCol="0" anchor="ctr"/>
-          <a:lstStyle/>
-          <a:p>
-            <a:pPr algn="ctr"/>
-          </a:p>
-        </p:txBody>
-      </p:sp>
-      <p:sp>
-        <p:nvSpPr>
-          <p:cNvPr id="9" name="TextBox 8"/>
+              <a:t>Savills reports West End average prime rent of £175.10 per sq ft for Q2 2026. Knight Frank's £185.00 figure is a Q4 2025 West End Core headline rent. Different periods and definitions mean these are not a like-for-like disagreement. [1] [2]</a:t>
+            </a:r>
+          </a:p>
+        </p:txBody>
+      </p:sp>
+      <p:sp>
+        <p:nvSpPr>
+          <p:cNvPr id="10" name="TextBox 9"/>
           <p:cNvSpPr txBox="1"/>
           <p:nvPr/>
         </p:nvSpPr>
         <p:spPr>
           <a:xfrm>
-            <a:off x="6464807" y="2148840"/>
-            <a:ext cx="4489703" cy="274320"/>
+            <a:off x="868680" y="4892040"/>
+            <a:ext cx="6263640" cy="365760"/>
           </a:xfrm>
           <a:prstGeom prst="rect">
             <a:avLst/>
@@ -4616,34 +6800,38 @@
           <a:noFill/>
         </p:spPr>
         <p:txBody>
-          <a:bodyPr wrap="square" lIns="18288" rIns="18288" anchor="t">
+          <a:bodyPr wrap="square" lIns="18288" rIns="18288" tIns="0" bIns="0" anchor="t">
             <a:spAutoFit/>
           </a:bodyPr>
           <a:lstStyle/>
           <a:p>
-            <a:pPr algn="l"/>
-            <a:r>
-              <a:rPr sz="900" b="1">
-                <a:solidFill>
-                  <a:srgbClr val="A4D4CD"/>
-                </a:solidFill>
-                <a:latin typeface="Aptos"/>
+            <a:pPr>
+              <a:spcAft>
+                <a:spcPts val="800"/>
+              </a:spcAft>
+            </a:pPr>
+            <a:r>
+              <a:rPr sz="1400" b="1">
+                <a:solidFill>
+                  <a:srgbClr val="ADDAD1"/>
+                </a:solidFill>
+                <a:latin typeface="Arial"/>
               </a:rPr>
-              <a:t>KEEP DISAGREEMENT</a:t>
-            </a:r>
-          </a:p>
-        </p:txBody>
-      </p:sp>
-      <p:sp>
-        <p:nvSpPr>
-          <p:cNvPr id="10" name="TextBox 9"/>
+              <a:t>Run status: partial brief; no verified overall synthesis.</a:t>
+            </a:r>
+          </a:p>
+        </p:txBody>
+      </p:sp>
+      <p:sp>
+        <p:nvSpPr>
+          <p:cNvPr id="11" name="TextBox 10"/>
           <p:cNvSpPr txBox="1"/>
           <p:nvPr/>
         </p:nvSpPr>
         <p:spPr>
           <a:xfrm>
-            <a:off x="6464807" y="2587752"/>
-            <a:ext cx="4489703" cy="914400"/>
+            <a:off x="7818120" y="2697480"/>
+            <a:ext cx="3611880" cy="365760"/>
           </a:xfrm>
           <a:prstGeom prst="rect">
             <a:avLst/>
@@ -4651,66 +6839,25 @@
           <a:noFill/>
         </p:spPr>
         <p:txBody>
-          <a:bodyPr wrap="square" lIns="18288" rIns="18288" anchor="t">
+          <a:bodyPr wrap="square" lIns="18288" rIns="18288" tIns="0" bIns="0" anchor="t">
             <a:spAutoFit/>
           </a:bodyPr>
           <a:lstStyle/>
           <a:p>
-            <a:pPr algn="l"/>
-            <a:r>
-              <a:rPr sz="1500" b="0">
-                <a:solidFill>
-                  <a:srgbClr val="F4F1EA"/>
-                </a:solidFill>
-                <a:latin typeface="Aptos"/>
+            <a:pPr>
+              <a:spcAft>
+                <a:spcPts val="800"/>
+              </a:spcAft>
+            </a:pPr>
+            <a:r>
+              <a:rPr sz="2000" b="1">
+                <a:solidFill>
+                  <a:srgbClr val="ADDAD1"/>
+                </a:solidFill>
+                <a:latin typeface="Arial"/>
               </a:rPr>
-              <a:t>Different numbers, definitions or dates remain visible. Conflicting reports are never averaged into one answer.</a:t>
-            </a:r>
-          </a:p>
-        </p:txBody>
-      </p:sp>
-      <p:sp>
-        <p:nvSpPr>
-          <p:cNvPr id="11" name="Rectangle 10"/>
-          <p:cNvSpPr/>
-          <p:nvPr/>
-        </p:nvSpPr>
-        <p:spPr>
-          <a:xfrm>
-            <a:off x="731520" y="3794760"/>
-            <a:ext cx="4892040" cy="1691640"/>
-          </a:xfrm>
-          <a:prstGeom prst="rect">
-            <a:avLst/>
-          </a:prstGeom>
-          <a:solidFill>
-            <a:srgbClr val="193340"/>
-          </a:solidFill>
-          <a:ln>
-            <a:solidFill>
-              <a:srgbClr val="38545E"/>
-            </a:solidFill>
-          </a:ln>
-        </p:spPr>
-        <p:style>
-          <a:lnRef idx="1">
-            <a:schemeClr val="accent1"/>
-          </a:lnRef>
-          <a:fillRef idx="3">
-            <a:schemeClr val="accent1"/>
-          </a:fillRef>
-          <a:effectRef idx="2">
-            <a:schemeClr val="accent1"/>
-          </a:effectRef>
-          <a:fontRef idx="minor">
-            <a:schemeClr val="lt1"/>
-          </a:fontRef>
-        </p:style>
-        <p:txBody>
-          <a:bodyPr rtlCol="0" anchor="ctr"/>
-          <a:lstStyle/>
-          <a:p>
-            <a:pPr algn="ctr"/>
+              <a:t>What this supports</a:t>
+            </a:r>
           </a:p>
         </p:txBody>
       </p:sp>
@@ -4722,8 +6869,8 @@
         </p:nvSpPr>
         <p:spPr>
           <a:xfrm>
-            <a:off x="932688" y="3977640"/>
-            <a:ext cx="4489703" cy="274320"/>
+            <a:off x="7818120" y="3200400"/>
+            <a:ext cx="3474720" cy="960120"/>
           </a:xfrm>
           <a:prstGeom prst="rect">
             <a:avLst/>
@@ -4731,20 +6878,24 @@
           <a:noFill/>
         </p:spPr>
         <p:txBody>
-          <a:bodyPr wrap="square" lIns="18288" rIns="18288" anchor="t">
+          <a:bodyPr wrap="square" lIns="18288" rIns="18288" tIns="0" bIns="0" anchor="t">
             <a:spAutoFit/>
           </a:bodyPr>
           <a:lstStyle/>
           <a:p>
-            <a:pPr algn="l"/>
-            <a:r>
-              <a:rPr sz="900" b="1">
-                <a:solidFill>
-                  <a:srgbClr val="A4D4CD"/>
-                </a:solidFill>
-                <a:latin typeface="Aptos"/>
+            <a:pPr>
+              <a:spcAft>
+                <a:spcPts val="800"/>
+              </a:spcAft>
+            </a:pPr>
+            <a:r>
+              <a:rPr sz="1800" b="0">
+                <a:solidFill>
+                  <a:srgbClr val="FFFDF8"/>
+                </a:solidFill>
+                <a:latin typeface="Arial"/>
               </a:rPr>
-              <a:t>EXPLAIN POSSIBLE DRIVERS</a:t>
+              <a:t>Check definitions before treating different rent figures as conflicting evidence.</a:t>
             </a:r>
           </a:p>
         </p:txBody>
@@ -4757,8 +6908,8 @@
         </p:nvSpPr>
         <p:spPr>
           <a:xfrm>
-            <a:off x="932688" y="4416552"/>
-            <a:ext cx="4489703" cy="914400"/>
+            <a:off x="7818120" y="4480560"/>
+            <a:ext cx="3611880" cy="365760"/>
           </a:xfrm>
           <a:prstGeom prst="rect">
             <a:avLst/>
@@ -4766,79 +6917,38 @@
           <a:noFill/>
         </p:spPr>
         <p:txBody>
-          <a:bodyPr wrap="square" lIns="18288" rIns="18288" anchor="t">
+          <a:bodyPr wrap="square" lIns="18288" rIns="18288" tIns="0" bIns="0" anchor="t">
             <a:spAutoFit/>
           </a:bodyPr>
           <a:lstStyle/>
           <a:p>
-            <a:pPr algn="l"/>
-            <a:r>
-              <a:rPr sz="1500" b="0">
-                <a:solidFill>
-                  <a:srgbClr val="F4F1EA"/>
-                </a:solidFill>
-                <a:latin typeface="Aptos"/>
+            <a:pPr>
+              <a:spcAft>
+                <a:spcPts val="800"/>
+              </a:spcAft>
+            </a:pPr>
+            <a:r>
+              <a:rPr sz="2000" b="1">
+                <a:solidFill>
+                  <a:srgbClr val="ADDAD1"/>
+                </a:solidFill>
+                <a:latin typeface="Arial"/>
               </a:rPr>
-              <a:t>Cited facts are separate from interpretation. Consistency and correlation are not proof of causation.</a:t>
-            </a:r>
-          </a:p>
-        </p:txBody>
-      </p:sp>
-      <p:sp>
-        <p:nvSpPr>
-          <p:cNvPr id="14" name="Rectangle 13"/>
-          <p:cNvSpPr/>
-          <p:nvPr/>
-        </p:nvSpPr>
-        <p:spPr>
-          <a:xfrm>
-            <a:off x="6263640" y="3794760"/>
-            <a:ext cx="4892040" cy="1691640"/>
-          </a:xfrm>
-          <a:prstGeom prst="rect">
-            <a:avLst/>
-          </a:prstGeom>
-          <a:solidFill>
-            <a:srgbClr val="193340"/>
-          </a:solidFill>
-          <a:ln>
-            <a:solidFill>
-              <a:srgbClr val="38545E"/>
-            </a:solidFill>
-          </a:ln>
-        </p:spPr>
-        <p:style>
-          <a:lnRef idx="1">
-            <a:schemeClr val="accent1"/>
-          </a:lnRef>
-          <a:fillRef idx="3">
-            <a:schemeClr val="accent1"/>
-          </a:fillRef>
-          <a:effectRef idx="2">
-            <a:schemeClr val="accent1"/>
-          </a:effectRef>
-          <a:fontRef idx="minor">
-            <a:schemeClr val="lt1"/>
-          </a:fontRef>
-        </p:style>
-        <p:txBody>
-          <a:bodyPr rtlCol="0" anchor="ctr"/>
-          <a:lstStyle/>
-          <a:p>
-            <a:pPr algn="ctr"/>
-          </a:p>
-        </p:txBody>
-      </p:sp>
-      <p:sp>
-        <p:nvSpPr>
-          <p:cNvPr id="15" name="TextBox 14"/>
+              <a:t>What remains open</a:t>
+            </a:r>
+          </a:p>
+        </p:txBody>
+      </p:sp>
+      <p:sp>
+        <p:nvSpPr>
+          <p:cNvPr id="14" name="TextBox 13"/>
           <p:cNvSpPr txBox="1"/>
           <p:nvPr/>
         </p:nvSpPr>
         <p:spPr>
           <a:xfrm>
-            <a:off x="6464807" y="3977640"/>
-            <a:ext cx="4489703" cy="274320"/>
+            <a:off x="7818120" y="4983480"/>
+            <a:ext cx="3474720" cy="960120"/>
           </a:xfrm>
           <a:prstGeom prst="rect">
             <a:avLst/>
@@ -4846,34 +6956,40 @@
           <a:noFill/>
         </p:spPr>
         <p:txBody>
-          <a:bodyPr wrap="square" lIns="18288" rIns="18288" anchor="t">
+          <a:bodyPr wrap="square" lIns="18288" rIns="18288" tIns="0" bIns="0" anchor="t">
             <a:spAutoFit/>
           </a:bodyPr>
           <a:lstStyle/>
           <a:p>
-            <a:pPr algn="l"/>
-            <a:r>
-              <a:rPr sz="900" b="1">
-                <a:solidFill>
-                  <a:srgbClr val="A4D4CD"/>
-                </a:solidFill>
-                <a:latin typeface="Aptos"/>
+            <a:pPr>
+              <a:spcAft>
+                <a:spcPts val="800"/>
+              </a:spcAft>
+            </a:pPr>
+            <a:r>
+              <a:rPr sz="1700" b="0">
+                <a:solidFill>
+                  <a:srgbClr val="FFFDF8"/>
+                </a:solidFill>
+                <a:latin typeface="Arial"/>
               </a:rPr>
-              <a:t>MAKE VERIFICATION QUICK</a:t>
-            </a:r>
-          </a:p>
-        </p:txBody>
-      </p:sp>
-      <p:sp>
-        <p:nvSpPr>
-          <p:cNvPr id="16" name="TextBox 15"/>
+              <a:t>Knight Frank's Q2 rent table was absent from the retrieved text. The comparison remains open.</a:t>
+            </a:r>
+          </a:p>
+        </p:txBody>
+      </p:sp>
+      <p:sp>
+        <p:nvSpPr>
+          <p:cNvPr id="15" name="TextBox 14">
+            <a:hlinkClick r:id="rId2"/>
+          </p:cNvPr>
           <p:cNvSpPr txBox="1"/>
           <p:nvPr/>
         </p:nvSpPr>
         <p:spPr>
           <a:xfrm>
-            <a:off x="6464807" y="4416552"/>
-            <a:ext cx="4489703" cy="914400"/>
+            <a:off x="868680" y="5650992"/>
+            <a:ext cx="6400800" cy="228600"/>
           </a:xfrm>
           <a:prstGeom prst="rect">
             <a:avLst/>
@@ -4881,20 +6997,65 @@
           <a:noFill/>
         </p:spPr>
         <p:txBody>
-          <a:bodyPr wrap="square" lIns="18288" rIns="18288" anchor="t">
+          <a:bodyPr wrap="square" lIns="18288" rIns="18288" tIns="0" bIns="0" anchor="t">
             <a:spAutoFit/>
           </a:bodyPr>
           <a:lstStyle/>
           <a:p>
-            <a:pPr algn="l"/>
-            <a:r>
-              <a:rPr sz="1500" b="0">
-                <a:solidFill>
-                  <a:srgbClr val="F4F1EA"/>
-                </a:solidFill>
-                <a:latin typeface="Aptos"/>
+            <a:pPr>
+              <a:spcAft>
+                <a:spcPts val="800"/>
+              </a:spcAft>
+            </a:pPr>
+            <a:r>
+              <a:rPr sz="1100" b="0">
+                <a:solidFill>
+                  <a:srgbClr val="ADDAD1"/>
+                </a:solidFill>
+                <a:latin typeface="Arial"/>
               </a:rPr>
-              <a:t>Open the publisher, title, date, URL and relevant passage. Missing evidence stays visible, including unsupported forecasts.</a:t>
+              <a:t>[1] Savills | Central London Office Market Watch, Q2 2026</a:t>
+            </a:r>
+          </a:p>
+        </p:txBody>
+      </p:sp>
+      <p:sp>
+        <p:nvSpPr>
+          <p:cNvPr id="16" name="TextBox 15">
+            <a:hlinkClick r:id="rId3"/>
+          </p:cNvPr>
+          <p:cNvSpPr txBox="1"/>
+          <p:nvPr/>
+        </p:nvSpPr>
+        <p:spPr>
+          <a:xfrm>
+            <a:off x="868680" y="5961888"/>
+            <a:ext cx="6400800" cy="228600"/>
+          </a:xfrm>
+          <a:prstGeom prst="rect">
+            <a:avLst/>
+          </a:prstGeom>
+          <a:noFill/>
+        </p:spPr>
+        <p:txBody>
+          <a:bodyPr wrap="square" lIns="18288" rIns="18288" tIns="0" bIns="0" anchor="t">
+            <a:spAutoFit/>
+          </a:bodyPr>
+          <a:lstStyle/>
+          <a:p>
+            <a:pPr>
+              <a:spcAft>
+                <a:spcPts val="800"/>
+              </a:spcAft>
+            </a:pPr>
+            <a:r>
+              <a:rPr sz="1100" b="0">
+                <a:solidFill>
+                  <a:srgbClr val="ADDAD1"/>
+                </a:solidFill>
+                <a:latin typeface="Arial"/>
+              </a:rPr>
+              <a:t>[2] Knight Frank | London Office Market Report, Q4 2025</a:t>
             </a:r>
           </a:p>
         </p:txBody>
@@ -4933,8 +7094,8 @@
         </p:nvSpPr>
         <p:spPr>
           <a:xfrm>
-            <a:off x="594360" y="365760"/>
-            <a:ext cx="7315200" cy="228600"/>
+            <a:off x="594360" y="329184"/>
+            <a:ext cx="9144000" cy="201168"/>
           </a:xfrm>
           <a:prstGeom prst="rect">
             <a:avLst/>
@@ -4942,20 +7103,24 @@
           <a:noFill/>
         </p:spPr>
         <p:txBody>
-          <a:bodyPr wrap="square" lIns="18288" rIns="18288" anchor="t">
+          <a:bodyPr wrap="square" lIns="18288" rIns="18288" tIns="0" bIns="0" anchor="t">
             <a:spAutoFit/>
           </a:bodyPr>
           <a:lstStyle/>
           <a:p>
-            <a:pPr algn="l"/>
-            <a:r>
-              <a:rPr sz="900" b="1">
+            <a:pPr>
+              <a:spcAft>
+                <a:spcPts val="800"/>
+              </a:spcAft>
+            </a:pPr>
+            <a:r>
+              <a:rPr sz="1000" b="1">
                 <a:solidFill>
                   <a:srgbClr val="1B8077"/>
                 </a:solidFill>
-                <a:latin typeface="Aptos"/>
+                <a:latin typeface="Arial"/>
               </a:rPr>
-              <a:t>LONDON MARKET MONITOR  /  FROM POC TO PRACTICE  ·  MARKET INTELLIGENCE</a:t>
+              <a:t>LONDON MARKET MONITOR  /  TRUST</a:t>
             </a:r>
           </a:p>
         </p:txBody>
@@ -4968,8 +7133,8 @@
         </p:nvSpPr>
         <p:spPr>
           <a:xfrm>
-            <a:off x="10972800" y="365760"/>
-            <a:ext cx="640080" cy="228600"/>
+            <a:off x="594360" y="877824"/>
+            <a:ext cx="10972800" cy="1051560"/>
           </a:xfrm>
           <a:prstGeom prst="rect">
             <a:avLst/>
@@ -4977,20 +7142,24 @@
           <a:noFill/>
         </p:spPr>
         <p:txBody>
-          <a:bodyPr wrap="square" lIns="18288" rIns="18288" anchor="t">
+          <a:bodyPr wrap="square" lIns="18288" rIns="18288" tIns="0" bIns="0" anchor="t">
             <a:spAutoFit/>
           </a:bodyPr>
           <a:lstStyle/>
           <a:p>
-            <a:pPr algn="r"/>
-            <a:r>
-              <a:rPr sz="900" b="1">
-                <a:solidFill>
-                  <a:srgbClr val="708087"/>
-                </a:solidFill>
-                <a:latin typeface="Aptos"/>
+            <a:pPr>
+              <a:spcAft>
+                <a:spcPts val="800"/>
+              </a:spcAft>
+            </a:pPr>
+            <a:r>
+              <a:rPr sz="2900" b="1">
+                <a:solidFill>
+                  <a:srgbClr val="102331"/>
+                </a:solidFill>
+                <a:latin typeface="Arial"/>
               </a:rPr>
-              <a:t>05</a:t>
+              <a:t>Check the claim before it reaches the meeting</a:t>
             </a:r>
           </a:p>
         </p:txBody>
@@ -5003,8 +7172,8 @@
         </p:nvSpPr>
         <p:spPr>
           <a:xfrm>
-            <a:off x="594360" y="960120"/>
-            <a:ext cx="10789920" cy="731520"/>
+            <a:off x="612648" y="1691640"/>
+            <a:ext cx="10881360" cy="594360"/>
           </a:xfrm>
           <a:prstGeom prst="rect">
             <a:avLst/>
@@ -5012,34 +7181,116 @@
           <a:noFill/>
         </p:spPr>
         <p:txBody>
-          <a:bodyPr wrap="square" lIns="18288" rIns="18288" anchor="t">
+          <a:bodyPr wrap="square" lIns="18288" rIns="18288" tIns="0" bIns="0" anchor="t">
             <a:spAutoFit/>
           </a:bodyPr>
           <a:lstStyle/>
           <a:p>
-            <a:pPr algn="l"/>
-            <a:r>
-              <a:rPr sz="3000" b="1">
-                <a:solidFill>
-                  <a:srgbClr val="102331"/>
-                </a:solidFill>
-                <a:latin typeface="Georgia"/>
+            <a:pPr>
+              <a:spcAft>
+                <a:spcPts val="800"/>
+              </a:spcAft>
+            </a:pPr>
+            <a:r>
+              <a:rPr sz="1700" b="0">
+                <a:solidFill>
+                  <a:srgbClr val="52676D"/>
+                </a:solidFill>
+                <a:latin typeface="Arial"/>
               </a:rPr>
-              <a:t>Prove the research workflow. Then automate it.</a:t>
-            </a:r>
-          </a:p>
-        </p:txBody>
-      </p:sp>
-      <p:sp>
-        <p:nvSpPr>
-          <p:cNvPr id="5" name="Rectangle 4"/>
+              <a:t>Trust comes from showing what can be compared, what conflicts and what remains unknown.</a:t>
+            </a:r>
+          </a:p>
+        </p:txBody>
+      </p:sp>
+      <p:sp>
+        <p:nvSpPr>
+          <p:cNvPr id="5" name="TextBox 4"/>
+          <p:cNvSpPr txBox="1"/>
+          <p:nvPr/>
+        </p:nvSpPr>
+        <p:spPr>
+          <a:xfrm>
+            <a:off x="612648" y="6419088"/>
+            <a:ext cx="9601200" cy="201168"/>
+          </a:xfrm>
+          <a:prstGeom prst="rect">
+            <a:avLst/>
+          </a:prstGeom>
+          <a:noFill/>
+        </p:spPr>
+        <p:txBody>
+          <a:bodyPr wrap="square" lIns="18288" rIns="18288" tIns="0" bIns="0" anchor="t">
+            <a:spAutoFit/>
+          </a:bodyPr>
+          <a:lstStyle/>
+          <a:p>
+            <a:pPr>
+              <a:spcAft>
+                <a:spcPts val="800"/>
+              </a:spcAft>
+            </a:pPr>
+            <a:r>
+              <a:rPr sz="900" b="0">
+                <a:solidFill>
+                  <a:srgbClr val="52676D"/>
+                </a:solidFill>
+                <a:latin typeface="Arial"/>
+              </a:rPr>
+              <a:t>EXECUTIVE DECISION BRIEF  |  10 SEPTEMBER 2026</a:t>
+            </a:r>
+          </a:p>
+        </p:txBody>
+      </p:sp>
+      <p:sp>
+        <p:nvSpPr>
+          <p:cNvPr id="6" name="TextBox 5"/>
+          <p:cNvSpPr txBox="1"/>
+          <p:nvPr/>
+        </p:nvSpPr>
+        <p:spPr>
+          <a:xfrm>
+            <a:off x="10972800" y="6400800"/>
+            <a:ext cx="640080" cy="219456"/>
+          </a:xfrm>
+          <a:prstGeom prst="rect">
+            <a:avLst/>
+          </a:prstGeom>
+          <a:noFill/>
+        </p:spPr>
+        <p:txBody>
+          <a:bodyPr wrap="square" lIns="18288" rIns="18288" tIns="0" bIns="0" anchor="t">
+            <a:spAutoFit/>
+          </a:bodyPr>
+          <a:lstStyle/>
+          <a:p>
+            <a:pPr>
+              <a:spcAft>
+                <a:spcPts val="800"/>
+              </a:spcAft>
+            </a:pPr>
+            <a:r>
+              <a:rPr sz="1000" b="0">
+                <a:solidFill>
+                  <a:srgbClr val="52676D"/>
+                </a:solidFill>
+                <a:latin typeface="Arial"/>
+              </a:rPr>
+              <a:t>05 / 06</a:t>
+            </a:r>
+          </a:p>
+        </p:txBody>
+      </p:sp>
+      <p:sp>
+        <p:nvSpPr>
+          <p:cNvPr id="7" name="Rectangle 6"/>
           <p:cNvSpPr/>
           <p:nvPr/>
         </p:nvSpPr>
         <p:spPr>
           <a:xfrm>
-            <a:off x="731520" y="1965960"/>
-            <a:ext cx="3337560" cy="3566160"/>
+            <a:off x="640080" y="2514600"/>
+            <a:ext cx="5440680" cy="1325880"/>
           </a:xfrm>
           <a:prstGeom prst="rect">
             <a:avLst/>
@@ -5077,14 +7328,14 @@
       </p:sp>
       <p:sp>
         <p:nvSpPr>
-          <p:cNvPr id="6" name="TextBox 5"/>
+          <p:cNvPr id="8" name="TextBox 7"/>
           <p:cNvSpPr txBox="1"/>
           <p:nvPr/>
         </p:nvSpPr>
         <p:spPr>
           <a:xfrm>
-            <a:off x="932688" y="2148840"/>
-            <a:ext cx="2935224" cy="274320"/>
+            <a:off x="841247" y="2679192"/>
+            <a:ext cx="5029200" cy="320040"/>
           </a:xfrm>
           <a:prstGeom prst="rect">
             <a:avLst/>
@@ -5092,34 +7343,38 @@
           <a:noFill/>
         </p:spPr>
         <p:txBody>
-          <a:bodyPr wrap="square" lIns="18288" rIns="18288" anchor="t">
+          <a:bodyPr wrap="square" lIns="18288" rIns="18288" tIns="0" bIns="0" anchor="t">
             <a:spAutoFit/>
           </a:bodyPr>
           <a:lstStyle/>
           <a:p>
-            <a:pPr algn="l"/>
-            <a:r>
-              <a:rPr sz="900" b="1">
+            <a:pPr>
+              <a:spcAft>
+                <a:spcPts val="800"/>
+              </a:spcAft>
+            </a:pPr>
+            <a:r>
+              <a:rPr sz="2000" b="1">
                 <a:solidFill>
                   <a:srgbClr val="1B8077"/>
                 </a:solidFill>
-                <a:latin typeface="Aptos"/>
+                <a:latin typeface="Arial"/>
               </a:rPr>
-              <a:t>POC TODAY</a:t>
-            </a:r>
-          </a:p>
-        </p:txBody>
-      </p:sp>
-      <p:sp>
-        <p:nvSpPr>
-          <p:cNvPr id="7" name="TextBox 6"/>
+              <a:t>Comparable sources</a:t>
+            </a:r>
+          </a:p>
+        </p:txBody>
+      </p:sp>
+      <p:sp>
+        <p:nvSpPr>
+          <p:cNvPr id="9" name="TextBox 8"/>
           <p:cNvSpPr txBox="1"/>
           <p:nvPr/>
         </p:nvSpPr>
         <p:spPr>
           <a:xfrm>
-            <a:off x="932688" y="2587752"/>
-            <a:ext cx="2935224" cy="2788920"/>
+            <a:off x="841247" y="3127248"/>
+            <a:ext cx="4983480" cy="621792"/>
           </a:xfrm>
           <a:prstGeom prst="rect">
             <a:avLst/>
@@ -5127,38 +7382,38 @@
           <a:noFill/>
         </p:spPr>
         <p:txBody>
-          <a:bodyPr wrap="square" lIns="18288" rIns="18288" anchor="t">
+          <a:bodyPr wrap="square" lIns="18288" rIns="18288" tIns="0" bIns="0" anchor="t">
             <a:spAutoFit/>
           </a:bodyPr>
           <a:lstStyle/>
           <a:p>
-            <a:pPr algn="l"/>
-            <a:r>
-              <a:rPr sz="1500" b="0">
+            <a:pPr>
+              <a:spcAft>
+                <a:spcPts val="800"/>
+              </a:spcAft>
+            </a:pPr>
+            <a:r>
+              <a:rPr sz="1700" b="0">
                 <a:solidFill>
                   <a:srgbClr val="102331"/>
                 </a:solidFill>
-                <a:latin typeface="Aptos"/>
+                <a:latin typeface="Arial"/>
               </a:rPr>
-              <a:t>On-demand market briefs
-Hypothesis investigations
-Source-backed watchlists
-Manual evidence refresh
-Implications to investigate, not investment recommendations.</a:t>
-            </a:r>
-          </a:p>
-        </p:txBody>
-      </p:sp>
-      <p:sp>
-        <p:nvSpPr>
-          <p:cNvPr id="8" name="Rectangle 7"/>
+              <a:t>Match the measure, location, units and period before comparing values.</a:t>
+            </a:r>
+          </a:p>
+        </p:txBody>
+      </p:sp>
+      <p:sp>
+        <p:nvSpPr>
+          <p:cNvPr id="10" name="Rectangle 9"/>
           <p:cNvSpPr/>
           <p:nvPr/>
         </p:nvSpPr>
         <p:spPr>
           <a:xfrm>
-            <a:off x="4434840" y="1965960"/>
-            <a:ext cx="3337560" cy="3566160"/>
+            <a:off x="6400800" y="2514600"/>
+            <a:ext cx="5440680" cy="1325880"/>
           </a:xfrm>
           <a:prstGeom prst="rect">
             <a:avLst/>
@@ -5196,14 +7451,14 @@
       </p:sp>
       <p:sp>
         <p:nvSpPr>
-          <p:cNvPr id="9" name="TextBox 8"/>
+          <p:cNvPr id="11" name="TextBox 10"/>
           <p:cNvSpPr txBox="1"/>
           <p:nvPr/>
         </p:nvSpPr>
         <p:spPr>
           <a:xfrm>
-            <a:off x="4636007" y="2148840"/>
-            <a:ext cx="2935224" cy="274320"/>
+            <a:off x="6601968" y="2679192"/>
+            <a:ext cx="5029200" cy="320040"/>
           </a:xfrm>
           <a:prstGeom prst="rect">
             <a:avLst/>
@@ -5211,34 +7466,38 @@
           <a:noFill/>
         </p:spPr>
         <p:txBody>
-          <a:bodyPr wrap="square" lIns="18288" rIns="18288" anchor="t">
+          <a:bodyPr wrap="square" lIns="18288" rIns="18288" tIns="0" bIns="0" anchor="t">
             <a:spAutoFit/>
           </a:bodyPr>
           <a:lstStyle/>
           <a:p>
-            <a:pPr algn="l"/>
-            <a:r>
-              <a:rPr sz="900" b="1">
+            <a:pPr>
+              <a:spcAft>
+                <a:spcPts val="800"/>
+              </a:spcAft>
+            </a:pPr>
+            <a:r>
+              <a:rPr sz="2000" b="1">
                 <a:solidFill>
                   <a:srgbClr val="1B8077"/>
                 </a:solidFill>
-                <a:latin typeface="Aptos"/>
+                <a:latin typeface="Arial"/>
               </a:rPr>
-              <a:t>MEASURE THE VALUE</a:t>
-            </a:r>
-          </a:p>
-        </p:txBody>
-      </p:sp>
-      <p:sp>
-        <p:nvSpPr>
-          <p:cNvPr id="10" name="TextBox 9"/>
+              <a:t>Conflicting evidence</a:t>
+            </a:r>
+          </a:p>
+        </p:txBody>
+      </p:sp>
+      <p:sp>
+        <p:nvSpPr>
+          <p:cNvPr id="12" name="TextBox 11"/>
           <p:cNvSpPr txBox="1"/>
           <p:nvPr/>
         </p:nvSpPr>
         <p:spPr>
           <a:xfrm>
-            <a:off x="4636007" y="2587752"/>
-            <a:ext cx="2935224" cy="2788920"/>
+            <a:off x="6601968" y="3127248"/>
+            <a:ext cx="4983480" cy="621792"/>
           </a:xfrm>
           <a:prstGeom prst="rect">
             <a:avLst/>
@@ -5246,38 +7505,38 @@
           <a:noFill/>
         </p:spPr>
         <p:txBody>
-          <a:bodyPr wrap="square" lIns="18288" rIns="18288" anchor="t">
+          <a:bodyPr wrap="square" lIns="18288" rIns="18288" tIns="0" bIns="0" anchor="t">
             <a:spAutoFit/>
           </a:bodyPr>
           <a:lstStyle/>
           <a:p>
-            <a:pPr algn="l"/>
-            <a:r>
-              <a:rPr sz="1500" b="0">
+            <a:pPr>
+              <a:spcAft>
+                <a:spcPts val="800"/>
+              </a:spcAft>
+            </a:pPr>
+            <a:r>
+              <a:rPr sz="1700" b="0">
                 <a:solidFill>
                   <a:srgbClr val="102331"/>
                 </a:solidFill>
-                <a:latin typeface="Aptos"/>
+                <a:latin typeface="Arial"/>
               </a:rPr>
-              <a:t>Time to a usable meeting brief
-Time to verify a claim
-Material developments found
-Missing or disputed evidence exposed
-Compare with the team's manual research baseline; no savings are claimed yet.</a:t>
-            </a:r>
-          </a:p>
-        </p:txBody>
-      </p:sp>
-      <p:sp>
-        <p:nvSpPr>
-          <p:cNvPr id="11" name="Rectangle 10"/>
+              <a:t>Keep competing reports visible. Do not average away differences in definitions or coverage.</a:t>
+            </a:r>
+          </a:p>
+        </p:txBody>
+      </p:sp>
+      <p:sp>
+        <p:nvSpPr>
+          <p:cNvPr id="13" name="Rectangle 12"/>
           <p:cNvSpPr/>
           <p:nvPr/>
         </p:nvSpPr>
         <p:spPr>
           <a:xfrm>
-            <a:off x="8138160" y="1965960"/>
-            <a:ext cx="3337560" cy="3566160"/>
+            <a:off x="640080" y="4023360"/>
+            <a:ext cx="5440680" cy="1325880"/>
           </a:xfrm>
           <a:prstGeom prst="rect">
             <a:avLst/>
@@ -5315,14 +7574,682 @@
       </p:sp>
       <p:sp>
         <p:nvSpPr>
+          <p:cNvPr id="14" name="TextBox 13"/>
+          <p:cNvSpPr txBox="1"/>
+          <p:nvPr/>
+        </p:nvSpPr>
+        <p:spPr>
+          <a:xfrm>
+            <a:off x="841247" y="4187952"/>
+            <a:ext cx="5029200" cy="320040"/>
+          </a:xfrm>
+          <a:prstGeom prst="rect">
+            <a:avLst/>
+          </a:prstGeom>
+          <a:noFill/>
+        </p:spPr>
+        <p:txBody>
+          <a:bodyPr wrap="square" lIns="18288" rIns="18288" tIns="0" bIns="0" anchor="t">
+            <a:spAutoFit/>
+          </a:bodyPr>
+          <a:lstStyle/>
+          <a:p>
+            <a:pPr>
+              <a:spcAft>
+                <a:spcPts val="800"/>
+              </a:spcAft>
+            </a:pPr>
+            <a:r>
+              <a:rPr sz="2000" b="1">
+                <a:solidFill>
+                  <a:srgbClr val="1B8077"/>
+                </a:solidFill>
+                <a:latin typeface="Arial"/>
+              </a:rPr>
+              <a:t>Explicit uncertainty</a:t>
+            </a:r>
+          </a:p>
+        </p:txBody>
+      </p:sp>
+      <p:sp>
+        <p:nvSpPr>
+          <p:cNvPr id="15" name="TextBox 14"/>
+          <p:cNvSpPr txBox="1"/>
+          <p:nvPr/>
+        </p:nvSpPr>
+        <p:spPr>
+          <a:xfrm>
+            <a:off x="841247" y="4636008"/>
+            <a:ext cx="4983480" cy="621792"/>
+          </a:xfrm>
+          <a:prstGeom prst="rect">
+            <a:avLst/>
+          </a:prstGeom>
+          <a:noFill/>
+        </p:spPr>
+        <p:txBody>
+          <a:bodyPr wrap="square" lIns="18288" rIns="18288" tIns="0" bIns="0" anchor="t">
+            <a:spAutoFit/>
+          </a:bodyPr>
+          <a:lstStyle/>
+          <a:p>
+            <a:pPr>
+              <a:spcAft>
+                <a:spcPts val="800"/>
+              </a:spcAft>
+            </a:pPr>
+            <a:r>
+              <a:rPr sz="1700" b="0">
+                <a:solidFill>
+                  <a:srgbClr val="102331"/>
+                </a:solidFill>
+                <a:latin typeface="Arial"/>
+              </a:rPr>
+              <a:t>Separate reported facts from interpretation. Flag missing evidence and qualify the conclusion.</a:t>
+            </a:r>
+          </a:p>
+        </p:txBody>
+      </p:sp>
+      <p:sp>
+        <p:nvSpPr>
+          <p:cNvPr id="16" name="Rectangle 15"/>
+          <p:cNvSpPr/>
+          <p:nvPr/>
+        </p:nvSpPr>
+        <p:spPr>
+          <a:xfrm>
+            <a:off x="6400800" y="4023360"/>
+            <a:ext cx="5440680" cy="1325880"/>
+          </a:xfrm>
+          <a:prstGeom prst="rect">
+            <a:avLst/>
+          </a:prstGeom>
+          <a:solidFill>
+            <a:srgbClr val="FFFDF8"/>
+          </a:solidFill>
+          <a:ln>
+            <a:solidFill>
+              <a:srgbClr val="D7D5CB"/>
+            </a:solidFill>
+          </a:ln>
+        </p:spPr>
+        <p:style>
+          <a:lnRef idx="1">
+            <a:schemeClr val="accent1"/>
+          </a:lnRef>
+          <a:fillRef idx="3">
+            <a:schemeClr val="accent1"/>
+          </a:fillRef>
+          <a:effectRef idx="2">
+            <a:schemeClr val="accent1"/>
+          </a:effectRef>
+          <a:fontRef idx="minor">
+            <a:schemeClr val="lt1"/>
+          </a:fontRef>
+        </p:style>
+        <p:txBody>
+          <a:bodyPr rtlCol="0" anchor="ctr"/>
+          <a:lstStyle/>
+          <a:p>
+            <a:pPr algn="ctr"/>
+          </a:p>
+        </p:txBody>
+      </p:sp>
+      <p:sp>
+        <p:nvSpPr>
+          <p:cNvPr id="17" name="TextBox 16"/>
+          <p:cNvSpPr txBox="1"/>
+          <p:nvPr/>
+        </p:nvSpPr>
+        <p:spPr>
+          <a:xfrm>
+            <a:off x="6601968" y="4187952"/>
+            <a:ext cx="5029200" cy="320040"/>
+          </a:xfrm>
+          <a:prstGeom prst="rect">
+            <a:avLst/>
+          </a:prstGeom>
+          <a:noFill/>
+        </p:spPr>
+        <p:txBody>
+          <a:bodyPr wrap="square" lIns="18288" rIns="18288" tIns="0" bIns="0" anchor="t">
+            <a:spAutoFit/>
+          </a:bodyPr>
+          <a:lstStyle/>
+          <a:p>
+            <a:pPr>
+              <a:spcAft>
+                <a:spcPts val="800"/>
+              </a:spcAft>
+            </a:pPr>
+            <a:r>
+              <a:rPr sz="2000" b="1">
+                <a:solidFill>
+                  <a:srgbClr val="1B8077"/>
+                </a:solidFill>
+                <a:latin typeface="Arial"/>
+              </a:rPr>
+              <a:t>Traceable claims</a:t>
+            </a:r>
+          </a:p>
+        </p:txBody>
+      </p:sp>
+      <p:sp>
+        <p:nvSpPr>
+          <p:cNvPr id="18" name="TextBox 17"/>
+          <p:cNvSpPr txBox="1"/>
+          <p:nvPr/>
+        </p:nvSpPr>
+        <p:spPr>
+          <a:xfrm>
+            <a:off x="6601968" y="4636008"/>
+            <a:ext cx="4983480" cy="621792"/>
+          </a:xfrm>
+          <a:prstGeom prst="rect">
+            <a:avLst/>
+          </a:prstGeom>
+          <a:noFill/>
+        </p:spPr>
+        <p:txBody>
+          <a:bodyPr wrap="square" lIns="18288" rIns="18288" tIns="0" bIns="0" anchor="t">
+            <a:spAutoFit/>
+          </a:bodyPr>
+          <a:lstStyle/>
+          <a:p>
+            <a:pPr>
+              <a:spcAft>
+                <a:spcPts val="800"/>
+              </a:spcAft>
+            </a:pPr>
+            <a:r>
+              <a:rPr sz="1700" b="0">
+                <a:solidFill>
+                  <a:srgbClr val="102331"/>
+                </a:solidFill>
+                <a:latin typeface="Arial"/>
+              </a:rPr>
+              <a:t>Follow citations to the publisher and inspect supporting passages, values and calculations.</a:t>
+            </a:r>
+          </a:p>
+        </p:txBody>
+      </p:sp>
+      <p:sp>
+        <p:nvSpPr>
+          <p:cNvPr id="19" name="TextBox 18"/>
+          <p:cNvSpPr txBox="1"/>
+          <p:nvPr/>
+        </p:nvSpPr>
+        <p:spPr>
+          <a:xfrm>
+            <a:off x="685800" y="5806440"/>
+            <a:ext cx="10835640" cy="365760"/>
+          </a:xfrm>
+          <a:prstGeom prst="rect">
+            <a:avLst/>
+          </a:prstGeom>
+          <a:noFill/>
+        </p:spPr>
+        <p:txBody>
+          <a:bodyPr wrap="square" lIns="18288" rIns="18288" tIns="0" bIns="0" anchor="t">
+            <a:spAutoFit/>
+          </a:bodyPr>
+          <a:lstStyle/>
+          <a:p>
+            <a:pPr>
+              <a:spcAft>
+                <a:spcPts val="800"/>
+              </a:spcAft>
+            </a:pPr>
+            <a:r>
+              <a:rPr sz="1700" b="0">
+                <a:solidFill>
+                  <a:srgbClr val="52676D"/>
+                </a:solidFill>
+                <a:latin typeface="Arial"/>
+              </a:rPr>
+              <a:t>Citation checks support review; the team still assesses source quality and business meaning.</a:t>
+            </a:r>
+          </a:p>
+        </p:txBody>
+      </p:sp>
+    </p:spTree>
+  </p:cSld>
+  <p:clrMapOvr>
+    <a:masterClrMapping/>
+  </p:clrMapOvr>
+</p:sld>
+</file>
+
+<file path=ppt/slides/slide6.xml><?xml version="1.0" encoding="utf-8"?>
+<p:sld xmlns:a="http://schemas.openxmlformats.org/drawingml/2006/main" xmlns:p="http://schemas.openxmlformats.org/presentationml/2006/main" xmlns:r="http://schemas.openxmlformats.org/officeDocument/2006/relationships">
+  <p:cSld>
+    <p:bg>
+      <p:bgPr>
+        <a:solidFill>
+          <a:srgbClr val="F4F1EA"/>
+        </a:solidFill>
+        <a:effectLst/>
+      </p:bgPr>
+    </p:bg>
+    <p:spTree>
+      <p:nvGrpSpPr>
+        <p:cNvPr id="1" name=""/>
+        <p:cNvGrpSpPr/>
+        <p:nvPr/>
+      </p:nvGrpSpPr>
+      <p:grpSpPr/>
+      <p:sp>
+        <p:nvSpPr>
+          <p:cNvPr id="2" name="TextBox 1"/>
+          <p:cNvSpPr txBox="1"/>
+          <p:nvPr/>
+        </p:nvSpPr>
+        <p:spPr>
+          <a:xfrm>
+            <a:off x="594360" y="329184"/>
+            <a:ext cx="9144000" cy="201168"/>
+          </a:xfrm>
+          <a:prstGeom prst="rect">
+            <a:avLst/>
+          </a:prstGeom>
+          <a:noFill/>
+        </p:spPr>
+        <p:txBody>
+          <a:bodyPr wrap="square" lIns="18288" rIns="18288" tIns="0" bIns="0" anchor="t">
+            <a:spAutoFit/>
+          </a:bodyPr>
+          <a:lstStyle/>
+          <a:p>
+            <a:pPr>
+              <a:spcAft>
+                <a:spcPts val="800"/>
+              </a:spcAft>
+            </a:pPr>
+            <a:r>
+              <a:rPr sz="1000" b="1">
+                <a:solidFill>
+                  <a:srgbClr val="1B8077"/>
+                </a:solidFill>
+                <a:latin typeface="Arial"/>
+              </a:rPr>
+              <a:t>LONDON MARKET MONITOR  /  ADOPTION</a:t>
+            </a:r>
+          </a:p>
+        </p:txBody>
+      </p:sp>
+      <p:sp>
+        <p:nvSpPr>
+          <p:cNvPr id="3" name="TextBox 2"/>
+          <p:cNvSpPr txBox="1"/>
+          <p:nvPr/>
+        </p:nvSpPr>
+        <p:spPr>
+          <a:xfrm>
+            <a:off x="594360" y="877824"/>
+            <a:ext cx="10972800" cy="1051560"/>
+          </a:xfrm>
+          <a:prstGeom prst="rect">
+            <a:avLst/>
+          </a:prstGeom>
+          <a:noFill/>
+        </p:spPr>
+        <p:txBody>
+          <a:bodyPr wrap="square" lIns="18288" rIns="18288" tIns="0" bIns="0" anchor="t">
+            <a:spAutoFit/>
+          </a:bodyPr>
+          <a:lstStyle/>
+          <a:p>
+            <a:pPr>
+              <a:spcAft>
+                <a:spcPts val="800"/>
+              </a:spcAft>
+            </a:pPr>
+            <a:r>
+              <a:rPr sz="2900" b="1">
+                <a:solidFill>
+                  <a:srgbClr val="102331"/>
+                </a:solidFill>
+                <a:latin typeface="Arial"/>
+              </a:rPr>
+              <a:t>A repeatable routine, with a human at the decision</a:t>
+            </a:r>
+          </a:p>
+        </p:txBody>
+      </p:sp>
+      <p:sp>
+        <p:nvSpPr>
+          <p:cNvPr id="4" name="TextBox 3"/>
+          <p:cNvSpPr txBox="1"/>
+          <p:nvPr/>
+        </p:nvSpPr>
+        <p:spPr>
+          <a:xfrm>
+            <a:off x="612648" y="1691640"/>
+            <a:ext cx="10881360" cy="594360"/>
+          </a:xfrm>
+          <a:prstGeom prst="rect">
+            <a:avLst/>
+          </a:prstGeom>
+          <a:noFill/>
+        </p:spPr>
+        <p:txBody>
+          <a:bodyPr wrap="square" lIns="18288" rIns="18288" tIns="0" bIns="0" anchor="t">
+            <a:spAutoFit/>
+          </a:bodyPr>
+          <a:lstStyle/>
+          <a:p>
+            <a:pPr>
+              <a:spcAft>
+                <a:spcPts val="800"/>
+              </a:spcAft>
+            </a:pPr>
+            <a:r>
+              <a:rPr sz="1700" b="0">
+                <a:solidFill>
+                  <a:srgbClr val="52676D"/>
+                </a:solidFill>
+                <a:latin typeface="Arial"/>
+              </a:rPr>
+              <a:t>Pilot one recurring meeting question and measure whether preparation becomes easier.</a:t>
+            </a:r>
+          </a:p>
+        </p:txBody>
+      </p:sp>
+      <p:sp>
+        <p:nvSpPr>
+          <p:cNvPr id="5" name="TextBox 4"/>
+          <p:cNvSpPr txBox="1"/>
+          <p:nvPr/>
+        </p:nvSpPr>
+        <p:spPr>
+          <a:xfrm>
+            <a:off x="612648" y="6419088"/>
+            <a:ext cx="9601200" cy="201168"/>
+          </a:xfrm>
+          <a:prstGeom prst="rect">
+            <a:avLst/>
+          </a:prstGeom>
+          <a:noFill/>
+        </p:spPr>
+        <p:txBody>
+          <a:bodyPr wrap="square" lIns="18288" rIns="18288" tIns="0" bIns="0" anchor="t">
+            <a:spAutoFit/>
+          </a:bodyPr>
+          <a:lstStyle/>
+          <a:p>
+            <a:pPr>
+              <a:spcAft>
+                <a:spcPts val="800"/>
+              </a:spcAft>
+            </a:pPr>
+            <a:r>
+              <a:rPr sz="900" b="0">
+                <a:solidFill>
+                  <a:srgbClr val="52676D"/>
+                </a:solidFill>
+                <a:latin typeface="Arial"/>
+              </a:rPr>
+              <a:t>EXECUTIVE DECISION BRIEF  |  10 SEPTEMBER 2026</a:t>
+            </a:r>
+          </a:p>
+        </p:txBody>
+      </p:sp>
+      <p:sp>
+        <p:nvSpPr>
+          <p:cNvPr id="6" name="TextBox 5"/>
+          <p:cNvSpPr txBox="1"/>
+          <p:nvPr/>
+        </p:nvSpPr>
+        <p:spPr>
+          <a:xfrm>
+            <a:off x="10972800" y="6400800"/>
+            <a:ext cx="640080" cy="219456"/>
+          </a:xfrm>
+          <a:prstGeom prst="rect">
+            <a:avLst/>
+          </a:prstGeom>
+          <a:noFill/>
+        </p:spPr>
+        <p:txBody>
+          <a:bodyPr wrap="square" lIns="18288" rIns="18288" tIns="0" bIns="0" anchor="t">
+            <a:spAutoFit/>
+          </a:bodyPr>
+          <a:lstStyle/>
+          <a:p>
+            <a:pPr>
+              <a:spcAft>
+                <a:spcPts val="800"/>
+              </a:spcAft>
+            </a:pPr>
+            <a:r>
+              <a:rPr sz="1000" b="0">
+                <a:solidFill>
+                  <a:srgbClr val="52676D"/>
+                </a:solidFill>
+                <a:latin typeface="Arial"/>
+              </a:rPr>
+              <a:t>06 / 06</a:t>
+            </a:r>
+          </a:p>
+        </p:txBody>
+      </p:sp>
+      <p:sp>
+        <p:nvSpPr>
+          <p:cNvPr id="7" name="Rectangle 6"/>
+          <p:cNvSpPr/>
+          <p:nvPr/>
+        </p:nvSpPr>
+        <p:spPr>
+          <a:xfrm>
+            <a:off x="640080" y="2514600"/>
+            <a:ext cx="3566160" cy="1645920"/>
+          </a:xfrm>
+          <a:prstGeom prst="rect">
+            <a:avLst/>
+          </a:prstGeom>
+          <a:solidFill>
+            <a:srgbClr val="FFFDF8"/>
+          </a:solidFill>
+          <a:ln>
+            <a:solidFill>
+              <a:srgbClr val="D7D5CB"/>
+            </a:solidFill>
+          </a:ln>
+        </p:spPr>
+        <p:style>
+          <a:lnRef idx="1">
+            <a:schemeClr val="accent1"/>
+          </a:lnRef>
+          <a:fillRef idx="3">
+            <a:schemeClr val="accent1"/>
+          </a:fillRef>
+          <a:effectRef idx="2">
+            <a:schemeClr val="accent1"/>
+          </a:effectRef>
+          <a:fontRef idx="minor">
+            <a:schemeClr val="lt1"/>
+          </a:fontRef>
+        </p:style>
+        <p:txBody>
+          <a:bodyPr rtlCol="0" anchor="ctr"/>
+          <a:lstStyle/>
+          <a:p>
+            <a:pPr algn="ctr"/>
+          </a:p>
+        </p:txBody>
+      </p:sp>
+      <p:sp>
+        <p:nvSpPr>
+          <p:cNvPr id="8" name="TextBox 7"/>
+          <p:cNvSpPr txBox="1"/>
+          <p:nvPr/>
+        </p:nvSpPr>
+        <p:spPr>
+          <a:xfrm>
+            <a:off x="841247" y="2724912"/>
+            <a:ext cx="3154680" cy="365760"/>
+          </a:xfrm>
+          <a:prstGeom prst="rect">
+            <a:avLst/>
+          </a:prstGeom>
+          <a:noFill/>
+        </p:spPr>
+        <p:txBody>
+          <a:bodyPr wrap="square" lIns="18288" rIns="18288" tIns="0" bIns="0" anchor="t">
+            <a:spAutoFit/>
+          </a:bodyPr>
+          <a:lstStyle/>
+          <a:p>
+            <a:pPr>
+              <a:spcAft>
+                <a:spcPts val="800"/>
+              </a:spcAft>
+            </a:pPr>
+            <a:r>
+              <a:rPr sz="2000" b="1">
+                <a:solidFill>
+                  <a:srgbClr val="1B8077"/>
+                </a:solidFill>
+                <a:latin typeface="Arial"/>
+              </a:rPr>
+              <a:t>1  Refresh</a:t>
+            </a:r>
+          </a:p>
+        </p:txBody>
+      </p:sp>
+      <p:sp>
+        <p:nvSpPr>
+          <p:cNvPr id="9" name="TextBox 8"/>
+          <p:cNvSpPr txBox="1"/>
+          <p:nvPr/>
+        </p:nvSpPr>
+        <p:spPr>
+          <a:xfrm>
+            <a:off x="841247" y="3273552"/>
+            <a:ext cx="3136392" cy="731520"/>
+          </a:xfrm>
+          <a:prstGeom prst="rect">
+            <a:avLst/>
+          </a:prstGeom>
+          <a:noFill/>
+        </p:spPr>
+        <p:txBody>
+          <a:bodyPr wrap="square" lIns="18288" rIns="18288" tIns="0" bIns="0" anchor="t">
+            <a:spAutoFit/>
+          </a:bodyPr>
+          <a:lstStyle/>
+          <a:p>
+            <a:pPr>
+              <a:spcAft>
+                <a:spcPts val="800"/>
+              </a:spcAft>
+            </a:pPr>
+            <a:r>
+              <a:rPr sz="1700" b="0">
+                <a:solidFill>
+                  <a:srgbClr val="102331"/>
+                </a:solidFill>
+                <a:latin typeface="Arial"/>
+              </a:rPr>
+              <a:t>Collect current evidence and establish the comparison baseline.</a:t>
+            </a:r>
+          </a:p>
+        </p:txBody>
+      </p:sp>
+      <p:sp>
+        <p:nvSpPr>
+          <p:cNvPr id="10" name="Rectangle 9"/>
+          <p:cNvSpPr/>
+          <p:nvPr/>
+        </p:nvSpPr>
+        <p:spPr>
+          <a:xfrm>
+            <a:off x="4434840" y="2514600"/>
+            <a:ext cx="3566160" cy="1645920"/>
+          </a:xfrm>
+          <a:prstGeom prst="rect">
+            <a:avLst/>
+          </a:prstGeom>
+          <a:solidFill>
+            <a:srgbClr val="FFFDF8"/>
+          </a:solidFill>
+          <a:ln>
+            <a:solidFill>
+              <a:srgbClr val="D7D5CB"/>
+            </a:solidFill>
+          </a:ln>
+        </p:spPr>
+        <p:style>
+          <a:lnRef idx="1">
+            <a:schemeClr val="accent1"/>
+          </a:lnRef>
+          <a:fillRef idx="3">
+            <a:schemeClr val="accent1"/>
+          </a:fillRef>
+          <a:effectRef idx="2">
+            <a:schemeClr val="accent1"/>
+          </a:effectRef>
+          <a:fontRef idx="minor">
+            <a:schemeClr val="lt1"/>
+          </a:fontRef>
+        </p:style>
+        <p:txBody>
+          <a:bodyPr rtlCol="0" anchor="ctr"/>
+          <a:lstStyle/>
+          <a:p>
+            <a:pPr algn="ctr"/>
+          </a:p>
+        </p:txBody>
+      </p:sp>
+      <p:sp>
+        <p:nvSpPr>
+          <p:cNvPr id="11" name="TextBox 10"/>
+          <p:cNvSpPr txBox="1"/>
+          <p:nvPr/>
+        </p:nvSpPr>
+        <p:spPr>
+          <a:xfrm>
+            <a:off x="4636008" y="2724912"/>
+            <a:ext cx="3154680" cy="365760"/>
+          </a:xfrm>
+          <a:prstGeom prst="rect">
+            <a:avLst/>
+          </a:prstGeom>
+          <a:noFill/>
+        </p:spPr>
+        <p:txBody>
+          <a:bodyPr wrap="square" lIns="18288" rIns="18288" tIns="0" bIns="0" anchor="t">
+            <a:spAutoFit/>
+          </a:bodyPr>
+          <a:lstStyle/>
+          <a:p>
+            <a:pPr>
+              <a:spcAft>
+                <a:spcPts val="800"/>
+              </a:spcAft>
+            </a:pPr>
+            <a:r>
+              <a:rPr sz="2000" b="1">
+                <a:solidFill>
+                  <a:srgbClr val="1B8077"/>
+                </a:solidFill>
+                <a:latin typeface="Arial"/>
+              </a:rPr>
+              <a:t>2  Review</a:t>
+            </a:r>
+          </a:p>
+        </p:txBody>
+      </p:sp>
+      <p:sp>
+        <p:nvSpPr>
           <p:cNvPr id="12" name="TextBox 11"/>
           <p:cNvSpPr txBox="1"/>
           <p:nvPr/>
         </p:nvSpPr>
         <p:spPr>
           <a:xfrm>
-            <a:off x="8339328" y="2148840"/>
-            <a:ext cx="2935224" cy="274320"/>
+            <a:off x="4636008" y="3273552"/>
+            <a:ext cx="3136392" cy="731520"/>
           </a:xfrm>
           <a:prstGeom prst="rect">
             <a:avLst/>
@@ -5330,34 +8257,83 @@
           <a:noFill/>
         </p:spPr>
         <p:txBody>
-          <a:bodyPr wrap="square" lIns="18288" rIns="18288" anchor="t">
+          <a:bodyPr wrap="square" lIns="18288" rIns="18288" tIns="0" bIns="0" anchor="t">
             <a:spAutoFit/>
           </a:bodyPr>
           <a:lstStyle/>
           <a:p>
-            <a:pPr algn="l"/>
-            <a:r>
-              <a:rPr sz="900" b="1">
-                <a:solidFill>
-                  <a:srgbClr val="1B8077"/>
-                </a:solidFill>
-                <a:latin typeface="Aptos"/>
+            <a:pPr>
+              <a:spcAft>
+                <a:spcPts val="800"/>
+              </a:spcAft>
+            </a:pPr>
+            <a:r>
+              <a:rPr sz="1700" b="0">
+                <a:solidFill>
+                  <a:srgbClr val="102331"/>
+                </a:solidFill>
+                <a:latin typeface="Arial"/>
               </a:rPr>
-              <a:t>NEXT, AFTER VALIDATION</a:t>
-            </a:r>
-          </a:p>
-        </p:txBody>
-      </p:sp>
-      <p:sp>
-        <p:nvSpPr>
-          <p:cNvPr id="13" name="TextBox 12"/>
+              <a:t>Read the brief, challenge the key claim and discuss the gaps.</a:t>
+            </a:r>
+          </a:p>
+        </p:txBody>
+      </p:sp>
+      <p:sp>
+        <p:nvSpPr>
+          <p:cNvPr id="13" name="Rectangle 12"/>
+          <p:cNvSpPr/>
+          <p:nvPr/>
+        </p:nvSpPr>
+        <p:spPr>
+          <a:xfrm>
+            <a:off x="8229600" y="2514600"/>
+            <a:ext cx="3566160" cy="1645920"/>
+          </a:xfrm>
+          <a:prstGeom prst="rect">
+            <a:avLst/>
+          </a:prstGeom>
+          <a:solidFill>
+            <a:srgbClr val="FFFDF8"/>
+          </a:solidFill>
+          <a:ln>
+            <a:solidFill>
+              <a:srgbClr val="D7D5CB"/>
+            </a:solidFill>
+          </a:ln>
+        </p:spPr>
+        <p:style>
+          <a:lnRef idx="1">
+            <a:schemeClr val="accent1"/>
+          </a:lnRef>
+          <a:fillRef idx="3">
+            <a:schemeClr val="accent1"/>
+          </a:fillRef>
+          <a:effectRef idx="2">
+            <a:schemeClr val="accent1"/>
+          </a:effectRef>
+          <a:fontRef idx="minor">
+            <a:schemeClr val="lt1"/>
+          </a:fontRef>
+        </p:style>
+        <p:txBody>
+          <a:bodyPr rtlCol="0" anchor="ctr"/>
+          <a:lstStyle/>
+          <a:p>
+            <a:pPr algn="ctr"/>
+          </a:p>
+        </p:txBody>
+      </p:sp>
+      <p:sp>
+        <p:nvSpPr>
+          <p:cNvPr id="14" name="TextBox 13"/>
           <p:cNvSpPr txBox="1"/>
           <p:nvPr/>
         </p:nvSpPr>
         <p:spPr>
           <a:xfrm>
-            <a:off x="8339328" y="2587752"/>
-            <a:ext cx="2935224" cy="2788920"/>
+            <a:off x="8430768" y="2724912"/>
+            <a:ext cx="3154680" cy="365760"/>
           </a:xfrm>
           <a:prstGeom prst="rect">
             <a:avLst/>
@@ -5365,24 +8341,258 @@
           <a:noFill/>
         </p:spPr>
         <p:txBody>
-          <a:bodyPr wrap="square" lIns="18288" rIns="18288" anchor="t">
+          <a:bodyPr wrap="square" lIns="18288" rIns="18288" tIns="0" bIns="0" anchor="t">
             <a:spAutoFit/>
           </a:bodyPr>
           <a:lstStyle/>
           <a:p>
-            <a:pPr algn="l"/>
-            <a:r>
-              <a:rPr sz="1500" b="0">
+            <a:pPr>
+              <a:spcAft>
+                <a:spcPts val="800"/>
+              </a:spcAft>
+            </a:pPr>
+            <a:r>
+              <a:rPr sz="2000" b="1">
+                <a:solidFill>
+                  <a:srgbClr val="1B8077"/>
+                </a:solidFill>
+                <a:latin typeface="Arial"/>
+              </a:rPr>
+              <a:t>3  Decide</a:t>
+            </a:r>
+          </a:p>
+        </p:txBody>
+      </p:sp>
+      <p:sp>
+        <p:nvSpPr>
+          <p:cNvPr id="15" name="TextBox 14"/>
+          <p:cNvSpPr txBox="1"/>
+          <p:nvPr/>
+        </p:nvSpPr>
+        <p:spPr>
+          <a:xfrm>
+            <a:off x="8430768" y="3273552"/>
+            <a:ext cx="3136392" cy="731520"/>
+          </a:xfrm>
+          <a:prstGeom prst="rect">
+            <a:avLst/>
+          </a:prstGeom>
+          <a:noFill/>
+        </p:spPr>
+        <p:txBody>
+          <a:bodyPr wrap="square" lIns="18288" rIns="18288" tIns="0" bIns="0" anchor="t">
+            <a:spAutoFit/>
+          </a:bodyPr>
+          <a:lstStyle/>
+          <a:p>
+            <a:pPr>
+              <a:spcAft>
+                <a:spcPts val="800"/>
+              </a:spcAft>
+            </a:pPr>
+            <a:r>
+              <a:rPr sz="1700" b="0">
                 <a:solidFill>
                   <a:srgbClr val="102331"/>
                 </a:solidFill>
-                <a:latin typeface="Aptos"/>
+                <a:latin typeface="Arial"/>
               </a:rPr>
-              <a:t>Automated monitoring
-Material-change alerts
-Private reports and leasing data
-Team-specific watchlists
-Prioritize additions using observed workflow needs.</a:t>
+              <a:t>Agree the team position and what to watch; carry the cited brief forward.</a:t>
+            </a:r>
+          </a:p>
+        </p:txBody>
+      </p:sp>
+      <p:sp>
+        <p:nvSpPr>
+          <p:cNvPr id="16" name="TextBox 15"/>
+          <p:cNvSpPr txBox="1"/>
+          <p:nvPr/>
+        </p:nvSpPr>
+        <p:spPr>
+          <a:xfrm>
+            <a:off x="685800" y="4526280"/>
+            <a:ext cx="5212080" cy="320040"/>
+          </a:xfrm>
+          <a:prstGeom prst="rect">
+            <a:avLst/>
+          </a:prstGeom>
+          <a:noFill/>
+        </p:spPr>
+        <p:txBody>
+          <a:bodyPr wrap="square" lIns="18288" rIns="18288" tIns="0" bIns="0" anchor="t">
+            <a:spAutoFit/>
+          </a:bodyPr>
+          <a:lstStyle/>
+          <a:p>
+            <a:pPr>
+              <a:spcAft>
+                <a:spcPts val="800"/>
+              </a:spcAft>
+            </a:pPr>
+            <a:r>
+              <a:rPr sz="1900" b="1">
+                <a:solidFill>
+                  <a:srgbClr val="1B8077"/>
+                </a:solidFill>
+                <a:latin typeface="Arial"/>
+              </a:rPr>
+              <a:t>Available in this PoC</a:t>
+            </a:r>
+          </a:p>
+        </p:txBody>
+      </p:sp>
+      <p:sp>
+        <p:nvSpPr>
+          <p:cNvPr id="17" name="TextBox 16"/>
+          <p:cNvSpPr txBox="1"/>
+          <p:nvPr/>
+        </p:nvSpPr>
+        <p:spPr>
+          <a:xfrm>
+            <a:off x="685800" y="4983480"/>
+            <a:ext cx="5166360" cy="822960"/>
+          </a:xfrm>
+          <a:prstGeom prst="rect">
+            <a:avLst/>
+          </a:prstGeom>
+          <a:noFill/>
+        </p:spPr>
+        <p:txBody>
+          <a:bodyPr wrap="square" lIns="18288" rIns="18288" tIns="0" bIns="0" anchor="t">
+            <a:spAutoFit/>
+          </a:bodyPr>
+          <a:lstStyle/>
+          <a:p>
+            <a:pPr>
+              <a:spcAft>
+                <a:spcPts val="800"/>
+              </a:spcAft>
+            </a:pPr>
+            <a:r>
+              <a:rPr sz="1800" b="0">
+                <a:solidFill>
+                  <a:srgbClr val="102331"/>
+                </a:solidFill>
+                <a:latin typeface="Arial"/>
+              </a:rPr>
+              <a:t>On-demand research and refresh, evidence comparison, cited briefs and follow-up questions.</a:t>
+            </a:r>
+          </a:p>
+        </p:txBody>
+      </p:sp>
+      <p:sp>
+        <p:nvSpPr>
+          <p:cNvPr id="18" name="TextBox 17"/>
+          <p:cNvSpPr txBox="1"/>
+          <p:nvPr/>
+        </p:nvSpPr>
+        <p:spPr>
+          <a:xfrm>
+            <a:off x="6400800" y="4526280"/>
+            <a:ext cx="5120640" cy="320040"/>
+          </a:xfrm>
+          <a:prstGeom prst="rect">
+            <a:avLst/>
+          </a:prstGeom>
+          <a:noFill/>
+        </p:spPr>
+        <p:txBody>
+          <a:bodyPr wrap="square" lIns="18288" rIns="18288" tIns="0" bIns="0" anchor="t">
+            <a:spAutoFit/>
+          </a:bodyPr>
+          <a:lstStyle/>
+          <a:p>
+            <a:pPr>
+              <a:spcAft>
+                <a:spcPts val="800"/>
+              </a:spcAft>
+            </a:pPr>
+            <a:r>
+              <a:rPr sz="1900" b="1">
+                <a:solidFill>
+                  <a:srgbClr val="1B8077"/>
+                </a:solidFill>
+                <a:latin typeface="Arial"/>
+              </a:rPr>
+              <a:t>Defined scope</a:t>
+            </a:r>
+          </a:p>
+        </p:txBody>
+      </p:sp>
+      <p:sp>
+        <p:nvSpPr>
+          <p:cNvPr id="19" name="TextBox 18"/>
+          <p:cNvSpPr txBox="1"/>
+          <p:nvPr/>
+        </p:nvSpPr>
+        <p:spPr>
+          <a:xfrm>
+            <a:off x="6400800" y="4983480"/>
+            <a:ext cx="5074920" cy="822960"/>
+          </a:xfrm>
+          <a:prstGeom prst="rect">
+            <a:avLst/>
+          </a:prstGeom>
+          <a:noFill/>
+        </p:spPr>
+        <p:txBody>
+          <a:bodyPr wrap="square" lIns="18288" rIns="18288" tIns="0" bIns="0" anchor="t">
+            <a:spAutoFit/>
+          </a:bodyPr>
+          <a:lstStyle/>
+          <a:p>
+            <a:pPr>
+              <a:spcAft>
+                <a:spcPts val="800"/>
+              </a:spcAft>
+            </a:pPr>
+            <a:r>
+              <a:rPr sz="1800" b="0">
+                <a:solidFill>
+                  <a:srgbClr val="102331"/>
+                </a:solidFill>
+                <a:latin typeface="Arial"/>
+              </a:rPr>
+              <a:t>Accessible sources; human review. Scheduled alerts, private-data connectors and autonomous decisions are outside scope.</a:t>
+            </a:r>
+          </a:p>
+        </p:txBody>
+      </p:sp>
+      <p:sp>
+        <p:nvSpPr>
+          <p:cNvPr id="20" name="TextBox 19"/>
+          <p:cNvSpPr txBox="1"/>
+          <p:nvPr/>
+        </p:nvSpPr>
+        <p:spPr>
+          <a:xfrm>
+            <a:off x="685800" y="5989320"/>
+            <a:ext cx="10789920" cy="274320"/>
+          </a:xfrm>
+          <a:prstGeom prst="rect">
+            <a:avLst/>
+          </a:prstGeom>
+          <a:noFill/>
+        </p:spPr>
+        <p:txBody>
+          <a:bodyPr wrap="square" lIns="18288" rIns="18288" tIns="0" bIns="0" anchor="t">
+            <a:spAutoFit/>
+          </a:bodyPr>
+          <a:lstStyle/>
+          <a:p>
+            <a:pPr>
+              <a:spcAft>
+                <a:spcPts val="800"/>
+              </a:spcAft>
+            </a:pPr>
+            <a:r>
+              <a:rPr sz="1600" b="0">
+                <a:solidFill>
+                  <a:srgbClr val="52676D"/>
+                </a:solidFill>
+                <a:latin typeface="Arial"/>
+              </a:rPr>
+              <a:t>Success measure: time to a usable brief, time to verify a claim and value to the meeting.</a:t>
             </a:r>
           </a:p>
         </p:txBody>
@@ -5713,4 +8923,324 @@
   </a:objectDefaults>
   <a:extraClrSchemeLst/>
 </a:theme>
+</file>
+
+<file path=ppt/theme/theme2.xml><?xml version="1.0" encoding="utf-8"?>
+<a:theme xmlns:a="http://schemas.openxmlformats.org/drawingml/2006/main" name="Office Theme">
+  <a:themeElements>
+    <a:clrScheme name="Office">
+      <a:dk1>
+        <a:sysClr val="windowText" lastClr="000000"/>
+      </a:dk1>
+      <a:lt1>
+        <a:sysClr val="window" lastClr="FFFFFF"/>
+      </a:lt1>
+      <a:dk2>
+        <a:srgbClr val="1F497D"/>
+      </a:dk2>
+      <a:lt2>
+        <a:srgbClr val="EEECE1"/>
+      </a:lt2>
+      <a:accent1>
+        <a:srgbClr val="4F81BD"/>
+      </a:accent1>
+      <a:accent2>
+        <a:srgbClr val="C0504D"/>
+      </a:accent2>
+      <a:accent3>
+        <a:srgbClr val="9BBB59"/>
+      </a:accent3>
+      <a:accent4>
+        <a:srgbClr val="8064A2"/>
+      </a:accent4>
+      <a:accent5>
+        <a:srgbClr val="4BACC6"/>
+      </a:accent5>
+      <a:accent6>
+        <a:srgbClr val="F79646"/>
+      </a:accent6>
+      <a:hlink>
+        <a:srgbClr val="0000FF"/>
+      </a:hlink>
+      <a:folHlink>
+        <a:srgbClr val="800080"/>
+      </a:folHlink>
+    </a:clrScheme>
+    <a:fontScheme name="Office">
+      <a:majorFont>
+        <a:latin typeface="Calibri"/>
+        <a:ea typeface=""/>
+        <a:cs typeface=""/>
+        <a:font script="Jpan" typeface="ＭＳ Ｐゴシック"/>
+        <a:font script="Hang" typeface="맑은 고딕"/>
+        <a:font script="Hans" typeface="宋体"/>
+        <a:font script="Hant" typeface="新細明體"/>
+        <a:font script="Arab" typeface="Times New Roman"/>
+        <a:font script="Hebr" typeface="Times New Roman"/>
+        <a:font script="Thai" typeface="Angsana New"/>
+        <a:font script="Ethi" typeface="Nyala"/>
+        <a:font script="Beng" typeface="Vrinda"/>
+        <a:font script="Gujr" typeface="Shruti"/>
+        <a:font script="Khmr" typeface="MoolBoran"/>
+        <a:font script="Knda" typeface="Tunga"/>
+        <a:font script="Guru" typeface="Raavi"/>
+        <a:font script="Cans" typeface="Euphemia"/>
+        <a:font script="Cher" typeface="Plantagenet Cherokee"/>
+        <a:font script="Yiii" typeface="Microsoft Yi Baiti"/>
+        <a:font script="Tibt" typeface="Microsoft Himalaya"/>
+        <a:font script="Thaa" typeface="MV Boli"/>
+        <a:font script="Deva" typeface="Mangal"/>
+        <a:font script="Telu" typeface="Gautami"/>
+        <a:font script="Taml" typeface="Latha"/>
+        <a:font script="Syrc" typeface="Estrangelo Edessa"/>
+        <a:font script="Orya" typeface="Kalinga"/>
+        <a:font script="Mlym" typeface="Kartika"/>
+        <a:font script="Laoo" typeface="DokChampa"/>
+        <a:font script="Sinh" typeface="Iskoola Pota"/>
+        <a:font script="Mong" typeface="Mongolian Baiti"/>
+        <a:font script="Viet" typeface="Times New Roman"/>
+        <a:font script="Uigh" typeface="Microsoft Uighur"/>
+        <a:font script="Geor" typeface="Sylfaen"/>
+      </a:majorFont>
+      <a:minorFont>
+        <a:latin typeface="Calibri"/>
+        <a:ea typeface=""/>
+        <a:cs typeface=""/>
+        <a:font script="Jpan" typeface="ＭＳ Ｐゴシック"/>
+        <a:font script="Hang" typeface="맑은 고딕"/>
+        <a:font script="Hans" typeface="宋体"/>
+        <a:font script="Hant" typeface="新細明體"/>
+        <a:font script="Arab" typeface="Arial"/>
+        <a:font script="Hebr" typeface="Arial"/>
+        <a:font script="Thai" typeface="Cordia New"/>
+        <a:font script="Ethi" typeface="Nyala"/>
+        <a:font script="Beng" typeface="Vrinda"/>
+        <a:font script="Gujr" typeface="Shruti"/>
+        <a:font script="Khmr" typeface="DaunPenh"/>
+        <a:font script="Knda" typeface="Tunga"/>
+        <a:font script="Guru" typeface="Raavi"/>
+        <a:font script="Cans" typeface="Euphemia"/>
+        <a:font script="Cher" typeface="Plantagenet Cherokee"/>
+        <a:font script="Yiii" typeface="Microsoft Yi Baiti"/>
+        <a:font script="Tibt" typeface="Microsoft Himalaya"/>
+        <a:font script="Thaa" typeface="MV Boli"/>
+        <a:font script="Deva" typeface="Mangal"/>
+        <a:font script="Telu" typeface="Gautami"/>
+        <a:font script="Taml" typeface="Latha"/>
+        <a:font script="Syrc" typeface="Estrangelo Edessa"/>
+        <a:font script="Orya" typeface="Kalinga"/>
+        <a:font script="Mlym" typeface="Kartika"/>
+        <a:font script="Laoo" typeface="DokChampa"/>
+        <a:font script="Sinh" typeface="Iskoola Pota"/>
+        <a:font script="Mong" typeface="Mongolian Baiti"/>
+        <a:font script="Viet" typeface="Arial"/>
+        <a:font script="Uigh" typeface="Microsoft Uighur"/>
+        <a:font script="Geor" typeface="Sylfaen"/>
+      </a:minorFont>
+    </a:fontScheme>
+    <a:fmtScheme name="Office">
+      <a:fillStyleLst>
+        <a:solidFill>
+          <a:schemeClr val="phClr"/>
+        </a:solidFill>
+        <a:gradFill rotWithShape="1">
+          <a:gsLst>
+            <a:gs pos="0">
+              <a:schemeClr val="phClr">
+                <a:tint val="50000"/>
+                <a:satMod val="300000"/>
+              </a:schemeClr>
+            </a:gs>
+            <a:gs pos="35000">
+              <a:schemeClr val="phClr">
+                <a:tint val="37000"/>
+                <a:satMod val="300000"/>
+              </a:schemeClr>
+            </a:gs>
+            <a:gs pos="100000">
+              <a:schemeClr val="phClr">
+                <a:tint val="15000"/>
+                <a:satMod val="350000"/>
+              </a:schemeClr>
+            </a:gs>
+          </a:gsLst>
+          <a:lin ang="16200000" scaled="1"/>
+        </a:gradFill>
+        <a:gradFill rotWithShape="1">
+          <a:gsLst>
+            <a:gs pos="0">
+              <a:schemeClr val="phClr">
+                <a:tint val="100000"/>
+                <a:shade val="100000"/>
+                <a:satMod val="130000"/>
+              </a:schemeClr>
+            </a:gs>
+            <a:gs pos="100000">
+              <a:schemeClr val="phClr">
+                <a:tint val="50000"/>
+                <a:shade val="100000"/>
+                <a:satMod val="350000"/>
+              </a:schemeClr>
+            </a:gs>
+          </a:gsLst>
+          <a:lin ang="16200000" scaled="0"/>
+        </a:gradFill>
+      </a:fillStyleLst>
+      <a:lnStyleLst>
+        <a:ln w="9525" cap="flat" cmpd="sng" algn="ctr">
+          <a:solidFill>
+            <a:schemeClr val="phClr">
+              <a:shade val="95000"/>
+              <a:satMod val="105000"/>
+            </a:schemeClr>
+          </a:solidFill>
+          <a:prstDash val="solid"/>
+        </a:ln>
+        <a:ln w="25400" cap="flat" cmpd="sng" algn="ctr">
+          <a:solidFill>
+            <a:schemeClr val="phClr"/>
+          </a:solidFill>
+          <a:prstDash val="solid"/>
+        </a:ln>
+        <a:ln w="38100" cap="flat" cmpd="sng" algn="ctr">
+          <a:solidFill>
+            <a:schemeClr val="phClr"/>
+          </a:solidFill>
+          <a:prstDash val="solid"/>
+        </a:ln>
+      </a:lnStyleLst>
+      <a:effectStyleLst>
+        <a:effectStyle>
+          <a:effectLst>
+            <a:outerShdw blurRad="40000" dist="20000" dir="5400000" rotWithShape="0">
+              <a:srgbClr val="000000">
+                <a:alpha val="38000"/>
+              </a:srgbClr>
+            </a:outerShdw>
+          </a:effectLst>
+        </a:effectStyle>
+        <a:effectStyle>
+          <a:effectLst>
+            <a:outerShdw blurRad="40000" dist="23000" dir="5400000" rotWithShape="0">
+              <a:srgbClr val="000000">
+                <a:alpha val="35000"/>
+              </a:srgbClr>
+            </a:outerShdw>
+          </a:effectLst>
+        </a:effectStyle>
+        <a:effectStyle>
+          <a:effectLst>
+            <a:outerShdw blurRad="40000" dist="23000" dir="5400000" rotWithShape="0">
+              <a:srgbClr val="000000">
+                <a:alpha val="35000"/>
+              </a:srgbClr>
+            </a:outerShdw>
+          </a:effectLst>
+          <a:scene3d>
+            <a:camera prst="orthographicFront">
+              <a:rot lat="0" lon="0" rev="0"/>
+            </a:camera>
+            <a:lightRig rig="threePt" dir="t">
+              <a:rot lat="0" lon="0" rev="1200000"/>
+            </a:lightRig>
+          </a:scene3d>
+          <a:sp3d>
+            <a:bevelT w="63500" h="25400"/>
+          </a:sp3d>
+        </a:effectStyle>
+      </a:effectStyleLst>
+      <a:bgFillStyleLst>
+        <a:solidFill>
+          <a:schemeClr val="phClr"/>
+        </a:solidFill>
+        <a:gradFill rotWithShape="1">
+          <a:gsLst>
+            <a:gs pos="0">
+              <a:schemeClr val="phClr">
+                <a:tint val="40000"/>
+                <a:satMod val="350000"/>
+              </a:schemeClr>
+            </a:gs>
+            <a:gs pos="40000">
+              <a:schemeClr val="phClr">
+                <a:tint val="45000"/>
+                <a:shade val="99000"/>
+                <a:satMod val="350000"/>
+              </a:schemeClr>
+            </a:gs>
+            <a:gs pos="100000">
+              <a:schemeClr val="phClr">
+                <a:shade val="20000"/>
+                <a:satMod val="255000"/>
+              </a:schemeClr>
+            </a:gs>
+          </a:gsLst>
+          <a:path path="circle">
+            <a:fillToRect l="50000" t="-80000" r="50000" b="180000"/>
+          </a:path>
+        </a:gradFill>
+        <a:gradFill rotWithShape="1">
+          <a:gsLst>
+            <a:gs pos="0">
+              <a:schemeClr val="phClr">
+                <a:tint val="80000"/>
+                <a:satMod val="300000"/>
+              </a:schemeClr>
+            </a:gs>
+            <a:gs pos="100000">
+              <a:schemeClr val="phClr">
+                <a:shade val="30000"/>
+                <a:satMod val="200000"/>
+              </a:schemeClr>
+            </a:gs>
+          </a:gsLst>
+          <a:path path="circle">
+            <a:fillToRect l="50000" t="50000" r="50000" b="50000"/>
+          </a:path>
+        </a:gradFill>
+      </a:bgFillStyleLst>
+    </a:fmtScheme>
+  </a:themeElements>
+  <a:objectDefaults>
+    <a:spDef>
+      <a:spPr/>
+      <a:bodyPr/>
+      <a:lstStyle/>
+      <a:style>
+        <a:lnRef idx="1">
+          <a:schemeClr val="accent1"/>
+        </a:lnRef>
+        <a:fillRef idx="3">
+          <a:schemeClr val="accent1"/>
+        </a:fillRef>
+        <a:effectRef idx="2">
+          <a:schemeClr val="accent1"/>
+        </a:effectRef>
+        <a:fontRef idx="minor">
+          <a:schemeClr val="lt1"/>
+        </a:fontRef>
+      </a:style>
+    </a:spDef>
+    <a:lnDef>
+      <a:spPr/>
+      <a:bodyPr/>
+      <a:lstStyle/>
+      <a:style>
+        <a:lnRef idx="2">
+          <a:schemeClr val="accent1"/>
+        </a:lnRef>
+        <a:fillRef idx="0">
+          <a:schemeClr val="accent1"/>
+        </a:fillRef>
+        <a:effectRef idx="1">
+          <a:schemeClr val="accent1"/>
+        </a:effectRef>
+        <a:fontRef idx="minor">
+          <a:schemeClr val="tx1"/>
+        </a:fontRef>
+      </a:style>
+    </a:lnDef>
+  </a:objectDefaults>
+  <a:extraClrSchemeLst/>
+</a:theme>
 </file>